--- a/Projectile and Circular Motion.pptx
+++ b/Projectile and Circular Motion.pptx
@@ -615,7 +615,7 @@
           <a:lstStyle/>
           <a:p>
             <a:r>
-              <a:t>Open with the vivid images rather than the definition. Ask students what a diver's fall, welding sparks, and a fountain jet could possibly have in common - let them sit with that for a second before revealing it's the same geometric shape. This is the "aha" that should anchor the whole first half of the lesson: gravity writes the same signature every time.</a:t>
+              <a:t>Open with the vivid images rather than the definition. Ask students what a diver's fall, welding sparks, and a fountain jet could possibly have in common - let them sit with that for a second before revealing it's the same geometric shape. This is the aha that should anchor the whole first half of the lesson: gravity writes the same signature every time.</a:t>
             </a:r>
           </a:p>
         </p:txBody>
@@ -755,7 +755,7 @@
           <a:lstStyle/>
           <a:p>
             <a:r>
-              <a:t>This is a minimal decomposition - one vector, split into two pieces. Be explicit that this is not the full vector-addition unit students will get in a week; it's just enough trigonometry to separate one launch velocity into its horizontal and vertical "ingredients."</a:t>
+              <a:t>This is a minimal decomposition - one vector, split into two pieces. Be explicit that this is not the full vector-addition unit students will get in a week; it's just enough trigonometry to separate one launch velocity into its horizontal and vertical ingredients.</a:t>
             </a:r>
           </a:p>
         </p:txBody>
@@ -895,7 +895,7 @@
           <a:lstStyle/>
           <a:p>
             <a:r>
-              <a:t>This slide is the payoff of Slide 5 - students now see the independence principle turned into an actual toolkit. Emphasize the problem-solving habit: horizontal motion is always the "easy" constant-velocity equation; vertical motion is always the familiar free-fall equation from the previous unit, just relabeled with y instead of x.</a:t>
+              <a:t>This slide is the payoff of Slide 5 - students now see the independence principle turned into an actual toolkit. Emphasize the problem-solving habit: horizontal motion is always the easy constant-velocity equation; vertical motion is always the familiar free-fall equation from the previous unit, just relabeled with y instead of x.</a:t>
             </a:r>
           </a:p>
         </p:txBody>
@@ -1105,7 +1105,7 @@
           <a:lstStyle/>
           <a:p>
             <a:r>
-              <a:t>Tie this directly back to the puma example coming up next - animals and athletes usually can't easily change their launch angle mid-jump, but they absolutely can generate more speed through stronger muscles or a longer running start. That's the real-world lever most commonly pulled.</a:t>
+              <a:t>Tie this directly back to the puma example - animals and athletes usually can't easily change their launch angle mid-jump, but they absolutely can generate more speed through stronger muscles or a longer running start. That's the real-world lever most commonly pulled.</a:t>
             </a:r>
           </a:p>
         </p:txBody>
@@ -1175,7 +1175,7 @@
           <a:lstStyle/>
           <a:p>
             <a:r>
-              <a:t>This is a short signpost slide, not a deep dive - just enough to reset student expectations before the vocabulary shift. Ask: "if speed isn't changing, is this thing accelerating at all?" Don't answer yet - that tension carries directly into Slide 17.</a:t>
+              <a:t>This is a short signpost slide, not a deep dive - just enough to reset student expectations before the vocabulary shift. Ask: if speed isn't changing, is this thing accelerating at all? Don't answer yet - that tension carries directly into the next few slides.</a:t>
             </a:r>
           </a:p>
         </p:txBody>
@@ -1245,7 +1245,7 @@
           <a:lstStyle/>
           <a:p>
             <a:r>
-              <a:t>Draw the "always tangent" idea out physically - imagine releasing a ball mid-spin on a string; it flies off in a straight line tangent to the circle at the release point, not toward the center and not along the circle. That tangent direction is the velocity direction at that instant.</a:t>
+              <a:t>Draw the always-tangent idea out physically - imagine releasing a ball mid-spin on a string; it flies off in a straight line tangent to the circle at the release point, not toward the center and not along the circle. That tangent direction is the velocity direction at that instant.</a:t>
             </a:r>
           </a:p>
         </p:txBody>
@@ -1403,7 +1403,7 @@
           <a:lstStyle/>
           <a:p>
             <a:r>
-              <a:t>This deserves real airtime - it's one of the most persistent misconceptions in the whole unit. Use a whirling ball on a string: ask "is its speed changing?" (no) "is its direction changing?" (constantly) "so is it accelerating?" (yes). Make students say the answer out loud before moving on.</a:t>
+              <a:t>This deserves real airtime - it's one of the most persistent misconceptions in the whole unit. Use a whirling ball on a string: ask is its speed changing? (no) is its direction changing? (constantly) so is it accelerating? (yes). Make students say the answer out loud before moving on.</a:t>
             </a:r>
           </a:p>
         </p:txBody>
@@ -1473,7 +1473,7 @@
           <a:lstStyle/>
           <a:p>
             <a:r>
-              <a:t>Don't derive this from scratch - that similar-triangles proof belongs in a more advanced course. What matters here is the shape of the relationship: acceleration grows with the square of speed, and grows as radius shrinks. Have students predict, before revealing the formula, whether doubling the speed should double or quadruple the acceleration - most will guess wrong, which makes the reveal land harder.</a:t>
+              <a:t>Don't derive this from scratch - that similar-triangles proof belongs in a more advanced course. What matters here is the shape of the relationship: acceleration grows with the square of speed, and grows as radius shrinks. Have students predict, before revealing the formula, whether doubling the speed should double or quadruple the acceleration - most will guess wrong.</a:t>
             </a:r>
           </a:p>
         </p:txBody>
@@ -1543,7 +1543,7 @@
           <a:lstStyle/>
           <a:p>
             <a:r>
-              <a:t>Frame this as a practical translation tool rather than new physics - it converts between "how fast" and "how long per lap," two ways of describing the exact same motion. This sets up both upcoming worked examples, which each hand students a period-like quantity instead of a speed.</a:t>
+              <a:t>Frame this as a practical translation tool rather than new physics - it converts between how fast and how long per lap, two ways of describing the exact same motion. This sets up both upcoming worked examples, which each hand students a period-like quantity instead of a speed.</a:t>
             </a:r>
           </a:p>
         </p:txBody>
@@ -1613,7 +1613,7 @@
           <a:lstStyle/>
           <a:p>
             <a:r>
-              <a:t>Keep this conceptual and forward-looking rather than diving into free-body diagrams - that formal force analysis is intentionally saved for the Newton's Laws lesson. The goal today is just for students to recognize that "acceleration toward the center" implies "some force pushing toward the center," and to start noticing that force in everyday situations (a car turning, a swung object, an orbiting satellite).</a:t>
+              <a:t>Keep this conceptual and forward-looking rather than diving into free-body diagrams - that formal force analysis is intentionally saved for the Newton's Laws lesson. The goal today is just for students to recognize that acceleration toward the center implies some force pushing toward the center, and to start noticing that force in everyday situations.</a:t>
             </a:r>
           </a:p>
         </p:txBody>
@@ -1683,7 +1683,7 @@
           <a:lstStyle/>
           <a:p>
             <a:r>
-              <a:t>Be upfront about this with students rather than papering over it - it's a good moment to model how real curricula sometimes split a single topic across two chapters, and how a careful student can still connect the dots. This also reinforces the pacing boundary from the syllabus: full force-based problem-solving (with free-body diagrams) is intentionally deferred to August 4th.</a:t>
+              <a:t>Be upfront about this with students rather than papering over it - it's a good moment to model how real curricula sometimes split a single topic across two chapters, and how a careful student can still connect the dots. Full force-based problem-solving with free-body diagrams is intentionally deferred to August 4th.</a:t>
             </a:r>
           </a:p>
         </p:txBody>
@@ -1753,7 +1753,7 @@
           <a:lstStyle/>
           <a:p>
             <a:r>
-              <a:t>This slide is the formal launch of the "carry out first-hand investigations" half of the competency. Spend real time here making sure students can articulate, in their own words, which variables they're changing on purpose versus which one they're just watching change as a result.</a:t>
+              <a:t>This slide is the formal launch of the carry-out-first-hand-investigations half of the competency. Spend real time here making sure students can articulate, in their own words, which variables they're changing on purpose versus which one they're just watching change as a result.</a:t>
             </a:r>
           </a:p>
         </p:txBody>
@@ -1823,7 +1823,7 @@
           <a:lstStyle/>
           <a:p>
             <a:r>
-              <a:t>Walk through the physical logic of why this setup works: the hanging washers provide a known, measurable force pulling the stopper inward - that known force stands in for centripetal force, letting students work backward to test the v-squared/r relationship even without directly measuring force in the string itself. Emphasize basic safety: clear space, secure grip, safety glasses if available.</a:t>
+              <a:t>Walk through the physical logic of why this setup works: the hanging washers provide a known, measurable force pulling the stopper inward - that known force stands in for centripetal force, letting students work backward to test the v-squared over r relationship. Emphasize basic safety: clear space, secure grip, safety glasses if available.</a:t>
             </a:r>
           </a:p>
         </p:txBody>
@@ -1963,7 +1963,7 @@
           <a:lstStyle/>
           <a:p>
             <a:r>
-              <a:t>This is where the lab work gets tied back to the theory taught earlier in the period. Push students to use the word "consistent with" (or "inconsistent with," if their data doesn't match) rather than just describing what happened - that's the difference between reporting and interpreting data.</a:t>
+              <a:t>This is where the lab work gets tied back to the theory taught earlier in the period. Push students to use the phrase consistent with (or inconsistent with, if their data doesn't match) rather than just describing what happened - that's the difference between reporting and interpreting data.</a:t>
             </a:r>
           </a:p>
         </p:txBody>
@@ -2033,7 +2033,7 @@
           <a:lstStyle/>
           <a:p>
             <a:r>
-              <a:t>Use this table as the closing synthesis - students should be able to fill in every cell from memory by now. This is also a natural moment to acknowledge, briefly, that both types of motion assumed a stationary observer watching from the ground - a detail that becomes important very soon.</a:t>
+              <a:t>Use this comparison as the closing synthesis - students should be able to fill in every point from memory by now. This is also a natural moment to acknowledge, briefly, that both types of motion assumed a stationary observer watching from the ground - a detail that becomes important very soon.</a:t>
             </a:r>
           </a:p>
         </p:txBody>
@@ -6719,14 +6719,9 @@
           </a:bodyPr>
           <a:lstStyle/>
           <a:p>
-            <a:pPr algn="ctr">
-              <a:buNone/>
-            </a:pPr>
+            <a:pPr algn="ctr"/>
             <a:r>
               <a:rPr sz="3800" b="1">
-                <a:solidFill>
-                  <a:srgbClr val="1A1A1A"/>
-                </a:solidFill>
                 <a:latin typeface="TT Hoves ExtraBold"/>
               </a:rPr>
               <a:t>Projectile &amp; Circular Motion</a:t>
@@ -6756,14 +6751,9 @@
           </a:bodyPr>
           <a:lstStyle/>
           <a:p>
-            <a:pPr algn="ctr">
-              <a:buNone/>
-            </a:pPr>
+            <a:pPr algn="ctr"/>
             <a:r>
               <a:rPr sz="1800" i="1">
-                <a:solidFill>
-                  <a:srgbClr val="6E6E6E"/>
-                </a:solidFill>
                 <a:latin typeface="TT Hoves"/>
               </a:rPr>
               <a:t>Motion in Two Dimensions  —  A First-Hand Investigation</a:t>
@@ -7679,8 +7669,8 @@
         </p:nvSpPr>
         <p:spPr>
           <a:xfrm>
-            <a:off x="694944" y="420624"/>
-            <a:ext cx="10789920" cy="1024128"/>
+            <a:off x="699400" y="619760"/>
+            <a:ext cx="11441800" cy="830997"/>
           </a:xfrm>
           <a:prstGeom prst="rect">
             <a:avLst/>
@@ -7694,11 +7684,25 @@
           <a:lstStyle/>
           <a:p>
             <a:r>
-              <a:rPr sz="3000" b="1">
-                <a:solidFill>
-                  <a:srgbClr val="1A1A1A"/>
-                </a:solidFill>
-                <a:latin typeface="TT Hoves ExtraBold"/>
+              <a:rPr lang="en-PH" sz="3300" dirty="0">
+                <a:gradFill flip="none" rotWithShape="1">
+                  <a:gsLst>
+                    <a:gs pos="0">
+                      <a:srgbClr val="B45404"/>
+                    </a:gs>
+                    <a:gs pos="50000">
+                      <a:srgbClr val="E86C06"/>
+                    </a:gs>
+                    <a:gs pos="100000">
+                      <a:srgbClr val="F9770B"/>
+                    </a:gs>
+                  </a:gsLst>
+                  <a:path path="circle">
+                    <a:fillToRect l="50000" t="50000" r="50000" b="50000"/>
+                  </a:path>
+                  <a:tileRect/>
+                </a:gradFill>
+                <a:latin typeface="TT Hoves ExtraBold" panose="02000903040000020004" pitchFamily="50" charset="0"/>
               </a:rPr>
               <a:t>Motion in Two Dimensions — Today's Target</a:t>
             </a:r>
@@ -7836,58 +7840,20 @@
       </p:sp>
       <p:sp>
         <p:nvSpPr>
-          <p:cNvPr id="13" name="Rectangle 12"/>
-          <p:cNvSpPr/>
+          <p:cNvPr id="9" name="TextBox 8">
+            <a:extLst>
+              <a:ext uri="{FF2B5EF4-FFF2-40B4-BE49-F238E27FC236}">
+                <a16:creationId xmlns:a16="http://schemas.microsoft.com/office/drawing/2014/main" id="{73C00714-0F36-6BC8-C038-4D7F36CEB239}"/>
+              </a:ext>
+            </a:extLst>
+          </p:cNvPr>
+          <p:cNvSpPr txBox="1"/>
           <p:nvPr/>
         </p:nvSpPr>
         <p:spPr>
           <a:xfrm>
-            <a:off x="713232" y="1481328"/>
-            <a:ext cx="960120" cy="68580"/>
-          </a:xfrm>
-          <a:prstGeom prst="rect">
-            <a:avLst/>
-          </a:prstGeom>
-          <a:solidFill>
-            <a:srgbClr val="F9770B"/>
-          </a:solidFill>
-          <a:ln>
-            <a:noFill/>
-          </a:ln>
-          <a:effectLst/>
-        </p:spPr>
-        <p:style>
-          <a:lnRef idx="1">
-            <a:schemeClr val="accent1"/>
-          </a:lnRef>
-          <a:fillRef idx="3">
-            <a:schemeClr val="accent1"/>
-          </a:fillRef>
-          <a:effectRef idx="2">
-            <a:schemeClr val="accent1"/>
-          </a:effectRef>
-          <a:fontRef idx="minor">
-            <a:schemeClr val="lt1"/>
-          </a:fontRef>
-        </p:style>
-        <p:txBody>
-          <a:bodyPr rtlCol="0" anchor="ctr"/>
-          <a:lstStyle/>
-          <a:p>
-            <a:pPr algn="ctr"/>
-          </a:p>
-        </p:txBody>
-      </p:sp>
-      <p:sp>
-        <p:nvSpPr>
-          <p:cNvPr id="14" name="TextBox 13"/>
-          <p:cNvSpPr txBox="1"/>
-          <p:nvPr/>
-        </p:nvSpPr>
-        <p:spPr>
-          <a:xfrm>
-            <a:off x="694944" y="1691640"/>
-            <a:ext cx="10789920" cy="1280160"/>
+            <a:off x="699058" y="1536192"/>
+            <a:ext cx="10671048" cy="4270248"/>
           </a:xfrm>
           <a:prstGeom prst="rect">
             <a:avLst/>
@@ -7895,299 +7861,162 @@
           <a:noFill/>
         </p:spPr>
         <p:txBody>
-          <a:bodyPr wrap="square" anchor="t">
-            <a:spAutoFit/>
+          <a:bodyPr wrap="square" rtlCol="0">
+            <a:noAutofit/>
           </a:bodyPr>
           <a:lstStyle/>
           <a:p>
-            <a:pPr algn="l" marL="320040" indent="-320040">
+            <a:pPr marL="457200" indent="-457200" algn="l">
               <a:lnSpc>
-                <a:spcPct val="103000"/>
+                <a:spcPct val="104000"/>
               </a:lnSpc>
               <a:spcBef>
                 <a:spcPts val="0"/>
               </a:spcBef>
               <a:spcAft>
-                <a:spcPts val="800"/>
+                <a:spcPts val="700"/>
               </a:spcAft>
-              <a:buClr>
-                <a:srgbClr val="F9770B"/>
-              </a:buClr>
-              <a:buFont typeface="Arial"/>
+              <a:buFont typeface="Arial" pitchFamily="34" charset="0"/>
               <a:buChar char="•"/>
             </a:pPr>
             <a:r>
-              <a:rPr sz="1800">
-                <a:solidFill>
-                  <a:srgbClr val="262626"/>
-                </a:solidFill>
+              <a:rPr sz="2200">
                 <a:latin typeface="TT Hoves"/>
               </a:rPr>
               <a:t>Today's competency, stated plainly: </a:t>
             </a:r>
             <a:r>
-              <a:rPr sz="1800" i="1">
-                <a:solidFill>
-                  <a:srgbClr val="262626"/>
-                </a:solidFill>
+              <a:rPr sz="2200" i="1">
                 <a:latin typeface="TT Hoves"/>
               </a:rPr>
               <a:t>carry out first-hand investigations involving 2-dimensional projectile and circular motion to investigate factors such as speed, radius, and centripetal force.</a:t>
             </a:r>
           </a:p>
           <a:p>
-            <a:pPr algn="l" marL="320040" indent="-320040">
+            <a:pPr marL="457200" indent="-457200" algn="l">
               <a:lnSpc>
-                <a:spcPct val="103000"/>
+                <a:spcPct val="104000"/>
               </a:lnSpc>
               <a:spcBef>
                 <a:spcPts val="0"/>
               </a:spcBef>
               <a:spcAft>
-                <a:spcPts val="800"/>
+                <a:spcPts val="700"/>
               </a:spcAft>
-              <a:buClr>
-                <a:srgbClr val="F9770B"/>
-              </a:buClr>
-              <a:buFont typeface="Arial"/>
+              <a:buFont typeface="Arial" pitchFamily="34" charset="0"/>
               <a:buChar char="•"/>
             </a:pPr>
             <a:r>
-              <a:rPr sz="1800">
-                <a:solidFill>
-                  <a:srgbClr val="262626"/>
-                </a:solidFill>
+              <a:rPr sz="2200">
                 <a:latin typeface="TT Hoves"/>
               </a:rPr>
               <a:t>Two big ideas for the day, side by side:</a:t>
             </a:r>
           </a:p>
-        </p:txBody>
-      </p:sp>
-      <p:graphicFrame>
-        <p:nvGraphicFramePr>
-          <p:cNvPr id="15" name="Table 14"/>
-          <p:cNvGraphicFramePr>
-            <a:graphicFrameLocks noGrp="1"/>
-          </p:cNvGraphicFramePr>
-          <p:nvPr/>
-        </p:nvGraphicFramePr>
-        <p:xfrm>
-          <a:off x="694944" y="3063240"/>
-          <a:ext cx="10789920" cy="2331720"/>
-        </p:xfrm>
-        <a:graphic>
-          <a:graphicData uri="http://schemas.openxmlformats.org/drawingml/2006/table">
-            <a:tbl>
-              <a:tblPr firstRow="1">
-                <a:tableStyleId>{5C22544A-7EE6-4342-B048-85BDC9FD1C3A}</a:tableStyleId>
-              </a:tblPr>
-              <a:tblGrid>
-                <a:gridCol w="5394960"/>
-                <a:gridCol w="5394960"/>
-              </a:tblGrid>
-              <a:tr h="777240">
-                <a:tc>
-                  <a:txBody>
-                    <a:bodyPr wrap="square"/>
-                    <a:lstStyle/>
-                    <a:p>
-                      <a:pPr algn="l"/>
-                      <a:r>
-                        <a:rPr sz="1800" b="1">
-                          <a:solidFill>
-                            <a:srgbClr val="FFFFFF"/>
-                          </a:solidFill>
-                          <a:latin typeface="TT Hoves"/>
-                        </a:rPr>
-                        <a:t>Projectile Motion</a:t>
-                      </a:r>
-                    </a:p>
-                  </a:txBody>
-                  <a:tcPr marL="114300" marR="114300" marT="63500" marB="63500" anchor="ctr">
-                    <a:solidFill>
-                      <a:srgbClr val="F9770B"/>
-                    </a:solidFill>
-                  </a:tcPr>
-                </a:tc>
-                <a:tc>
-                  <a:txBody>
-                    <a:bodyPr wrap="square"/>
-                    <a:lstStyle/>
-                    <a:p>
-                      <a:pPr algn="l"/>
-                      <a:r>
-                        <a:rPr sz="1800" b="1">
-                          <a:solidFill>
-                            <a:srgbClr val="FFFFFF"/>
-                          </a:solidFill>
-                          <a:latin typeface="TT Hoves"/>
-                        </a:rPr>
-                        <a:t>Circular Motion</a:t>
-                      </a:r>
-                    </a:p>
-                  </a:txBody>
-                  <a:tcPr marL="114300" marR="114300" marT="63500" marB="63500" anchor="ctr">
-                    <a:solidFill>
-                      <a:srgbClr val="F9770B"/>
-                    </a:solidFill>
-                  </a:tcPr>
-                </a:tc>
-              </a:tr>
-              <a:tr h="777240">
-                <a:tc>
-                  <a:txBody>
-                    <a:bodyPr wrap="square"/>
-                    <a:lstStyle/>
-                    <a:p>
-                      <a:pPr algn="l"/>
-                      <a:r>
-                        <a:rPr sz="1700">
-                          <a:solidFill>
-                            <a:srgbClr val="262626"/>
-                          </a:solidFill>
-                          <a:latin typeface="TT Hoves"/>
-                        </a:rPr>
-                        <a:t>A curved path caused by </a:t>
-                      </a:r>
-                      <a:r>
-                        <a:rPr sz="1700" i="1">
-                          <a:solidFill>
-                            <a:srgbClr val="262626"/>
-                          </a:solidFill>
-                          <a:latin typeface="TT Hoves"/>
-                        </a:rPr>
-                        <a:t>gravity alone</a:t>
-                      </a:r>
-                    </a:p>
-                  </a:txBody>
-                  <a:tcPr marL="114300" marR="114300" marT="63500" marB="63500" anchor="ctr">
-                    <a:solidFill>
-                      <a:srgbClr val="FFFFFF"/>
-                    </a:solidFill>
-                  </a:tcPr>
-                </a:tc>
-                <a:tc>
-                  <a:txBody>
-                    <a:bodyPr wrap="square"/>
-                    <a:lstStyle/>
-                    <a:p>
-                      <a:pPr algn="l"/>
-                      <a:r>
-                        <a:rPr sz="1700">
-                          <a:solidFill>
-                            <a:srgbClr val="262626"/>
-                          </a:solidFill>
-                          <a:latin typeface="TT Hoves"/>
-                        </a:rPr>
-                        <a:t>A curved path caused by a </a:t>
-                      </a:r>
-                      <a:r>
-                        <a:rPr sz="1700" i="1">
-                          <a:solidFill>
-                            <a:srgbClr val="262626"/>
-                          </a:solidFill>
-                          <a:latin typeface="TT Hoves"/>
-                        </a:rPr>
-                        <a:t>center-seeking pull</a:t>
-                      </a:r>
-                    </a:p>
-                  </a:txBody>
-                  <a:tcPr marL="114300" marR="114300" marT="63500" marB="63500" anchor="ctr">
-                    <a:solidFill>
-                      <a:srgbClr val="FFFFFF"/>
-                    </a:solidFill>
-                  </a:tcPr>
-                </a:tc>
-              </a:tr>
-              <a:tr h="777240">
-                <a:tc>
-                  <a:txBody>
-                    <a:bodyPr wrap="square"/>
-                    <a:lstStyle/>
-                    <a:p>
-                      <a:pPr algn="l"/>
-                      <a:r>
-                        <a:rPr sz="1700">
-                          <a:solidFill>
-                            <a:srgbClr val="262626"/>
-                          </a:solidFill>
-                          <a:latin typeface="TT Hoves"/>
-                        </a:rPr>
-                        <a:t>Speed and direction </a:t>
-                      </a:r>
-                      <a:r>
-                        <a:rPr sz="1700" i="1">
-                          <a:solidFill>
-                            <a:srgbClr val="262626"/>
-                          </a:solidFill>
-                          <a:latin typeface="TT Hoves"/>
-                        </a:rPr>
-                        <a:t>both</a:t>
-                      </a:r>
-                      <a:r>
-                        <a:rPr sz="1700">
-                          <a:solidFill>
-                            <a:srgbClr val="262626"/>
-                          </a:solidFill>
-                          <a:latin typeface="TT Hoves"/>
-                        </a:rPr>
-                        <a:t> change</a:t>
-                      </a:r>
-                    </a:p>
-                  </a:txBody>
-                  <a:tcPr marL="114300" marR="114300" marT="63500" marB="63500" anchor="ctr">
-                    <a:solidFill>
-                      <a:srgbClr val="FBF3EC"/>
-                    </a:solidFill>
-                  </a:tcPr>
-                </a:tc>
-                <a:tc>
-                  <a:txBody>
-                    <a:bodyPr wrap="square"/>
-                    <a:lstStyle/>
-                    <a:p>
-                      <a:pPr algn="l"/>
-                      <a:r>
-                        <a:rPr sz="1700">
-                          <a:solidFill>
-                            <a:srgbClr val="262626"/>
-                          </a:solidFill>
-                          <a:latin typeface="TT Hoves"/>
-                        </a:rPr>
-                        <a:t>Speed stays constant, but </a:t>
-                      </a:r>
-                      <a:r>
-                        <a:rPr sz="1700" i="1">
-                          <a:solidFill>
-                            <a:srgbClr val="262626"/>
-                          </a:solidFill>
-                          <a:latin typeface="TT Hoves"/>
-                        </a:rPr>
-                        <a:t>direction</a:t>
-                      </a:r>
-                      <a:r>
-                        <a:rPr sz="1700">
-                          <a:solidFill>
-                            <a:srgbClr val="262626"/>
-                          </a:solidFill>
-                          <a:latin typeface="TT Hoves"/>
-                        </a:rPr>
-                        <a:t> constantly changes</a:t>
-                      </a:r>
-                    </a:p>
-                  </a:txBody>
-                  <a:tcPr marL="114300" marR="114300" marT="63500" marB="63500" anchor="ctr">
-                    <a:solidFill>
-                      <a:srgbClr val="FBF3EC"/>
-                    </a:solidFill>
-                  </a:tcPr>
-                </a:tc>
-              </a:tr>
-            </a:tbl>
-          </a:graphicData>
-        </a:graphic>
-      </p:graphicFrame>
+          <a:p>
+            <a:pPr marL="457200" indent="-457200" algn="l">
+              <a:lnSpc>
+                <a:spcPct val="104000"/>
+              </a:lnSpc>
+              <a:spcBef>
+                <a:spcPts val="0"/>
+              </a:spcBef>
+              <a:spcAft>
+                <a:spcPts val="700"/>
+              </a:spcAft>
+              <a:buFont typeface="Arial" pitchFamily="34" charset="0"/>
+              <a:buChar char="•"/>
+            </a:pPr>
+            <a:r>
+              <a:rPr sz="2200" b="1">
+                <a:latin typeface="TT Hoves"/>
+              </a:rPr>
+              <a:t>Projectile Motion</a:t>
+            </a:r>
+            <a:r>
+              <a:rPr sz="2200">
+                <a:latin typeface="TT Hoves"/>
+              </a:rPr>
+              <a:t> — a curved path caused by </a:t>
+            </a:r>
+            <a:r>
+              <a:rPr sz="2200" i="1">
+                <a:latin typeface="TT Hoves"/>
+              </a:rPr>
+              <a:t>gravity alone</a:t>
+            </a:r>
+            <a:r>
+              <a:rPr sz="2200">
+                <a:latin typeface="TT Hoves"/>
+              </a:rPr>
+              <a:t>, where speed and direction </a:t>
+            </a:r>
+            <a:r>
+              <a:rPr sz="2200" i="1">
+                <a:latin typeface="TT Hoves"/>
+              </a:rPr>
+              <a:t>both</a:t>
+            </a:r>
+            <a:r>
+              <a:rPr sz="2200">
+                <a:latin typeface="TT Hoves"/>
+              </a:rPr>
+              <a:t> change.</a:t>
+            </a:r>
+          </a:p>
+          <a:p>
+            <a:pPr marL="457200" indent="-457200" algn="l">
+              <a:lnSpc>
+                <a:spcPct val="104000"/>
+              </a:lnSpc>
+              <a:spcBef>
+                <a:spcPts val="0"/>
+              </a:spcBef>
+              <a:spcAft>
+                <a:spcPts val="700"/>
+              </a:spcAft>
+              <a:buFont typeface="Arial" pitchFamily="34" charset="0"/>
+              <a:buChar char="•"/>
+            </a:pPr>
+            <a:r>
+              <a:rPr sz="2200" b="1">
+                <a:latin typeface="TT Hoves"/>
+              </a:rPr>
+              <a:t>Circular Motion</a:t>
+            </a:r>
+            <a:r>
+              <a:rPr sz="2200">
+                <a:latin typeface="TT Hoves"/>
+              </a:rPr>
+              <a:t> — a curved path caused by a </a:t>
+            </a:r>
+            <a:r>
+              <a:rPr sz="2200" i="1">
+                <a:latin typeface="TT Hoves"/>
+              </a:rPr>
+              <a:t>center-seeking pull</a:t>
+            </a:r>
+            <a:r>
+              <a:rPr sz="2200">
+                <a:latin typeface="TT Hoves"/>
+              </a:rPr>
+              <a:t>, where speed stays constant but </a:t>
+            </a:r>
+            <a:r>
+              <a:rPr sz="2200" i="1">
+                <a:latin typeface="TT Hoves"/>
+              </a:rPr>
+              <a:t>direction</a:t>
+            </a:r>
+            <a:r>
+              <a:rPr sz="2200">
+                <a:latin typeface="TT Hoves"/>
+              </a:rPr>
+              <a:t> constantly changes.</a:t>
+            </a:r>
+          </a:p>
+        </p:txBody>
+      </p:sp>
     </p:spTree>
   </p:cSld>
   <p:clrMapOvr>
@@ -8439,8 +8268,8 @@
         </p:nvSpPr>
         <p:spPr>
           <a:xfrm>
-            <a:off x="694944" y="420624"/>
-            <a:ext cx="10789920" cy="1024128"/>
+            <a:off x="699400" y="619760"/>
+            <a:ext cx="11441800" cy="830997"/>
           </a:xfrm>
           <a:prstGeom prst="rect">
             <a:avLst/>
@@ -8454,11 +8283,25 @@
           <a:lstStyle/>
           <a:p>
             <a:r>
-              <a:rPr sz="3000" b="1">
-                <a:solidFill>
-                  <a:srgbClr val="1A1A1A"/>
-                </a:solidFill>
-                <a:latin typeface="TT Hoves ExtraBold"/>
+              <a:rPr lang="en-PH" sz="3800" dirty="0">
+                <a:gradFill flip="none" rotWithShape="1">
+                  <a:gsLst>
+                    <a:gs pos="0">
+                      <a:srgbClr val="B45404"/>
+                    </a:gs>
+                    <a:gs pos="50000">
+                      <a:srgbClr val="E86C06"/>
+                    </a:gs>
+                    <a:gs pos="100000">
+                      <a:srgbClr val="F9770B"/>
+                    </a:gs>
+                  </a:gsLst>
+                  <a:path path="circle">
+                    <a:fillToRect l="50000" t="50000" r="50000" b="50000"/>
+                  </a:path>
+                  <a:tileRect/>
+                </a:gradFill>
+                <a:latin typeface="TT Hoves ExtraBold" panose="02000903040000020004" pitchFamily="50" charset="0"/>
               </a:rPr>
               <a:t>The Shape Hiding in Plain Sight</a:t>
             </a:r>
@@ -8596,58 +8439,20 @@
       </p:sp>
       <p:sp>
         <p:nvSpPr>
-          <p:cNvPr id="13" name="Rectangle 12"/>
-          <p:cNvSpPr/>
+          <p:cNvPr id="9" name="TextBox 8">
+            <a:extLst>
+              <a:ext uri="{FF2B5EF4-FFF2-40B4-BE49-F238E27FC236}">
+                <a16:creationId xmlns:a16="http://schemas.microsoft.com/office/drawing/2014/main" id="{73C00714-0F36-6BC8-C038-4D7F36CEB239}"/>
+              </a:ext>
+            </a:extLst>
+          </p:cNvPr>
+          <p:cNvSpPr txBox="1"/>
           <p:nvPr/>
         </p:nvSpPr>
         <p:spPr>
           <a:xfrm>
-            <a:off x="713232" y="1481328"/>
-            <a:ext cx="960120" cy="68580"/>
-          </a:xfrm>
-          <a:prstGeom prst="rect">
-            <a:avLst/>
-          </a:prstGeom>
-          <a:solidFill>
-            <a:srgbClr val="F9770B"/>
-          </a:solidFill>
-          <a:ln>
-            <a:noFill/>
-          </a:ln>
-          <a:effectLst/>
-        </p:spPr>
-        <p:style>
-          <a:lnRef idx="1">
-            <a:schemeClr val="accent1"/>
-          </a:lnRef>
-          <a:fillRef idx="3">
-            <a:schemeClr val="accent1"/>
-          </a:fillRef>
-          <a:effectRef idx="2">
-            <a:schemeClr val="accent1"/>
-          </a:effectRef>
-          <a:fontRef idx="minor">
-            <a:schemeClr val="lt1"/>
-          </a:fontRef>
-        </p:style>
-        <p:txBody>
-          <a:bodyPr rtlCol="0" anchor="ctr"/>
-          <a:lstStyle/>
-          <a:p>
-            <a:pPr algn="ctr"/>
-          </a:p>
-        </p:txBody>
-      </p:sp>
-      <p:sp>
-        <p:nvSpPr>
-          <p:cNvPr id="14" name="TextBox 13"/>
-          <p:cNvSpPr txBox="1"/>
-          <p:nvPr/>
-        </p:nvSpPr>
-        <p:spPr>
-          <a:xfrm>
-            <a:off x="694944" y="1691640"/>
-            <a:ext cx="10789920" cy="1737360"/>
+            <a:off x="699058" y="1536192"/>
+            <a:ext cx="10671048" cy="4270248"/>
           </a:xfrm>
           <a:prstGeom prst="rect">
             <a:avLst/>
@@ -8655,140 +8460,104 @@
           <a:noFill/>
         </p:spPr>
         <p:txBody>
-          <a:bodyPr wrap="square" anchor="t">
-            <a:spAutoFit/>
+          <a:bodyPr wrap="square" rtlCol="0">
+            <a:noAutofit/>
           </a:bodyPr>
           <a:lstStyle/>
           <a:p>
-            <a:pPr algn="l" marL="320040" indent="-320040">
+            <a:pPr marL="457200" indent="-457200" algn="l">
               <a:lnSpc>
-                <a:spcPct val="103000"/>
+                <a:spcPct val="104000"/>
               </a:lnSpc>
               <a:spcBef>
                 <a:spcPts val="0"/>
               </a:spcBef>
               <a:spcAft>
-                <a:spcPts val="800"/>
+                <a:spcPts val="700"/>
               </a:spcAft>
-              <a:buClr>
-                <a:srgbClr val="F9770B"/>
-              </a:buClr>
-              <a:buFont typeface="Arial"/>
+              <a:buFont typeface="Arial" pitchFamily="34" charset="0"/>
               <a:buChar char="•"/>
             </a:pPr>
             <a:r>
-              <a:rPr sz="1800">
-                <a:solidFill>
-                  <a:srgbClr val="262626"/>
-                </a:solidFill>
+              <a:rPr sz="2800">
                 <a:latin typeface="TT Hoves"/>
               </a:rPr>
               <a:t>A diver leaving a cliff. Sparks flying off a welder's torch. Water arcing out of a park fountain.</a:t>
             </a:r>
           </a:p>
           <a:p>
-            <a:pPr algn="l" marL="320040" indent="-320040">
+            <a:pPr marL="457200" indent="-457200" algn="l">
               <a:lnSpc>
-                <a:spcPct val="103000"/>
+                <a:spcPct val="104000"/>
               </a:lnSpc>
               <a:spcBef>
                 <a:spcPts val="0"/>
               </a:spcBef>
               <a:spcAft>
-                <a:spcPts val="800"/>
+                <a:spcPts val="700"/>
               </a:spcAft>
-              <a:buClr>
-                <a:srgbClr val="F9770B"/>
-              </a:buClr>
-              <a:buFont typeface="Arial"/>
+              <a:buFont typeface="Arial" pitchFamily="34" charset="0"/>
               <a:buChar char="•"/>
             </a:pPr>
             <a:r>
-              <a:rPr sz="1800">
-                <a:solidFill>
-                  <a:srgbClr val="262626"/>
-                </a:solidFill>
+              <a:rPr sz="2800">
                 <a:latin typeface="TT Hoves"/>
               </a:rPr>
               <a:t>All three trace the </a:t>
             </a:r>
             <a:r>
-              <a:rPr sz="1800" i="1">
-                <a:solidFill>
-                  <a:srgbClr val="262626"/>
-                </a:solidFill>
+              <a:rPr sz="2800" i="1">
                 <a:latin typeface="TT Hoves"/>
               </a:rPr>
               <a:t>exact same curve</a:t>
             </a:r>
             <a:r>
-              <a:rPr sz="1800">
-                <a:solidFill>
-                  <a:srgbClr val="262626"/>
-                </a:solidFill>
+              <a:rPr sz="2800">
                 <a:latin typeface="TT Hoves"/>
               </a:rPr>
               <a:t> — even though nobody planned it that way.</a:t>
             </a:r>
           </a:p>
           <a:p>
-            <a:pPr algn="l" marL="320040" indent="-320040">
+            <a:pPr marL="457200" indent="-457200" algn="l">
               <a:lnSpc>
-                <a:spcPct val="103000"/>
+                <a:spcPct val="104000"/>
               </a:lnSpc>
               <a:spcBef>
                 <a:spcPts val="0"/>
               </a:spcBef>
               <a:spcAft>
-                <a:spcPts val="800"/>
+                <a:spcPts val="700"/>
               </a:spcAft>
-              <a:buClr>
-                <a:srgbClr val="F9770B"/>
-              </a:buClr>
-              <a:buFont typeface="Arial"/>
+              <a:buFont typeface="Arial" pitchFamily="34" charset="0"/>
               <a:buChar char="•"/>
             </a:pPr>
             <a:r>
-              <a:rPr sz="1800">
-                <a:solidFill>
-                  <a:srgbClr val="262626"/>
-                </a:solidFill>
+              <a:rPr sz="2800">
                 <a:latin typeface="TT Hoves"/>
               </a:rPr>
               <a:t>That curve has a name: the </a:t>
             </a:r>
             <a:r>
-              <a:rPr sz="1800" b="1" i="1">
-                <a:solidFill>
-                  <a:srgbClr val="262626"/>
-                </a:solidFill>
+              <a:rPr sz="2800" b="1" i="1">
                 <a:latin typeface="TT Hoves"/>
               </a:rPr>
               <a:t>parabola</a:t>
             </a:r>
             <a:r>
-              <a:rPr sz="1800">
-                <a:solidFill>
-                  <a:srgbClr val="262626"/>
-                </a:solidFill>
+              <a:rPr sz="2800">
                 <a:latin typeface="TT Hoves"/>
               </a:rPr>
               <a:t>, and it shows up </a:t>
             </a:r>
             <a:r>
-              <a:rPr sz="1800" i="1">
-                <a:solidFill>
-                  <a:srgbClr val="262626"/>
-                </a:solidFill>
+              <a:rPr sz="2800" i="1">
                 <a:latin typeface="TT Hoves"/>
               </a:rPr>
               <a:t>any time</a:t>
             </a:r>
             <a:r>
-              <a:rPr sz="1800">
-                <a:solidFill>
-                  <a:srgbClr val="262626"/>
-                </a:solidFill>
+              <a:rPr sz="2800">
                 <a:latin typeface="TT Hoves"/>
               </a:rPr>
               <a:t> something launches into the air and gravity is the only thing acting on it afterward.</a:t>
@@ -8796,30 +8565,6 @@
           </a:p>
         </p:txBody>
       </p:sp>
-      <p:pic>
-        <p:nvPicPr>
-          <p:cNvPr id="15" name="Picture 14" descr="parabola_scenes.png"/>
-          <p:cNvPicPr>
-            <a:picLocks noChangeAspect="1"/>
-          </p:cNvPicPr>
-          <p:nvPr/>
-        </p:nvPicPr>
-        <p:blipFill>
-          <a:blip r:embed="rId3"/>
-          <a:stretch>
-            <a:fillRect/>
-          </a:stretch>
-        </p:blipFill>
-        <p:spPr>
-          <a:xfrm>
-            <a:off x="2028198" y="3611880"/>
-            <a:ext cx="8123411" cy="2331720"/>
-          </a:xfrm>
-          <a:prstGeom prst="rect">
-            <a:avLst/>
-          </a:prstGeom>
-        </p:spPr>
-      </p:pic>
     </p:spTree>
   </p:cSld>
   <p:clrMapOvr>
@@ -9071,8 +8816,8 @@
         </p:nvSpPr>
         <p:spPr>
           <a:xfrm>
-            <a:off x="694944" y="420624"/>
-            <a:ext cx="10789920" cy="1024128"/>
+            <a:off x="699400" y="619760"/>
+            <a:ext cx="11441800" cy="830997"/>
           </a:xfrm>
           <a:prstGeom prst="rect">
             <a:avLst/>
@@ -9086,11 +8831,25 @@
           <a:lstStyle/>
           <a:p>
             <a:r>
-              <a:rPr sz="3000" b="1">
-                <a:solidFill>
-                  <a:srgbClr val="1A1A1A"/>
-                </a:solidFill>
-                <a:latin typeface="TT Hoves ExtraBold"/>
+              <a:rPr lang="en-PH" sz="3300" dirty="0">
+                <a:gradFill flip="none" rotWithShape="1">
+                  <a:gsLst>
+                    <a:gs pos="0">
+                      <a:srgbClr val="B45404"/>
+                    </a:gs>
+                    <a:gs pos="50000">
+                      <a:srgbClr val="E86C06"/>
+                    </a:gs>
+                    <a:gs pos="100000">
+                      <a:srgbClr val="F9770B"/>
+                    </a:gs>
+                  </a:gsLst>
+                  <a:path path="circle">
+                    <a:fillToRect l="50000" t="50000" r="50000" b="50000"/>
+                  </a:path>
+                  <a:tileRect/>
+                </a:gradFill>
+                <a:latin typeface="TT Hoves ExtraBold" panose="02000903040000020004" pitchFamily="50" charset="0"/>
               </a:rPr>
               <a:t>Locating a Particle in Two Dimensions</a:t>
             </a:r>
@@ -9228,58 +8987,20 @@
       </p:sp>
       <p:sp>
         <p:nvSpPr>
-          <p:cNvPr id="13" name="Rectangle 12"/>
-          <p:cNvSpPr/>
+          <p:cNvPr id="9" name="TextBox 8">
+            <a:extLst>
+              <a:ext uri="{FF2B5EF4-FFF2-40B4-BE49-F238E27FC236}">
+                <a16:creationId xmlns:a16="http://schemas.microsoft.com/office/drawing/2014/main" id="{73C00714-0F36-6BC8-C038-4D7F36CEB239}"/>
+              </a:ext>
+            </a:extLst>
+          </p:cNvPr>
+          <p:cNvSpPr txBox="1"/>
           <p:nvPr/>
         </p:nvSpPr>
         <p:spPr>
           <a:xfrm>
-            <a:off x="713232" y="1481328"/>
-            <a:ext cx="960120" cy="68580"/>
-          </a:xfrm>
-          <a:prstGeom prst="rect">
-            <a:avLst/>
-          </a:prstGeom>
-          <a:solidFill>
-            <a:srgbClr val="F9770B"/>
-          </a:solidFill>
-          <a:ln>
-            <a:noFill/>
-          </a:ln>
-          <a:effectLst/>
-        </p:spPr>
-        <p:style>
-          <a:lnRef idx="1">
-            <a:schemeClr val="accent1"/>
-          </a:lnRef>
-          <a:fillRef idx="3">
-            <a:schemeClr val="accent1"/>
-          </a:fillRef>
-          <a:effectRef idx="2">
-            <a:schemeClr val="accent1"/>
-          </a:effectRef>
-          <a:fontRef idx="minor">
-            <a:schemeClr val="lt1"/>
-          </a:fontRef>
-        </p:style>
-        <p:txBody>
-          <a:bodyPr rtlCol="0" anchor="ctr"/>
-          <a:lstStyle/>
-          <a:p>
-            <a:pPr algn="ctr"/>
-          </a:p>
-        </p:txBody>
-      </p:sp>
-      <p:sp>
-        <p:nvSpPr>
-          <p:cNvPr id="14" name="TextBox 13"/>
-          <p:cNvSpPr txBox="1"/>
-          <p:nvPr/>
-        </p:nvSpPr>
-        <p:spPr>
-          <a:xfrm>
-            <a:off x="694944" y="2148840"/>
-            <a:ext cx="10789920" cy="3291840"/>
+            <a:off x="699058" y="1536192"/>
+            <a:ext cx="10671048" cy="4270248"/>
           </a:xfrm>
           <a:prstGeom prst="rect">
             <a:avLst/>
@@ -9287,212 +9008,152 @@
           <a:noFill/>
         </p:spPr>
         <p:txBody>
-          <a:bodyPr wrap="square" anchor="t">
-            <a:spAutoFit/>
+          <a:bodyPr wrap="square" rtlCol="0">
+            <a:noAutofit/>
           </a:bodyPr>
           <a:lstStyle/>
           <a:p>
-            <a:pPr algn="l" marL="320040" indent="-320040">
+            <a:pPr marL="457200" indent="-457200" algn="l">
               <a:lnSpc>
-                <a:spcPct val="103000"/>
+                <a:spcPct val="104000"/>
               </a:lnSpc>
               <a:spcBef>
                 <a:spcPts val="0"/>
               </a:spcBef>
               <a:spcAft>
-                <a:spcPts val="1400"/>
+                <a:spcPts val="700"/>
               </a:spcAft>
-              <a:buClr>
-                <a:srgbClr val="F9770B"/>
-              </a:buClr>
-              <a:buFont typeface="Arial"/>
+              <a:buFont typeface="Arial" pitchFamily="34" charset="0"/>
               <a:buChar char="•"/>
             </a:pPr>
             <a:r>
-              <a:rPr sz="2200">
-                <a:solidFill>
-                  <a:srgbClr val="262626"/>
-                </a:solidFill>
+              <a:rPr sz="2500">
                 <a:latin typeface="TT Hoves"/>
               </a:rPr>
               <a:t>In </a:t>
             </a:r>
             <a:r>
-              <a:rPr sz="2200" i="1">
-                <a:solidFill>
-                  <a:srgbClr val="262626"/>
-                </a:solidFill>
+              <a:rPr sz="2500" i="1">
                 <a:latin typeface="TT Hoves"/>
               </a:rPr>
               <a:t>one</a:t>
             </a:r>
             <a:r>
-              <a:rPr sz="2200">
-                <a:solidFill>
-                  <a:srgbClr val="262626"/>
-                </a:solidFill>
+              <a:rPr sz="2500">
                 <a:latin typeface="TT Hoves"/>
               </a:rPr>
               <a:t> dimension, a single number tells you where something is.</a:t>
             </a:r>
           </a:p>
           <a:p>
-            <a:pPr algn="l" marL="320040" indent="-320040">
+            <a:pPr marL="457200" indent="-457200" algn="l">
               <a:lnSpc>
-                <a:spcPct val="103000"/>
+                <a:spcPct val="104000"/>
               </a:lnSpc>
               <a:spcBef>
                 <a:spcPts val="0"/>
               </a:spcBef>
               <a:spcAft>
-                <a:spcPts val="1400"/>
+                <a:spcPts val="700"/>
               </a:spcAft>
-              <a:buClr>
-                <a:srgbClr val="F9770B"/>
-              </a:buClr>
-              <a:buFont typeface="Arial"/>
+              <a:buFont typeface="Arial" pitchFamily="34" charset="0"/>
               <a:buChar char="•"/>
             </a:pPr>
             <a:r>
-              <a:rPr sz="2200">
-                <a:solidFill>
-                  <a:srgbClr val="262626"/>
-                </a:solidFill>
+              <a:rPr sz="2500">
                 <a:latin typeface="TT Hoves"/>
               </a:rPr>
               <a:t>In </a:t>
             </a:r>
             <a:r>
-              <a:rPr sz="2200" i="1">
-                <a:solidFill>
-                  <a:srgbClr val="262626"/>
-                </a:solidFill>
+              <a:rPr sz="2500" i="1">
                 <a:latin typeface="TT Hoves"/>
               </a:rPr>
               <a:t>two</a:t>
             </a:r>
             <a:r>
-              <a:rPr sz="2200">
-                <a:solidFill>
-                  <a:srgbClr val="262626"/>
-                </a:solidFill>
+              <a:rPr sz="2500">
                 <a:latin typeface="TT Hoves"/>
               </a:rPr>
               <a:t> dimensions, you need </a:t>
             </a:r>
             <a:r>
-              <a:rPr sz="2200" b="1">
-                <a:solidFill>
-                  <a:srgbClr val="262626"/>
-                </a:solidFill>
+              <a:rPr sz="2500" b="1">
                 <a:latin typeface="TT Hoves"/>
               </a:rPr>
               <a:t>two numbers at once</a:t>
             </a:r>
             <a:r>
-              <a:rPr sz="2200">
-                <a:solidFill>
-                  <a:srgbClr val="262626"/>
-                </a:solidFill>
+              <a:rPr sz="2500">
                 <a:latin typeface="TT Hoves"/>
               </a:rPr>
               <a:t> — an </a:t>
             </a:r>
             <a:r>
-              <a:rPr sz="2200" i="1">
-                <a:solidFill>
-                  <a:srgbClr val="262626"/>
-                </a:solidFill>
+              <a:rPr sz="2500" i="1">
                 <a:latin typeface="TT Hoves"/>
               </a:rPr>
               <a:t>x</a:t>
             </a:r>
             <a:r>
-              <a:rPr sz="2200">
-                <a:solidFill>
-                  <a:srgbClr val="262626"/>
-                </a:solidFill>
+              <a:rPr sz="2500">
                 <a:latin typeface="TT Hoves"/>
               </a:rPr>
               <a:t>-position and a </a:t>
             </a:r>
             <a:r>
-              <a:rPr sz="2200" i="1">
-                <a:solidFill>
-                  <a:srgbClr val="262626"/>
-                </a:solidFill>
+              <a:rPr sz="2500" i="1">
                 <a:latin typeface="TT Hoves"/>
               </a:rPr>
               <a:t>y</a:t>
             </a:r>
             <a:r>
-              <a:rPr sz="2200">
-                <a:solidFill>
-                  <a:srgbClr val="262626"/>
-                </a:solidFill>
+              <a:rPr sz="2500">
                 <a:latin typeface="TT Hoves"/>
               </a:rPr>
               <a:t>-position — tracked </a:t>
             </a:r>
             <a:r>
-              <a:rPr sz="2200" i="1">
-                <a:solidFill>
-                  <a:srgbClr val="262626"/>
-                </a:solidFill>
+              <a:rPr sz="2500" i="1">
                 <a:latin typeface="TT Hoves"/>
               </a:rPr>
               <a:t>simultaneously</a:t>
             </a:r>
             <a:r>
-              <a:rPr sz="2200">
-                <a:solidFill>
-                  <a:srgbClr val="262626"/>
-                </a:solidFill>
+              <a:rPr sz="2500">
                 <a:latin typeface="TT Hoves"/>
               </a:rPr>
               <a:t>, not one after the other.</a:t>
             </a:r>
           </a:p>
           <a:p>
-            <a:pPr algn="l" marL="320040" indent="-320040">
+            <a:pPr marL="457200" indent="-457200" algn="l">
               <a:lnSpc>
-                <a:spcPct val="103000"/>
+                <a:spcPct val="104000"/>
               </a:lnSpc>
               <a:spcBef>
                 <a:spcPts val="0"/>
               </a:spcBef>
               <a:spcAft>
-                <a:spcPts val="1400"/>
+                <a:spcPts val="700"/>
               </a:spcAft>
-              <a:buClr>
-                <a:srgbClr val="F9770B"/>
-              </a:buClr>
-              <a:buFont typeface="Arial"/>
+              <a:buFont typeface="Arial" pitchFamily="34" charset="0"/>
               <a:buChar char="•"/>
             </a:pPr>
             <a:r>
-              <a:rPr sz="2200">
-                <a:solidFill>
-                  <a:srgbClr val="262626"/>
-                </a:solidFill>
+              <a:rPr sz="2500">
                 <a:latin typeface="TT Hoves"/>
               </a:rPr>
               <a:t>This pair is bundled into a single arrow called the </a:t>
             </a:r>
             <a:r>
-              <a:rPr sz="2200" b="1">
-                <a:solidFill>
-                  <a:srgbClr val="262626"/>
-                </a:solidFill>
+              <a:rPr sz="2500" b="1">
                 <a:latin typeface="TT Hoves"/>
               </a:rPr>
               <a:t>position vector</a:t>
             </a:r>
             <a:r>
-              <a:rPr sz="2200">
-                <a:solidFill>
-                  <a:srgbClr val="262626"/>
-                </a:solidFill>
+              <a:rPr sz="2500">
                 <a:latin typeface="TT Hoves"/>
               </a:rPr>
               <a:t>, pointing from the origin to wherever the object currently is.</a:t>
@@ -9751,8 +9412,8 @@
         </p:nvSpPr>
         <p:spPr>
           <a:xfrm>
-            <a:off x="694944" y="420624"/>
-            <a:ext cx="10789920" cy="1024128"/>
+            <a:off x="699400" y="619760"/>
+            <a:ext cx="11441800" cy="830997"/>
           </a:xfrm>
           <a:prstGeom prst="rect">
             <a:avLst/>
@@ -9766,11 +9427,25 @@
           <a:lstStyle/>
           <a:p>
             <a:r>
-              <a:rPr sz="3000" b="1">
-                <a:solidFill>
-                  <a:srgbClr val="1A1A1A"/>
-                </a:solidFill>
-                <a:latin typeface="TT Hoves ExtraBold"/>
+              <a:rPr lang="en-PH" sz="3300" dirty="0">
+                <a:gradFill flip="none" rotWithShape="1">
+                  <a:gsLst>
+                    <a:gs pos="0">
+                      <a:srgbClr val="B45404"/>
+                    </a:gs>
+                    <a:gs pos="50000">
+                      <a:srgbClr val="E86C06"/>
+                    </a:gs>
+                    <a:gs pos="100000">
+                      <a:srgbClr val="F9770B"/>
+                    </a:gs>
+                  </a:gsLst>
+                  <a:path path="circle">
+                    <a:fillToRect l="50000" t="50000" r="50000" b="50000"/>
+                  </a:path>
+                  <a:tileRect/>
+                </a:gradFill>
+                <a:latin typeface="TT Hoves ExtraBold" panose="02000903040000020004" pitchFamily="50" charset="0"/>
               </a:rPr>
               <a:t>Breaking Velocity Into Two Directions</a:t>
             </a:r>
@@ -9908,58 +9583,20 @@
       </p:sp>
       <p:sp>
         <p:nvSpPr>
-          <p:cNvPr id="13" name="Rectangle 12"/>
-          <p:cNvSpPr/>
+          <p:cNvPr id="9" name="TextBox 8">
+            <a:extLst>
+              <a:ext uri="{FF2B5EF4-FFF2-40B4-BE49-F238E27FC236}">
+                <a16:creationId xmlns:a16="http://schemas.microsoft.com/office/drawing/2014/main" id="{73C00714-0F36-6BC8-C038-4D7F36CEB239}"/>
+              </a:ext>
+            </a:extLst>
+          </p:cNvPr>
+          <p:cNvSpPr txBox="1"/>
           <p:nvPr/>
         </p:nvSpPr>
         <p:spPr>
           <a:xfrm>
-            <a:off x="713232" y="1481328"/>
-            <a:ext cx="960120" cy="68580"/>
-          </a:xfrm>
-          <a:prstGeom prst="rect">
-            <a:avLst/>
-          </a:prstGeom>
-          <a:solidFill>
-            <a:srgbClr val="F9770B"/>
-          </a:solidFill>
-          <a:ln>
-            <a:noFill/>
-          </a:ln>
-          <a:effectLst/>
-        </p:spPr>
-        <p:style>
-          <a:lnRef idx="1">
-            <a:schemeClr val="accent1"/>
-          </a:lnRef>
-          <a:fillRef idx="3">
-            <a:schemeClr val="accent1"/>
-          </a:fillRef>
-          <a:effectRef idx="2">
-            <a:schemeClr val="accent1"/>
-          </a:effectRef>
-          <a:fontRef idx="minor">
-            <a:schemeClr val="lt1"/>
-          </a:fontRef>
-        </p:style>
-        <p:txBody>
-          <a:bodyPr rtlCol="0" anchor="ctr"/>
-          <a:lstStyle/>
-          <a:p>
-            <a:pPr algn="ctr"/>
-          </a:p>
-        </p:txBody>
-      </p:sp>
-      <p:sp>
-        <p:nvSpPr>
-          <p:cNvPr id="14" name="TextBox 13"/>
-          <p:cNvSpPr txBox="1"/>
-          <p:nvPr/>
-        </p:nvSpPr>
-        <p:spPr>
-          <a:xfrm>
-            <a:off x="694944" y="1691640"/>
-            <a:ext cx="10789920" cy="640080"/>
+            <a:off x="699058" y="1536192"/>
+            <a:ext cx="10671048" cy="4270248"/>
           </a:xfrm>
           <a:prstGeom prst="rect">
             <a:avLst/>
@@ -9967,384 +9604,232 @@
           <a:noFill/>
         </p:spPr>
         <p:txBody>
-          <a:bodyPr wrap="square" anchor="t">
-            <a:spAutoFit/>
+          <a:bodyPr wrap="square" rtlCol="0">
+            <a:noAutofit/>
           </a:bodyPr>
           <a:lstStyle/>
           <a:p>
-            <a:pPr algn="l" marL="320040" indent="-320040">
+            <a:pPr marL="457200" indent="-457200" algn="l">
               <a:lnSpc>
-                <a:spcPct val="103000"/>
+                <a:spcPct val="104000"/>
               </a:lnSpc>
               <a:spcBef>
                 <a:spcPts val="0"/>
               </a:spcBef>
               <a:spcAft>
-                <a:spcPts val="800"/>
+                <a:spcPts val="700"/>
               </a:spcAft>
-              <a:buClr>
-                <a:srgbClr val="F9770B"/>
-              </a:buClr>
-              <a:buFont typeface="Arial"/>
+              <a:buFont typeface="Arial" pitchFamily="34" charset="0"/>
               <a:buChar char="•"/>
             </a:pPr>
             <a:r>
-              <a:rPr sz="1900">
-                <a:solidFill>
-                  <a:srgbClr val="262626"/>
-                </a:solidFill>
+              <a:rPr sz="2400">
                 <a:latin typeface="TT Hoves"/>
               </a:rPr>
               <a:t>Any launch velocity can be split into two perpendicular ingredients:</a:t>
             </a:r>
           </a:p>
-        </p:txBody>
-      </p:sp>
-      <p:sp>
-        <p:nvSpPr>
-          <p:cNvPr id="15" name="Rounded Rectangle 14"/>
-          <p:cNvSpPr/>
-          <p:nvPr/>
-        </p:nvSpPr>
-        <p:spPr>
-          <a:xfrm>
-            <a:off x="1792224" y="2377440"/>
-            <a:ext cx="8595360" cy="1069848"/>
-          </a:xfrm>
-          <a:prstGeom prst="roundRect">
-            <a:avLst>
-              <a:gd name="adj" fmla="val 10000"/>
-            </a:avLst>
-          </a:prstGeom>
-          <a:solidFill>
-            <a:srgbClr val="FDF1E6"/>
-          </a:solidFill>
-          <a:ln w="15875">
-            <a:solidFill>
-              <a:srgbClr val="F9770B"/>
-            </a:solidFill>
-          </a:ln>
-          <a:effectLst/>
-        </p:spPr>
-        <p:style>
-          <a:lnRef idx="1">
-            <a:schemeClr val="accent1"/>
-          </a:lnRef>
-          <a:fillRef idx="3">
-            <a:schemeClr val="accent1"/>
-          </a:fillRef>
-          <a:effectRef idx="2">
-            <a:schemeClr val="accent1"/>
-          </a:effectRef>
-          <a:fontRef idx="minor">
-            <a:schemeClr val="lt1"/>
-          </a:fontRef>
-        </p:style>
-        <p:txBody>
-          <a:bodyPr rtlCol="0" anchor="ctr" wrap="square" tIns="50800" bIns="50800"/>
-          <a:lstStyle/>
           <a:p>
             <a:pPr algn="ctr">
+              <a:lnSpc>
+                <a:spcPct val="104000"/>
+              </a:lnSpc>
+              <a:spcBef>
+                <a:spcPts val="400"/>
+              </a:spcBef>
+              <a:spcAft>
+                <a:spcPts val="700"/>
+              </a:spcAft>
               <a:buNone/>
             </a:pPr>
             <a:r>
-              <a:rPr sz="2400" i="1">
-                <a:solidFill>
-                  <a:srgbClr val="C85A00"/>
-                </a:solidFill>
+              <a:rPr sz="2600" b="1" i="1">
                 <a:latin typeface="TT Hoves"/>
               </a:rPr>
               <a:t>v</a:t>
             </a:r>
             <a:r>
-              <a:rPr sz="2208" baseline="-25000">
-                <a:solidFill>
-                  <a:srgbClr val="C85A00"/>
-                </a:solidFill>
+              <a:rPr sz="2392" baseline="-25000">
                 <a:latin typeface="TT Hoves"/>
               </a:rPr>
               <a:t>x</a:t>
             </a:r>
             <a:r>
-              <a:rPr sz="2400">
-                <a:solidFill>
-                  <a:srgbClr val="C85A00"/>
-                </a:solidFill>
-                <a:latin typeface="TT Hoves"/>
-              </a:rPr>
-              <a:t>  =  </a:t>
-            </a:r>
-            <a:r>
-              <a:rPr sz="2400" i="1">
-                <a:solidFill>
-                  <a:srgbClr val="C85A00"/>
-                </a:solidFill>
+              <a:rPr sz="2600" b="1">
+                <a:latin typeface="TT Hoves"/>
+              </a:rPr>
+              <a:t> = </a:t>
+            </a:r>
+            <a:r>
+              <a:rPr sz="2600" b="1" i="1">
                 <a:latin typeface="TT Hoves"/>
               </a:rPr>
               <a:t>v</a:t>
             </a:r>
             <a:r>
-              <a:rPr sz="2208" baseline="-25000">
-                <a:solidFill>
-                  <a:srgbClr val="C85A00"/>
-                </a:solidFill>
+              <a:rPr sz="2392" baseline="-25000">
                 <a:latin typeface="TT Hoves"/>
               </a:rPr>
               <a:t>i</a:t>
             </a:r>
             <a:r>
-              <a:rPr sz="2400">
-                <a:solidFill>
-                  <a:srgbClr val="C85A00"/>
-                </a:solidFill>
+              <a:rPr sz="2600" b="1">
                 <a:latin typeface="TT Hoves"/>
               </a:rPr>
               <a:t> cos </a:t>
             </a:r>
             <a:r>
-              <a:rPr sz="2400" i="1">
-                <a:solidFill>
-                  <a:srgbClr val="C85A00"/>
-                </a:solidFill>
+              <a:rPr sz="2600" b="1" i="1">
                 <a:latin typeface="TT Hoves"/>
               </a:rPr>
               <a:t>θ</a:t>
             </a:r>
             <a:r>
-              <a:rPr sz="2208" baseline="-25000">
-                <a:solidFill>
-                  <a:srgbClr val="C85A00"/>
-                </a:solidFill>
+              <a:rPr sz="2392" baseline="-25000">
                 <a:latin typeface="TT Hoves"/>
               </a:rPr>
               <a:t>i</a:t>
             </a:r>
             <a:r>
-              <a:rPr sz="2400">
-                <a:solidFill>
-                  <a:srgbClr val="C85A00"/>
-                </a:solidFill>
+              <a:rPr sz="2600" b="1">
                 <a:latin typeface="TT Hoves"/>
               </a:rPr>
               <a:t>          </a:t>
             </a:r>
             <a:r>
-              <a:rPr sz="2400" i="1">
-                <a:solidFill>
-                  <a:srgbClr val="C85A00"/>
-                </a:solidFill>
+              <a:rPr sz="2600" b="1" i="1">
                 <a:latin typeface="TT Hoves"/>
               </a:rPr>
               <a:t>v</a:t>
             </a:r>
             <a:r>
-              <a:rPr sz="2208" baseline="-25000">
-                <a:solidFill>
-                  <a:srgbClr val="C85A00"/>
-                </a:solidFill>
+              <a:rPr sz="2392" baseline="-25000">
                 <a:latin typeface="TT Hoves"/>
               </a:rPr>
               <a:t>y</a:t>
             </a:r>
             <a:r>
-              <a:rPr sz="2400">
-                <a:solidFill>
-                  <a:srgbClr val="C85A00"/>
-                </a:solidFill>
-                <a:latin typeface="TT Hoves"/>
-              </a:rPr>
-              <a:t>  =  </a:t>
-            </a:r>
-            <a:r>
-              <a:rPr sz="2400" i="1">
-                <a:solidFill>
-                  <a:srgbClr val="C85A00"/>
-                </a:solidFill>
+              <a:rPr sz="2600" b="1">
+                <a:latin typeface="TT Hoves"/>
+              </a:rPr>
+              <a:t> = </a:t>
+            </a:r>
+            <a:r>
+              <a:rPr sz="2600" b="1" i="1">
                 <a:latin typeface="TT Hoves"/>
               </a:rPr>
               <a:t>v</a:t>
             </a:r>
             <a:r>
-              <a:rPr sz="2208" baseline="-25000">
-                <a:solidFill>
-                  <a:srgbClr val="C85A00"/>
-                </a:solidFill>
+              <a:rPr sz="2392" baseline="-25000">
                 <a:latin typeface="TT Hoves"/>
               </a:rPr>
               <a:t>i</a:t>
             </a:r>
             <a:r>
-              <a:rPr sz="2400">
-                <a:solidFill>
-                  <a:srgbClr val="C85A00"/>
-                </a:solidFill>
+              <a:rPr sz="2600" b="1">
                 <a:latin typeface="TT Hoves"/>
               </a:rPr>
               <a:t> sin </a:t>
             </a:r>
             <a:r>
-              <a:rPr sz="2400" i="1">
-                <a:solidFill>
-                  <a:srgbClr val="C85A00"/>
-                </a:solidFill>
+              <a:rPr sz="2600" b="1" i="1">
                 <a:latin typeface="TT Hoves"/>
               </a:rPr>
               <a:t>θ</a:t>
             </a:r>
             <a:r>
-              <a:rPr sz="2208" baseline="-25000">
-                <a:solidFill>
-                  <a:srgbClr val="C85A00"/>
-                </a:solidFill>
+              <a:rPr sz="2392" baseline="-25000">
                 <a:latin typeface="TT Hoves"/>
               </a:rPr>
               <a:t>i</a:t>
             </a:r>
           </a:p>
-        </p:txBody>
-      </p:sp>
-      <p:sp>
-        <p:nvSpPr>
-          <p:cNvPr id="16" name="TextBox 15"/>
-          <p:cNvSpPr txBox="1"/>
-          <p:nvPr/>
-        </p:nvSpPr>
-        <p:spPr>
-          <a:xfrm>
-            <a:off x="694944" y="3794760"/>
-            <a:ext cx="10789920" cy="2103120"/>
-          </a:xfrm>
-          <a:prstGeom prst="rect">
-            <a:avLst/>
-          </a:prstGeom>
-          <a:noFill/>
-        </p:spPr>
-        <p:txBody>
-          <a:bodyPr wrap="square" anchor="t">
-            <a:spAutoFit/>
-          </a:bodyPr>
-          <a:lstStyle/>
-          <a:p>
-            <a:pPr algn="l" marL="320040" indent="-320040">
+          <a:p>
+            <a:pPr marL="457200" indent="-457200" algn="l">
               <a:lnSpc>
-                <a:spcPct val="103000"/>
+                <a:spcPct val="104000"/>
               </a:lnSpc>
               <a:spcBef>
                 <a:spcPts val="0"/>
               </a:spcBef>
               <a:spcAft>
-                <a:spcPts val="800"/>
+                <a:spcPts val="700"/>
               </a:spcAft>
-              <a:buClr>
-                <a:srgbClr val="F9770B"/>
-              </a:buClr>
-              <a:buFont typeface="Arial"/>
+              <a:buFont typeface="Arial" pitchFamily="34" charset="0"/>
               <a:buChar char="•"/>
             </a:pPr>
             <a:r>
-              <a:rPr sz="1800">
-                <a:solidFill>
-                  <a:srgbClr val="262626"/>
-                </a:solidFill>
+              <a:rPr sz="2400">
                 <a:latin typeface="TT Hoves"/>
               </a:rPr>
               <a:t>Think of a cannon fired at an angle: part of its "push" sends the ball </a:t>
             </a:r>
             <a:r>
-              <a:rPr sz="1800" i="1">
-                <a:solidFill>
-                  <a:srgbClr val="262626"/>
-                </a:solidFill>
+              <a:rPr sz="2400" i="1">
                 <a:latin typeface="TT Hoves"/>
               </a:rPr>
               <a:t>forward</a:t>
             </a:r>
             <a:r>
-              <a:rPr sz="1800">
-                <a:solidFill>
-                  <a:srgbClr val="262626"/>
-                </a:solidFill>
+              <a:rPr sz="2400">
                 <a:latin typeface="TT Hoves"/>
               </a:rPr>
               <a:t>, part of it sends the ball </a:t>
             </a:r>
             <a:r>
-              <a:rPr sz="1800" i="1">
-                <a:solidFill>
-                  <a:srgbClr val="262626"/>
-                </a:solidFill>
+              <a:rPr sz="2400" i="1">
                 <a:latin typeface="TT Hoves"/>
               </a:rPr>
               <a:t>upward</a:t>
             </a:r>
             <a:r>
-              <a:rPr sz="1800">
-                <a:solidFill>
-                  <a:srgbClr val="262626"/>
-                </a:solidFill>
+              <a:rPr sz="2400">
                 <a:latin typeface="TT Hoves"/>
               </a:rPr>
               <a:t> — and </a:t>
             </a:r>
             <a:r>
-              <a:rPr sz="1800" i="1">
-                <a:solidFill>
-                  <a:srgbClr val="262626"/>
-                </a:solidFill>
+              <a:rPr sz="2400" i="1">
                 <a:latin typeface="TT Hoves"/>
               </a:rPr>
               <a:t>trigonometry</a:t>
             </a:r>
             <a:r>
-              <a:rPr sz="1800">
-                <a:solidFill>
-                  <a:srgbClr val="262626"/>
-                </a:solidFill>
+              <a:rPr sz="2400">
                 <a:latin typeface="TT Hoves"/>
               </a:rPr>
               <a:t> tells you exactly how much of each.</a:t>
             </a:r>
           </a:p>
           <a:p>
-            <a:pPr algn="l" marL="320040" indent="-320040">
+            <a:pPr marL="457200" indent="-457200" algn="l">
               <a:lnSpc>
-                <a:spcPct val="103000"/>
+                <a:spcPct val="104000"/>
               </a:lnSpc>
               <a:spcBef>
                 <a:spcPts val="0"/>
               </a:spcBef>
               <a:spcAft>
-                <a:spcPts val="800"/>
+                <a:spcPts val="700"/>
               </a:spcAft>
-              <a:buClr>
-                <a:srgbClr val="F9770B"/>
-              </a:buClr>
-              <a:buFont typeface="Arial"/>
+              <a:buFont typeface="Arial" pitchFamily="34" charset="0"/>
               <a:buChar char="•"/>
             </a:pPr>
             <a:r>
-              <a:rPr sz="1800">
-                <a:solidFill>
-                  <a:srgbClr val="262626"/>
-                </a:solidFill>
+              <a:rPr sz="2400">
                 <a:latin typeface="TT Hoves"/>
               </a:rPr>
               <a:t>This is the </a:t>
             </a:r>
             <a:r>
-              <a:rPr sz="1800" i="1">
-                <a:solidFill>
-                  <a:srgbClr val="262626"/>
-                </a:solidFill>
+              <a:rPr sz="2400" i="1">
                 <a:latin typeface="TT Hoves"/>
               </a:rPr>
               <a:t>only</a:t>
             </a:r>
             <a:r>
-              <a:rPr sz="1800">
-                <a:solidFill>
-                  <a:srgbClr val="262626"/>
-                </a:solidFill>
+              <a:rPr sz="2400">
                 <a:latin typeface="TT Hoves"/>
               </a:rPr>
               <a:t> piece of vector-splitting needed for today — no adding multiple vectors together yet (that's Aug 4's job).</a:t>
@@ -10603,8 +10088,8 @@
         </p:nvSpPr>
         <p:spPr>
           <a:xfrm>
-            <a:off x="694944" y="420624"/>
-            <a:ext cx="10789920" cy="1024128"/>
+            <a:off x="699400" y="619760"/>
+            <a:ext cx="11441800" cy="830997"/>
           </a:xfrm>
           <a:prstGeom prst="rect">
             <a:avLst/>
@@ -10618,11 +10103,25 @@
           <a:lstStyle/>
           <a:p>
             <a:r>
-              <a:rPr sz="3000" b="1">
-                <a:solidFill>
-                  <a:srgbClr val="1A1A1A"/>
-                </a:solidFill>
-                <a:latin typeface="TT Hoves ExtraBold"/>
+              <a:rPr lang="en-PH" sz="3800" dirty="0">
+                <a:gradFill flip="none" rotWithShape="1">
+                  <a:gsLst>
+                    <a:gs pos="0">
+                      <a:srgbClr val="B45404"/>
+                    </a:gs>
+                    <a:gs pos="50000">
+                      <a:srgbClr val="E86C06"/>
+                    </a:gs>
+                    <a:gs pos="100000">
+                      <a:srgbClr val="F9770B"/>
+                    </a:gs>
+                  </a:gsLst>
+                  <a:path path="circle">
+                    <a:fillToRect l="50000" t="50000" r="50000" b="50000"/>
+                  </a:path>
+                  <a:tileRect/>
+                </a:gradFill>
+                <a:latin typeface="TT Hoves ExtraBold" panose="02000903040000020004" pitchFamily="50" charset="0"/>
               </a:rPr>
               <a:t>The Independence Principle</a:t>
             </a:r>
@@ -10760,58 +10259,20 @@
       </p:sp>
       <p:sp>
         <p:nvSpPr>
-          <p:cNvPr id="13" name="Rectangle 12"/>
-          <p:cNvSpPr/>
+          <p:cNvPr id="9" name="TextBox 8">
+            <a:extLst>
+              <a:ext uri="{FF2B5EF4-FFF2-40B4-BE49-F238E27FC236}">
+                <a16:creationId xmlns:a16="http://schemas.microsoft.com/office/drawing/2014/main" id="{73C00714-0F36-6BC8-C038-4D7F36CEB239}"/>
+              </a:ext>
+            </a:extLst>
+          </p:cNvPr>
+          <p:cNvSpPr txBox="1"/>
           <p:nvPr/>
         </p:nvSpPr>
         <p:spPr>
           <a:xfrm>
-            <a:off x="713232" y="1481328"/>
-            <a:ext cx="960120" cy="68580"/>
-          </a:xfrm>
-          <a:prstGeom prst="rect">
-            <a:avLst/>
-          </a:prstGeom>
-          <a:solidFill>
-            <a:srgbClr val="F9770B"/>
-          </a:solidFill>
-          <a:ln>
-            <a:noFill/>
-          </a:ln>
-          <a:effectLst/>
-        </p:spPr>
-        <p:style>
-          <a:lnRef idx="1">
-            <a:schemeClr val="accent1"/>
-          </a:lnRef>
-          <a:fillRef idx="3">
-            <a:schemeClr val="accent1"/>
-          </a:fillRef>
-          <a:effectRef idx="2">
-            <a:schemeClr val="accent1"/>
-          </a:effectRef>
-          <a:fontRef idx="minor">
-            <a:schemeClr val="lt1"/>
-          </a:fontRef>
-        </p:style>
-        <p:txBody>
-          <a:bodyPr rtlCol="0" anchor="ctr"/>
-          <a:lstStyle/>
-          <a:p>
-            <a:pPr algn="ctr"/>
-          </a:p>
-        </p:txBody>
-      </p:sp>
-      <p:sp>
-        <p:nvSpPr>
-          <p:cNvPr id="14" name="TextBox 13"/>
-          <p:cNvSpPr txBox="1"/>
-          <p:nvPr/>
-        </p:nvSpPr>
-        <p:spPr>
-          <a:xfrm>
-            <a:off x="694944" y="1691640"/>
-            <a:ext cx="10789920" cy="2011680"/>
+            <a:off x="699058" y="1536192"/>
+            <a:ext cx="10671048" cy="4270248"/>
           </a:xfrm>
           <a:prstGeom prst="rect">
             <a:avLst/>
@@ -10819,221 +10280,161 @@
           <a:noFill/>
         </p:spPr>
         <p:txBody>
-          <a:bodyPr wrap="square" anchor="t">
-            <a:spAutoFit/>
+          <a:bodyPr wrap="square" rtlCol="0">
+            <a:noAutofit/>
           </a:bodyPr>
           <a:lstStyle/>
           <a:p>
-            <a:pPr algn="l" marL="320040" indent="-320040">
+            <a:pPr marL="457200" indent="-457200" algn="l">
               <a:lnSpc>
-                <a:spcPct val="103000"/>
+                <a:spcPct val="104000"/>
               </a:lnSpc>
               <a:spcBef>
                 <a:spcPts val="0"/>
               </a:spcBef>
               <a:spcAft>
-                <a:spcPts val="500"/>
+                <a:spcPts val="700"/>
               </a:spcAft>
-              <a:buClr>
-                <a:srgbClr val="F9770B"/>
-              </a:buClr>
-              <a:buFont typeface="Arial"/>
+              <a:buFont typeface="Arial" pitchFamily="34" charset="0"/>
               <a:buChar char="•"/>
             </a:pPr>
             <a:r>
-              <a:rPr sz="1600">
-                <a:solidFill>
-                  <a:srgbClr val="262626"/>
-                </a:solidFill>
+              <a:rPr sz="2200">
                 <a:latin typeface="TT Hoves"/>
               </a:rPr>
               <a:t>Picture a hockey puck gliding in a straight line across a frictionless table.</a:t>
             </a:r>
           </a:p>
           <a:p>
-            <a:pPr algn="l" marL="320040" indent="-320040">
+            <a:pPr marL="457200" indent="-457200" algn="l">
               <a:lnSpc>
-                <a:spcPct val="103000"/>
+                <a:spcPct val="104000"/>
               </a:lnSpc>
               <a:spcBef>
                 <a:spcPts val="0"/>
               </a:spcBef>
               <a:spcAft>
-                <a:spcPts val="500"/>
+                <a:spcPts val="700"/>
               </a:spcAft>
-              <a:buClr>
-                <a:srgbClr val="F9770B"/>
-              </a:buClr>
-              <a:buFont typeface="Arial"/>
+              <a:buFont typeface="Arial" pitchFamily="34" charset="0"/>
               <a:buChar char="•"/>
             </a:pPr>
             <a:r>
-              <a:rPr sz="1600">
-                <a:solidFill>
-                  <a:srgbClr val="262626"/>
-                </a:solidFill>
+              <a:rPr sz="2200">
                 <a:latin typeface="TT Hoves"/>
               </a:rPr>
               <a:t>Someone gives it a </a:t>
             </a:r>
             <a:r>
-              <a:rPr sz="1600" i="1">
-                <a:solidFill>
-                  <a:srgbClr val="262626"/>
-                </a:solidFill>
+              <a:rPr sz="2200" i="1">
                 <a:latin typeface="TT Hoves"/>
               </a:rPr>
               <a:t>single sideways puff of air</a:t>
             </a:r>
             <a:r>
-              <a:rPr sz="1600">
-                <a:solidFill>
-                  <a:srgbClr val="262626"/>
-                </a:solidFill>
+              <a:rPr sz="2200">
                 <a:latin typeface="TT Hoves"/>
               </a:rPr>
               <a:t>. The puck now drifts diagonally — but its </a:t>
             </a:r>
             <a:r>
-              <a:rPr sz="1600" i="1">
-                <a:solidFill>
-                  <a:srgbClr val="262626"/>
-                </a:solidFill>
+              <a:rPr sz="2200" i="1">
                 <a:latin typeface="TT Hoves"/>
               </a:rPr>
               <a:t>original</a:t>
             </a:r>
             <a:r>
-              <a:rPr sz="1600">
-                <a:solidFill>
-                  <a:srgbClr val="262626"/>
-                </a:solidFill>
+              <a:rPr sz="2200">
                 <a:latin typeface="TT Hoves"/>
               </a:rPr>
               <a:t> forward speed never changed one bit.</a:t>
             </a:r>
           </a:p>
           <a:p>
-            <a:pPr algn="l" marL="320040" indent="-320040">
+            <a:pPr marL="457200" indent="-457200" algn="l">
               <a:lnSpc>
-                <a:spcPct val="103000"/>
+                <a:spcPct val="104000"/>
               </a:lnSpc>
               <a:spcBef>
                 <a:spcPts val="0"/>
               </a:spcBef>
               <a:spcAft>
-                <a:spcPts val="500"/>
+                <a:spcPts val="700"/>
               </a:spcAft>
-              <a:buClr>
-                <a:srgbClr val="F9770B"/>
-              </a:buClr>
-              <a:buFont typeface="Arial"/>
+              <a:buFont typeface="Arial" pitchFamily="34" charset="0"/>
               <a:buChar char="•"/>
             </a:pPr>
             <a:r>
-              <a:rPr sz="1600">
-                <a:solidFill>
-                  <a:srgbClr val="262626"/>
-                </a:solidFill>
+              <a:rPr sz="2200">
                 <a:latin typeface="TT Hoves"/>
               </a:rPr>
               <a:t>The generalization: </a:t>
             </a:r>
             <a:r>
-              <a:rPr sz="1600" b="1" i="1">
-                <a:solidFill>
-                  <a:srgbClr val="262626"/>
-                </a:solidFill>
+              <a:rPr sz="2200" b="1" i="1">
                 <a:latin typeface="TT Hoves"/>
               </a:rPr>
               <a:t>motion in two dimensions can be modeled as two independent motions in each of the two perpendicular directions</a:t>
             </a:r>
             <a:r>
-              <a:rPr sz="1600">
-                <a:solidFill>
-                  <a:srgbClr val="262626"/>
-                </a:solidFill>
+              <a:rPr sz="2200">
                 <a:latin typeface="TT Hoves"/>
               </a:rPr>
               <a:t> — a nudge in </a:t>
             </a:r>
             <a:r>
-              <a:rPr sz="1600" i="1">
-                <a:solidFill>
-                  <a:srgbClr val="262626"/>
-                </a:solidFill>
+              <a:rPr sz="2200" i="1">
                 <a:latin typeface="TT Hoves"/>
               </a:rPr>
               <a:t>y</a:t>
             </a:r>
             <a:r>
-              <a:rPr sz="1600">
-                <a:solidFill>
-                  <a:srgbClr val="262626"/>
-                </a:solidFill>
+              <a:rPr sz="2200">
                 <a:latin typeface="TT Hoves"/>
               </a:rPr>
               <a:t> never touches what's happening in </a:t>
             </a:r>
             <a:r>
-              <a:rPr sz="1600" i="1">
-                <a:solidFill>
-                  <a:srgbClr val="262626"/>
-                </a:solidFill>
+              <a:rPr sz="2200" i="1">
                 <a:latin typeface="TT Hoves"/>
               </a:rPr>
               <a:t>x</a:t>
             </a:r>
             <a:r>
-              <a:rPr sz="1600">
-                <a:solidFill>
-                  <a:srgbClr val="262626"/>
-                </a:solidFill>
+              <a:rPr sz="2200">
                 <a:latin typeface="TT Hoves"/>
               </a:rPr>
               <a:t>, and vice versa.</a:t>
             </a:r>
           </a:p>
           <a:p>
-            <a:pPr algn="l" marL="320040" indent="-320040">
+            <a:pPr marL="457200" indent="-457200" algn="l">
               <a:lnSpc>
-                <a:spcPct val="103000"/>
+                <a:spcPct val="104000"/>
               </a:lnSpc>
               <a:spcBef>
                 <a:spcPts val="0"/>
               </a:spcBef>
               <a:spcAft>
-                <a:spcPts val="500"/>
+                <a:spcPts val="700"/>
               </a:spcAft>
-              <a:buClr>
-                <a:srgbClr val="F9770B"/>
-              </a:buClr>
-              <a:buFont typeface="Arial"/>
+              <a:buFont typeface="Arial" pitchFamily="34" charset="0"/>
               <a:buChar char="•"/>
             </a:pPr>
             <a:r>
-              <a:rPr sz="1600">
-                <a:solidFill>
-                  <a:srgbClr val="262626"/>
-                </a:solidFill>
+              <a:rPr sz="2200">
                 <a:latin typeface="TT Hoves"/>
               </a:rPr>
               <a:t>This is </a:t>
             </a:r>
             <a:r>
-              <a:rPr sz="1600" i="1">
-                <a:solidFill>
-                  <a:srgbClr val="262626"/>
-                </a:solidFill>
+              <a:rPr sz="2200" i="1">
                 <a:latin typeface="TT Hoves"/>
               </a:rPr>
               <a:t>the</a:t>
             </a:r>
             <a:r>
-              <a:rPr sz="1600">
-                <a:solidFill>
-                  <a:srgbClr val="262626"/>
-                </a:solidFill>
+              <a:rPr sz="2200">
                 <a:latin typeface="TT Hoves"/>
               </a:rPr>
               <a:t> single most important idea in projectile motion. Everything else today builds on it.</a:t>
@@ -11041,30 +10442,6 @@
           </a:p>
         </p:txBody>
       </p:sp>
-      <p:pic>
-        <p:nvPicPr>
-          <p:cNvPr id="15" name="Picture 14" descr="independence.png"/>
-          <p:cNvPicPr>
-            <a:picLocks noChangeAspect="1"/>
-          </p:cNvPicPr>
-          <p:nvPr/>
-        </p:nvPicPr>
-        <p:blipFill>
-          <a:blip r:embed="rId3"/>
-          <a:stretch>
-            <a:fillRect/>
-          </a:stretch>
-        </p:blipFill>
-        <p:spPr>
-          <a:xfrm>
-            <a:off x="3327109" y="3840480"/>
-            <a:ext cx="5525588" cy="2148840"/>
-          </a:xfrm>
-          <a:prstGeom prst="rect">
-            <a:avLst/>
-          </a:prstGeom>
-        </p:spPr>
-      </p:pic>
     </p:spTree>
   </p:cSld>
   <p:clrMapOvr>
@@ -11316,8 +10693,8 @@
         </p:nvSpPr>
         <p:spPr>
           <a:xfrm>
-            <a:off x="694944" y="420624"/>
-            <a:ext cx="10789920" cy="1024128"/>
+            <a:off x="699400" y="619760"/>
+            <a:ext cx="11441800" cy="830997"/>
           </a:xfrm>
           <a:prstGeom prst="rect">
             <a:avLst/>
@@ -11331,11 +10708,25 @@
           <a:lstStyle/>
           <a:p>
             <a:r>
-              <a:rPr sz="3000" b="1">
-                <a:solidFill>
-                  <a:srgbClr val="1A1A1A"/>
-                </a:solidFill>
-                <a:latin typeface="TT Hoves ExtraBold"/>
+              <a:rPr lang="en-PH" sz="3300" dirty="0">
+                <a:gradFill flip="none" rotWithShape="1">
+                  <a:gsLst>
+                    <a:gs pos="0">
+                      <a:srgbClr val="B45404"/>
+                    </a:gs>
+                    <a:gs pos="50000">
+                      <a:srgbClr val="E86C06"/>
+                    </a:gs>
+                    <a:gs pos="100000">
+                      <a:srgbClr val="F9770B"/>
+                    </a:gs>
+                  </a:gsLst>
+                  <a:path path="circle">
+                    <a:fillToRect l="50000" t="50000" r="50000" b="50000"/>
+                  </a:path>
+                  <a:tileRect/>
+                </a:gradFill>
+                <a:latin typeface="TT Hoves ExtraBold" panose="02000903040000020004" pitchFamily="50" charset="0"/>
               </a:rPr>
               <a:t>The Governing Equations of Projectile Motion</a:t>
             </a:r>
@@ -11473,58 +10864,20 @@
       </p:sp>
       <p:sp>
         <p:nvSpPr>
-          <p:cNvPr id="13" name="Rectangle 12"/>
-          <p:cNvSpPr/>
+          <p:cNvPr id="9" name="TextBox 8">
+            <a:extLst>
+              <a:ext uri="{FF2B5EF4-FFF2-40B4-BE49-F238E27FC236}">
+                <a16:creationId xmlns:a16="http://schemas.microsoft.com/office/drawing/2014/main" id="{73C00714-0F36-6BC8-C038-4D7F36CEB239}"/>
+              </a:ext>
+            </a:extLst>
+          </p:cNvPr>
+          <p:cNvSpPr txBox="1"/>
           <p:nvPr/>
         </p:nvSpPr>
         <p:spPr>
           <a:xfrm>
-            <a:off x="713232" y="1481328"/>
-            <a:ext cx="960120" cy="68580"/>
-          </a:xfrm>
-          <a:prstGeom prst="rect">
-            <a:avLst/>
-          </a:prstGeom>
-          <a:solidFill>
-            <a:srgbClr val="F9770B"/>
-          </a:solidFill>
-          <a:ln>
-            <a:noFill/>
-          </a:ln>
-          <a:effectLst/>
-        </p:spPr>
-        <p:style>
-          <a:lnRef idx="1">
-            <a:schemeClr val="accent1"/>
-          </a:lnRef>
-          <a:fillRef idx="3">
-            <a:schemeClr val="accent1"/>
-          </a:fillRef>
-          <a:effectRef idx="2">
-            <a:schemeClr val="accent1"/>
-          </a:effectRef>
-          <a:fontRef idx="minor">
-            <a:schemeClr val="lt1"/>
-          </a:fontRef>
-        </p:style>
-        <p:txBody>
-          <a:bodyPr rtlCol="0" anchor="ctr"/>
-          <a:lstStyle/>
-          <a:p>
-            <a:pPr algn="ctr"/>
-          </a:p>
-        </p:txBody>
-      </p:sp>
-      <p:sp>
-        <p:nvSpPr>
-          <p:cNvPr id="14" name="TextBox 13"/>
-          <p:cNvSpPr txBox="1"/>
-          <p:nvPr/>
-        </p:nvSpPr>
-        <p:spPr>
-          <a:xfrm>
-            <a:off x="694944" y="1691640"/>
-            <a:ext cx="10789920" cy="548640"/>
+            <a:off x="699058" y="1536192"/>
+            <a:ext cx="10671048" cy="4270248"/>
           </a:xfrm>
           <a:prstGeom prst="rect">
             <a:avLst/>
@@ -11532,615 +10885,315 @@
           <a:noFill/>
         </p:spPr>
         <p:txBody>
-          <a:bodyPr wrap="square" anchor="t">
-            <a:spAutoFit/>
+          <a:bodyPr wrap="square" rtlCol="0">
+            <a:noAutofit/>
           </a:bodyPr>
           <a:lstStyle/>
           <a:p>
-            <a:pPr algn="l" marL="320040" indent="-320040">
+            <a:pPr marL="457200" indent="-457200" algn="l">
               <a:lnSpc>
-                <a:spcPct val="103000"/>
+                <a:spcPct val="104000"/>
               </a:lnSpc>
               <a:spcBef>
                 <a:spcPts val="0"/>
               </a:spcBef>
               <a:spcAft>
-                <a:spcPts val="800"/>
+                <a:spcPts val="700"/>
               </a:spcAft>
-              <a:buClr>
-                <a:srgbClr val="F9770B"/>
-              </a:buClr>
-              <a:buFont typeface="Arial"/>
+              <a:buFont typeface="Arial" pitchFamily="34" charset="0"/>
               <a:buChar char="•"/>
             </a:pPr>
             <a:r>
-              <a:rPr sz="1900">
-                <a:solidFill>
-                  <a:srgbClr val="262626"/>
-                </a:solidFill>
-                <a:latin typeface="TT Hoves"/>
-              </a:rPr>
-              <a:t>Two separate "mini-problems" running on the same clock, </a:t>
-            </a:r>
-            <a:r>
-              <a:rPr sz="1900" i="1">
-                <a:solidFill>
-                  <a:srgbClr val="262626"/>
-                </a:solidFill>
+              <a:rPr sz="2500">
+                <a:latin typeface="TT Hoves"/>
+              </a:rPr>
+              <a:t>Two separate "mini-problems" run on the same clock, </a:t>
+            </a:r>
+            <a:r>
+              <a:rPr sz="2500" i="1">
                 <a:latin typeface="TT Hoves"/>
               </a:rPr>
               <a:t>t</a:t>
             </a:r>
             <a:r>
-              <a:rPr sz="1900">
-                <a:solidFill>
-                  <a:srgbClr val="262626"/>
-                </a:solidFill>
-                <a:latin typeface="TT Hoves"/>
-              </a:rPr>
-              <a:t> :</a:t>
-            </a:r>
-          </a:p>
-        </p:txBody>
-      </p:sp>
-      <p:graphicFrame>
-        <p:nvGraphicFramePr>
-          <p:cNvPr id="15" name="Table 14"/>
-          <p:cNvGraphicFramePr>
-            <a:graphicFrameLocks noGrp="1"/>
-          </p:cNvGraphicFramePr>
-          <p:nvPr/>
-        </p:nvGraphicFramePr>
-        <p:xfrm>
-          <a:off x="694944" y="2377440"/>
-          <a:ext cx="10789920" cy="2267712"/>
-        </p:xfrm>
-        <a:graphic>
-          <a:graphicData uri="http://schemas.openxmlformats.org/drawingml/2006/table">
-            <a:tbl>
-              <a:tblPr firstRow="1">
-                <a:tableStyleId>{5C22544A-7EE6-4342-B048-85BDC9FD1C3A}</a:tableStyleId>
-              </a:tblPr>
-              <a:tblGrid>
-                <a:gridCol w="5394960"/>
-                <a:gridCol w="5394960"/>
-              </a:tblGrid>
-              <a:tr h="566928">
-                <a:tc>
-                  <a:txBody>
-                    <a:bodyPr wrap="square"/>
-                    <a:lstStyle/>
-                    <a:p>
-                      <a:pPr algn="l"/>
-                      <a:r>
-                        <a:rPr sz="1800" b="1">
-                          <a:solidFill>
-                            <a:srgbClr val="FFFFFF"/>
-                          </a:solidFill>
-                          <a:latin typeface="TT Hoves"/>
-                        </a:rPr>
-                        <a:t>Horizontal  (x)</a:t>
-                      </a:r>
-                    </a:p>
-                  </a:txBody>
-                  <a:tcPr marL="114300" marR="114300" marT="63500" marB="63500" anchor="ctr">
-                    <a:solidFill>
-                      <a:srgbClr val="F9770B"/>
-                    </a:solidFill>
-                  </a:tcPr>
-                </a:tc>
-                <a:tc>
-                  <a:txBody>
-                    <a:bodyPr wrap="square"/>
-                    <a:lstStyle/>
-                    <a:p>
-                      <a:pPr algn="l"/>
-                      <a:r>
-                        <a:rPr sz="1800" b="1">
-                          <a:solidFill>
-                            <a:srgbClr val="FFFFFF"/>
-                          </a:solidFill>
-                          <a:latin typeface="TT Hoves"/>
-                        </a:rPr>
-                        <a:t>Vertical  (y)</a:t>
-                      </a:r>
-                    </a:p>
-                  </a:txBody>
-                  <a:tcPr marL="114300" marR="114300" marT="63500" marB="63500" anchor="ctr">
-                    <a:solidFill>
-                      <a:srgbClr val="F9770B"/>
-                    </a:solidFill>
-                  </a:tcPr>
-                </a:tc>
-              </a:tr>
-              <a:tr h="566928">
-                <a:tc>
-                  <a:txBody>
-                    <a:bodyPr wrap="square"/>
-                    <a:lstStyle/>
-                    <a:p>
-                      <a:pPr algn="l"/>
-                      <a:r>
-                        <a:rPr sz="1700">
-                          <a:solidFill>
-                            <a:srgbClr val="262626"/>
-                          </a:solidFill>
-                          <a:latin typeface="TT Hoves"/>
-                        </a:rPr>
-                        <a:t>constant velocity</a:t>
-                      </a:r>
-                    </a:p>
-                  </a:txBody>
-                  <a:tcPr marL="114300" marR="114300" marT="63500" marB="63500" anchor="ctr">
-                    <a:solidFill>
-                      <a:srgbClr val="FFFFFF"/>
-                    </a:solidFill>
-                  </a:tcPr>
-                </a:tc>
-                <a:tc>
-                  <a:txBody>
-                    <a:bodyPr wrap="square"/>
-                    <a:lstStyle/>
-                    <a:p>
-                      <a:pPr algn="l"/>
-                      <a:r>
-                        <a:rPr sz="1700">
-                          <a:solidFill>
-                            <a:srgbClr val="262626"/>
-                          </a:solidFill>
-                          <a:latin typeface="TT Hoves"/>
-                        </a:rPr>
-                        <a:t>constant acceleration,  </a:t>
-                      </a:r>
-                      <a:r>
-                        <a:rPr sz="1700" i="1">
-                          <a:solidFill>
-                            <a:srgbClr val="262626"/>
-                          </a:solidFill>
-                          <a:latin typeface="TT Hoves"/>
-                        </a:rPr>
-                        <a:t>a</a:t>
-                      </a:r>
-                      <a:r>
-                        <a:rPr sz="1700">
-                          <a:solidFill>
-                            <a:srgbClr val="262626"/>
-                          </a:solidFill>
-                          <a:latin typeface="TT Hoves"/>
-                        </a:rPr>
-                        <a:t> = –</a:t>
-                      </a:r>
-                      <a:r>
-                        <a:rPr sz="1700" i="1">
-                          <a:solidFill>
-                            <a:srgbClr val="262626"/>
-                          </a:solidFill>
-                          <a:latin typeface="TT Hoves"/>
-                        </a:rPr>
-                        <a:t>g</a:t>
-                      </a:r>
-                    </a:p>
-                  </a:txBody>
-                  <a:tcPr marL="114300" marR="114300" marT="63500" marB="63500" anchor="ctr">
-                    <a:solidFill>
-                      <a:srgbClr val="FFFFFF"/>
-                    </a:solidFill>
-                  </a:tcPr>
-                </a:tc>
-              </a:tr>
-              <a:tr h="566928">
-                <a:tc>
-                  <a:txBody>
-                    <a:bodyPr wrap="square"/>
-                    <a:lstStyle/>
-                    <a:p>
-                      <a:pPr algn="l"/>
-                      <a:r>
-                        <a:rPr sz="1700" i="1">
-                          <a:solidFill>
-                            <a:srgbClr val="262626"/>
-                          </a:solidFill>
-                          <a:latin typeface="TT Hoves"/>
-                        </a:rPr>
-                        <a:t>x</a:t>
-                      </a:r>
-                      <a:r>
-                        <a:rPr sz="1564" baseline="-25000">
-                          <a:solidFill>
-                            <a:srgbClr val="262626"/>
-                          </a:solidFill>
-                          <a:latin typeface="TT Hoves"/>
-                        </a:rPr>
-                        <a:t>f</a:t>
-                      </a:r>
-                      <a:r>
-                        <a:rPr sz="1700">
-                          <a:solidFill>
-                            <a:srgbClr val="262626"/>
-                          </a:solidFill>
-                          <a:latin typeface="TT Hoves"/>
-                        </a:rPr>
-                        <a:t> = </a:t>
-                      </a:r>
-                      <a:r>
-                        <a:rPr sz="1700" i="1">
-                          <a:solidFill>
-                            <a:srgbClr val="262626"/>
-                          </a:solidFill>
-                          <a:latin typeface="TT Hoves"/>
-                        </a:rPr>
-                        <a:t>x</a:t>
-                      </a:r>
-                      <a:r>
-                        <a:rPr sz="1564" baseline="-25000">
-                          <a:solidFill>
-                            <a:srgbClr val="262626"/>
-                          </a:solidFill>
-                          <a:latin typeface="TT Hoves"/>
-                        </a:rPr>
-                        <a:t>i</a:t>
-                      </a:r>
-                      <a:r>
-                        <a:rPr sz="1700">
-                          <a:solidFill>
-                            <a:srgbClr val="262626"/>
-                          </a:solidFill>
-                          <a:latin typeface="TT Hoves"/>
-                        </a:rPr>
-                        <a:t> + </a:t>
-                      </a:r>
-                      <a:r>
-                        <a:rPr sz="1700" i="1">
-                          <a:solidFill>
-                            <a:srgbClr val="262626"/>
-                          </a:solidFill>
-                          <a:latin typeface="TT Hoves"/>
-                        </a:rPr>
-                        <a:t>v</a:t>
-                      </a:r>
-                      <a:r>
-                        <a:rPr sz="1564" baseline="-25000">
-                          <a:solidFill>
-                            <a:srgbClr val="262626"/>
-                          </a:solidFill>
-                          <a:latin typeface="TT Hoves"/>
-                        </a:rPr>
-                        <a:t>xi</a:t>
-                      </a:r>
-                      <a:r>
-                        <a:rPr sz="1700" i="1">
-                          <a:solidFill>
-                            <a:srgbClr val="262626"/>
-                          </a:solidFill>
-                          <a:latin typeface="TT Hoves"/>
-                        </a:rPr>
-                        <a:t>t</a:t>
-                      </a:r>
-                    </a:p>
-                  </a:txBody>
-                  <a:tcPr marL="114300" marR="114300" marT="63500" marB="63500" anchor="ctr">
-                    <a:solidFill>
-                      <a:srgbClr val="FBF3EC"/>
-                    </a:solidFill>
-                  </a:tcPr>
-                </a:tc>
-                <a:tc>
-                  <a:txBody>
-                    <a:bodyPr wrap="square"/>
-                    <a:lstStyle/>
-                    <a:p>
-                      <a:pPr algn="l"/>
-                      <a:r>
-                        <a:rPr sz="1700" i="1">
-                          <a:solidFill>
-                            <a:srgbClr val="262626"/>
-                          </a:solidFill>
-                          <a:latin typeface="TT Hoves"/>
-                        </a:rPr>
-                        <a:t>y</a:t>
-                      </a:r>
-                      <a:r>
-                        <a:rPr sz="1564" baseline="-25000">
-                          <a:solidFill>
-                            <a:srgbClr val="262626"/>
-                          </a:solidFill>
-                          <a:latin typeface="TT Hoves"/>
-                        </a:rPr>
-                        <a:t>f</a:t>
-                      </a:r>
-                      <a:r>
-                        <a:rPr sz="1700">
-                          <a:solidFill>
-                            <a:srgbClr val="262626"/>
-                          </a:solidFill>
-                          <a:latin typeface="TT Hoves"/>
-                        </a:rPr>
-                        <a:t> = </a:t>
-                      </a:r>
-                      <a:r>
-                        <a:rPr sz="1700" i="1">
-                          <a:solidFill>
-                            <a:srgbClr val="262626"/>
-                          </a:solidFill>
-                          <a:latin typeface="TT Hoves"/>
-                        </a:rPr>
-                        <a:t>y</a:t>
-                      </a:r>
-                      <a:r>
-                        <a:rPr sz="1564" baseline="-25000">
-                          <a:solidFill>
-                            <a:srgbClr val="262626"/>
-                          </a:solidFill>
-                          <a:latin typeface="TT Hoves"/>
-                        </a:rPr>
-                        <a:t>i</a:t>
-                      </a:r>
-                      <a:r>
-                        <a:rPr sz="1700">
-                          <a:solidFill>
-                            <a:srgbClr val="262626"/>
-                          </a:solidFill>
-                          <a:latin typeface="TT Hoves"/>
-                        </a:rPr>
-                        <a:t> + </a:t>
-                      </a:r>
-                      <a:r>
-                        <a:rPr sz="1700" i="1">
-                          <a:solidFill>
-                            <a:srgbClr val="262626"/>
-                          </a:solidFill>
-                          <a:latin typeface="TT Hoves"/>
-                        </a:rPr>
-                        <a:t>v</a:t>
-                      </a:r>
-                      <a:r>
-                        <a:rPr sz="1564" baseline="-25000">
-                          <a:solidFill>
-                            <a:srgbClr val="262626"/>
-                          </a:solidFill>
-                          <a:latin typeface="TT Hoves"/>
-                        </a:rPr>
-                        <a:t>yi</a:t>
-                      </a:r>
-                      <a:r>
-                        <a:rPr sz="1700" i="1">
-                          <a:solidFill>
-                            <a:srgbClr val="262626"/>
-                          </a:solidFill>
-                          <a:latin typeface="TT Hoves"/>
-                        </a:rPr>
-                        <a:t>t</a:t>
-                      </a:r>
-                      <a:r>
-                        <a:rPr sz="1700">
-                          <a:solidFill>
-                            <a:srgbClr val="262626"/>
-                          </a:solidFill>
-                          <a:latin typeface="TT Hoves"/>
-                        </a:rPr>
-                        <a:t> – ½</a:t>
-                      </a:r>
-                      <a:r>
-                        <a:rPr sz="1700" i="1">
-                          <a:solidFill>
-                            <a:srgbClr val="262626"/>
-                          </a:solidFill>
-                          <a:latin typeface="TT Hoves"/>
-                        </a:rPr>
-                        <a:t>g</a:t>
-                      </a:r>
-                      <a:r>
-                        <a:rPr sz="1700" i="1">
-                          <a:solidFill>
-                            <a:srgbClr val="262626"/>
-                          </a:solidFill>
-                          <a:latin typeface="TT Hoves"/>
-                        </a:rPr>
-                        <a:t>t</a:t>
-                      </a:r>
-                      <a:r>
-                        <a:rPr sz="1564" baseline="30000">
-                          <a:solidFill>
-                            <a:srgbClr val="262626"/>
-                          </a:solidFill>
-                          <a:latin typeface="TT Hoves"/>
-                        </a:rPr>
-                        <a:t>2</a:t>
-                      </a:r>
-                    </a:p>
-                  </a:txBody>
-                  <a:tcPr marL="114300" marR="114300" marT="63500" marB="63500" anchor="ctr">
-                    <a:solidFill>
-                      <a:srgbClr val="FBF3EC"/>
-                    </a:solidFill>
-                  </a:tcPr>
-                </a:tc>
-              </a:tr>
-              <a:tr h="566928">
-                <a:tc>
-                  <a:txBody>
-                    <a:bodyPr wrap="square"/>
-                    <a:lstStyle/>
-                    <a:p>
-                      <a:pPr algn="l"/>
-                      <a:r>
-                        <a:rPr sz="1700">
-                          <a:solidFill>
-                            <a:srgbClr val="262626"/>
-                          </a:solidFill>
-                          <a:latin typeface="TT Hoves"/>
-                        </a:rPr>
-                        <a:t>—</a:t>
-                      </a:r>
-                    </a:p>
-                  </a:txBody>
-                  <a:tcPr marL="114300" marR="114300" marT="63500" marB="63500" anchor="ctr">
-                    <a:solidFill>
-                      <a:srgbClr val="FFFFFF"/>
-                    </a:solidFill>
-                  </a:tcPr>
-                </a:tc>
-                <a:tc>
-                  <a:txBody>
-                    <a:bodyPr wrap="square"/>
-                    <a:lstStyle/>
-                    <a:p>
-                      <a:pPr algn="l"/>
-                      <a:r>
-                        <a:rPr sz="1700" i="1">
-                          <a:solidFill>
-                            <a:srgbClr val="262626"/>
-                          </a:solidFill>
-                          <a:latin typeface="TT Hoves"/>
-                        </a:rPr>
-                        <a:t>v</a:t>
-                      </a:r>
-                      <a:r>
-                        <a:rPr sz="1564" baseline="-25000">
-                          <a:solidFill>
-                            <a:srgbClr val="262626"/>
-                          </a:solidFill>
-                          <a:latin typeface="TT Hoves"/>
-                        </a:rPr>
-                        <a:t>yf</a:t>
-                      </a:r>
-                      <a:r>
-                        <a:rPr sz="1700">
-                          <a:solidFill>
-                            <a:srgbClr val="262626"/>
-                          </a:solidFill>
-                          <a:latin typeface="TT Hoves"/>
-                        </a:rPr>
-                        <a:t> = </a:t>
-                      </a:r>
-                      <a:r>
-                        <a:rPr sz="1700" i="1">
-                          <a:solidFill>
-                            <a:srgbClr val="262626"/>
-                          </a:solidFill>
-                          <a:latin typeface="TT Hoves"/>
-                        </a:rPr>
-                        <a:t>v</a:t>
-                      </a:r>
-                      <a:r>
-                        <a:rPr sz="1564" baseline="-25000">
-                          <a:solidFill>
-                            <a:srgbClr val="262626"/>
-                          </a:solidFill>
-                          <a:latin typeface="TT Hoves"/>
-                        </a:rPr>
-                        <a:t>yi</a:t>
-                      </a:r>
-                      <a:r>
-                        <a:rPr sz="1700">
-                          <a:solidFill>
-                            <a:srgbClr val="262626"/>
-                          </a:solidFill>
-                          <a:latin typeface="TT Hoves"/>
-                        </a:rPr>
-                        <a:t> – </a:t>
-                      </a:r>
-                      <a:r>
-                        <a:rPr sz="1700" i="1">
-                          <a:solidFill>
-                            <a:srgbClr val="262626"/>
-                          </a:solidFill>
-                          <a:latin typeface="TT Hoves"/>
-                        </a:rPr>
-                        <a:t>g</a:t>
-                      </a:r>
-                      <a:r>
-                        <a:rPr sz="1700" i="1">
-                          <a:solidFill>
-                            <a:srgbClr val="262626"/>
-                          </a:solidFill>
-                          <a:latin typeface="TT Hoves"/>
-                        </a:rPr>
-                        <a:t>t</a:t>
-                      </a:r>
-                    </a:p>
-                  </a:txBody>
-                  <a:tcPr marL="114300" marR="114300" marT="63500" marB="63500" anchor="ctr">
-                    <a:solidFill>
-                      <a:srgbClr val="FFFFFF"/>
-                    </a:solidFill>
-                  </a:tcPr>
-                </a:tc>
-              </a:tr>
-            </a:tbl>
-          </a:graphicData>
-        </a:graphic>
-      </p:graphicFrame>
-      <p:sp>
-        <p:nvSpPr>
-          <p:cNvPr id="16" name="TextBox 15"/>
-          <p:cNvSpPr txBox="1"/>
-          <p:nvPr/>
-        </p:nvSpPr>
-        <p:spPr>
-          <a:xfrm>
-            <a:off x="694944" y="4846320"/>
-            <a:ext cx="10789920" cy="914400"/>
-          </a:xfrm>
-          <a:prstGeom prst="rect">
-            <a:avLst/>
-          </a:prstGeom>
-          <a:noFill/>
-        </p:spPr>
-        <p:txBody>
-          <a:bodyPr wrap="square" anchor="t">
-            <a:spAutoFit/>
-          </a:bodyPr>
-          <a:lstStyle/>
-          <a:p>
-            <a:pPr algn="l" marL="320040" indent="-320040">
+              <a:rPr sz="2500">
+                <a:latin typeface="TT Hoves"/>
+              </a:rPr>
+              <a:t> — horizontal is </a:t>
+            </a:r>
+            <a:r>
+              <a:rPr sz="2500" i="1">
+                <a:latin typeface="TT Hoves"/>
+              </a:rPr>
+              <a:t>constant velocity</a:t>
+            </a:r>
+            <a:r>
+              <a:rPr sz="2500">
+                <a:latin typeface="TT Hoves"/>
+              </a:rPr>
+              <a:t>, vertical is </a:t>
+            </a:r>
+            <a:r>
+              <a:rPr sz="2500" i="1">
+                <a:latin typeface="TT Hoves"/>
+              </a:rPr>
+              <a:t>constant acceleration</a:t>
+            </a:r>
+            <a:r>
+              <a:rPr sz="2500">
+                <a:latin typeface="TT Hoves"/>
+              </a:rPr>
+              <a:t> (a = –g):</a:t>
+            </a:r>
+          </a:p>
+          <a:p>
+            <a:pPr algn="ctr">
               <a:lnSpc>
-                <a:spcPct val="103000"/>
+                <a:spcPct val="104000"/>
+              </a:lnSpc>
+              <a:spcBef>
+                <a:spcPts val="400"/>
+              </a:spcBef>
+              <a:spcAft>
+                <a:spcPts val="700"/>
+              </a:spcAft>
+              <a:buNone/>
+            </a:pPr>
+            <a:r>
+              <a:rPr sz="2700" b="1" i="1">
+                <a:latin typeface="TT Hoves"/>
+              </a:rPr>
+              <a:t>x</a:t>
+            </a:r>
+            <a:r>
+              <a:rPr sz="2484" baseline="-25000">
+                <a:latin typeface="TT Hoves"/>
+              </a:rPr>
+              <a:t>f</a:t>
+            </a:r>
+            <a:r>
+              <a:rPr sz="2700" b="1">
+                <a:latin typeface="TT Hoves"/>
+              </a:rPr>
+              <a:t> = </a:t>
+            </a:r>
+            <a:r>
+              <a:rPr sz="2700" b="1" i="1">
+                <a:latin typeface="TT Hoves"/>
+              </a:rPr>
+              <a:t>x</a:t>
+            </a:r>
+            <a:r>
+              <a:rPr sz="2484" baseline="-25000">
+                <a:latin typeface="TT Hoves"/>
+              </a:rPr>
+              <a:t>i</a:t>
+            </a:r>
+            <a:r>
+              <a:rPr sz="2700" b="1">
+                <a:latin typeface="TT Hoves"/>
+              </a:rPr>
+              <a:t> + </a:t>
+            </a:r>
+            <a:r>
+              <a:rPr sz="2700" b="1" i="1">
+                <a:latin typeface="TT Hoves"/>
+              </a:rPr>
+              <a:t>v</a:t>
+            </a:r>
+            <a:r>
+              <a:rPr sz="2484" baseline="-25000">
+                <a:latin typeface="TT Hoves"/>
+              </a:rPr>
+              <a:t>xi</a:t>
+            </a:r>
+            <a:r>
+              <a:rPr sz="2700" b="1" i="1">
+                <a:latin typeface="TT Hoves"/>
+              </a:rPr>
+              <a:t>t</a:t>
+            </a:r>
+            <a:r>
+              <a:rPr sz="2700" b="1">
+                <a:latin typeface="TT Hoves"/>
+              </a:rPr>
+              <a:t>          </a:t>
+            </a:r>
+            <a:r>
+              <a:rPr sz="2700" b="1" i="1">
+                <a:latin typeface="TT Hoves"/>
+              </a:rPr>
+              <a:t>y</a:t>
+            </a:r>
+            <a:r>
+              <a:rPr sz="2484" baseline="-25000">
+                <a:latin typeface="TT Hoves"/>
+              </a:rPr>
+              <a:t>f</a:t>
+            </a:r>
+            <a:r>
+              <a:rPr sz="2700" b="1">
+                <a:latin typeface="TT Hoves"/>
+              </a:rPr>
+              <a:t> = </a:t>
+            </a:r>
+            <a:r>
+              <a:rPr sz="2700" b="1" i="1">
+                <a:latin typeface="TT Hoves"/>
+              </a:rPr>
+              <a:t>y</a:t>
+            </a:r>
+            <a:r>
+              <a:rPr sz="2484" baseline="-25000">
+                <a:latin typeface="TT Hoves"/>
+              </a:rPr>
+              <a:t>i</a:t>
+            </a:r>
+            <a:r>
+              <a:rPr sz="2700" b="1">
+                <a:latin typeface="TT Hoves"/>
+              </a:rPr>
+              <a:t> + </a:t>
+            </a:r>
+            <a:r>
+              <a:rPr sz="2700" b="1" i="1">
+                <a:latin typeface="TT Hoves"/>
+              </a:rPr>
+              <a:t>v</a:t>
+            </a:r>
+            <a:r>
+              <a:rPr sz="2484" baseline="-25000">
+                <a:latin typeface="TT Hoves"/>
+              </a:rPr>
+              <a:t>yi</a:t>
+            </a:r>
+            <a:r>
+              <a:rPr sz="2700" b="1" i="1">
+                <a:latin typeface="TT Hoves"/>
+              </a:rPr>
+              <a:t>t</a:t>
+            </a:r>
+            <a:r>
+              <a:rPr sz="2700" b="1">
+                <a:latin typeface="TT Hoves"/>
+              </a:rPr>
+              <a:t> – ½</a:t>
+            </a:r>
+            <a:r>
+              <a:rPr sz="2700" b="1" i="1">
+                <a:latin typeface="TT Hoves"/>
+              </a:rPr>
+              <a:t>g</a:t>
+            </a:r>
+            <a:r>
+              <a:rPr sz="2700" b="1" i="1">
+                <a:latin typeface="TT Hoves"/>
+              </a:rPr>
+              <a:t>t</a:t>
+            </a:r>
+            <a:r>
+              <a:rPr sz="2484" baseline="30000">
+                <a:latin typeface="TT Hoves"/>
+              </a:rPr>
+              <a:t>2</a:t>
+            </a:r>
+          </a:p>
+          <a:p>
+            <a:pPr algn="ctr">
+              <a:lnSpc>
+                <a:spcPct val="104000"/>
+              </a:lnSpc>
+              <a:spcBef>
+                <a:spcPts val="400"/>
+              </a:spcBef>
+              <a:spcAft>
+                <a:spcPts val="700"/>
+              </a:spcAft>
+              <a:buNone/>
+            </a:pPr>
+            <a:r>
+              <a:rPr sz="2700" b="1" i="1">
+                <a:latin typeface="TT Hoves"/>
+              </a:rPr>
+              <a:t>v</a:t>
+            </a:r>
+            <a:r>
+              <a:rPr sz="2484" baseline="-25000">
+                <a:latin typeface="TT Hoves"/>
+              </a:rPr>
+              <a:t>yf</a:t>
+            </a:r>
+            <a:r>
+              <a:rPr sz="2700" b="1">
+                <a:latin typeface="TT Hoves"/>
+              </a:rPr>
+              <a:t> = </a:t>
+            </a:r>
+            <a:r>
+              <a:rPr sz="2700" b="1" i="1">
+                <a:latin typeface="TT Hoves"/>
+              </a:rPr>
+              <a:t>v</a:t>
+            </a:r>
+            <a:r>
+              <a:rPr sz="2484" baseline="-25000">
+                <a:latin typeface="TT Hoves"/>
+              </a:rPr>
+              <a:t>yi</a:t>
+            </a:r>
+            <a:r>
+              <a:rPr sz="2700" b="1">
+                <a:latin typeface="TT Hoves"/>
+              </a:rPr>
+              <a:t> – </a:t>
+            </a:r>
+            <a:r>
+              <a:rPr sz="2700" b="1" i="1">
+                <a:latin typeface="TT Hoves"/>
+              </a:rPr>
+              <a:t>g</a:t>
+            </a:r>
+            <a:r>
+              <a:rPr sz="2700" b="1" i="1">
+                <a:latin typeface="TT Hoves"/>
+              </a:rPr>
+              <a:t>t</a:t>
+            </a:r>
+          </a:p>
+          <a:p>
+            <a:pPr marL="457200" indent="-457200" algn="l">
+              <a:lnSpc>
+                <a:spcPct val="104000"/>
               </a:lnSpc>
               <a:spcBef>
                 <a:spcPts val="0"/>
               </a:spcBef>
               <a:spcAft>
-                <a:spcPts val="800"/>
+                <a:spcPts val="700"/>
               </a:spcAft>
-              <a:buClr>
-                <a:srgbClr val="F9770B"/>
-              </a:buClr>
-              <a:buFont typeface="Arial"/>
+              <a:buFont typeface="Arial" pitchFamily="34" charset="0"/>
               <a:buChar char="•"/>
             </a:pPr>
             <a:r>
-              <a:rPr sz="1800" i="1">
-                <a:solidFill>
-                  <a:srgbClr val="262626"/>
-                </a:solidFill>
+              <a:rPr sz="2500" i="1">
                 <a:latin typeface="TT Hoves"/>
               </a:rPr>
               <a:t>g</a:t>
             </a:r>
             <a:r>
-              <a:rPr sz="1800">
-                <a:solidFill>
-                  <a:srgbClr val="262626"/>
-                </a:solidFill>
+              <a:rPr sz="2500">
                 <a:latin typeface="TT Hoves"/>
               </a:rPr>
               <a:t> is the only acceleration in the whole system, and it only ever touches the </a:t>
             </a:r>
             <a:r>
-              <a:rPr sz="1800" i="1">
-                <a:solidFill>
-                  <a:srgbClr val="262626"/>
-                </a:solidFill>
+              <a:rPr sz="2500" i="1">
                 <a:latin typeface="TT Hoves"/>
               </a:rPr>
               <a:t>y</a:t>
             </a:r>
             <a:r>
-              <a:rPr sz="1800">
-                <a:solidFill>
-                  <a:srgbClr val="262626"/>
-                </a:solidFill>
+              <a:rPr sz="2500">
                 <a:latin typeface="TT Hoves"/>
               </a:rPr>
               <a:t>-equations.</a:t>
@@ -12399,8 +11452,8 @@
         </p:nvSpPr>
         <p:spPr>
           <a:xfrm>
-            <a:off x="694944" y="420624"/>
-            <a:ext cx="10789920" cy="1024128"/>
+            <a:off x="699400" y="619760"/>
+            <a:ext cx="11441800" cy="830997"/>
           </a:xfrm>
           <a:prstGeom prst="rect">
             <a:avLst/>
@@ -12414,11 +11467,25 @@
           <a:lstStyle/>
           <a:p>
             <a:r>
-              <a:rPr sz="3000" b="1">
-                <a:solidFill>
-                  <a:srgbClr val="1A1A1A"/>
-                </a:solidFill>
-                <a:latin typeface="TT Hoves ExtraBold"/>
+              <a:rPr lang="en-PH" sz="2800" dirty="0">
+                <a:gradFill flip="none" rotWithShape="1">
+                  <a:gsLst>
+                    <a:gs pos="0">
+                      <a:srgbClr val="B45404"/>
+                    </a:gs>
+                    <a:gs pos="50000">
+                      <a:srgbClr val="E86C06"/>
+                    </a:gs>
+                    <a:gs pos="100000">
+                      <a:srgbClr val="F9770B"/>
+                    </a:gs>
+                  </a:gsLst>
+                  <a:path path="circle">
+                    <a:fillToRect l="50000" t="50000" r="50000" b="50000"/>
+                  </a:path>
+                  <a:tileRect/>
+                </a:gradFill>
+                <a:latin typeface="TT Hoves ExtraBold" panose="02000903040000020004" pitchFamily="50" charset="0"/>
               </a:rPr>
               <a:t>Special-Case Shortcuts — Range and Max Height</a:t>
             </a:r>
@@ -12556,58 +11623,20 @@
       </p:sp>
       <p:sp>
         <p:nvSpPr>
-          <p:cNvPr id="13" name="Rectangle 12"/>
-          <p:cNvSpPr/>
+          <p:cNvPr id="9" name="TextBox 8">
+            <a:extLst>
+              <a:ext uri="{FF2B5EF4-FFF2-40B4-BE49-F238E27FC236}">
+                <a16:creationId xmlns:a16="http://schemas.microsoft.com/office/drawing/2014/main" id="{73C00714-0F36-6BC8-C038-4D7F36CEB239}"/>
+              </a:ext>
+            </a:extLst>
+          </p:cNvPr>
+          <p:cNvSpPr txBox="1"/>
           <p:nvPr/>
         </p:nvSpPr>
         <p:spPr>
           <a:xfrm>
-            <a:off x="713232" y="1481328"/>
-            <a:ext cx="960120" cy="68580"/>
-          </a:xfrm>
-          <a:prstGeom prst="rect">
-            <a:avLst/>
-          </a:prstGeom>
-          <a:solidFill>
-            <a:srgbClr val="F9770B"/>
-          </a:solidFill>
-          <a:ln>
-            <a:noFill/>
-          </a:ln>
-          <a:effectLst/>
-        </p:spPr>
-        <p:style>
-          <a:lnRef idx="1">
-            <a:schemeClr val="accent1"/>
-          </a:lnRef>
-          <a:fillRef idx="3">
-            <a:schemeClr val="accent1"/>
-          </a:fillRef>
-          <a:effectRef idx="2">
-            <a:schemeClr val="accent1"/>
-          </a:effectRef>
-          <a:fontRef idx="minor">
-            <a:schemeClr val="lt1"/>
-          </a:fontRef>
-        </p:style>
-        <p:txBody>
-          <a:bodyPr rtlCol="0" anchor="ctr"/>
-          <a:lstStyle/>
-          <a:p>
-            <a:pPr algn="ctr"/>
-          </a:p>
-        </p:txBody>
-      </p:sp>
-      <p:sp>
-        <p:nvSpPr>
-          <p:cNvPr id="14" name="TextBox 13"/>
-          <p:cNvSpPr txBox="1"/>
-          <p:nvPr/>
-        </p:nvSpPr>
-        <p:spPr>
-          <a:xfrm>
-            <a:off x="694944" y="1691640"/>
-            <a:ext cx="10789920" cy="640080"/>
+            <a:off x="699058" y="1536192"/>
+            <a:ext cx="10671048" cy="4270248"/>
           </a:xfrm>
           <a:prstGeom prst="rect">
             <a:avLst/>
@@ -12615,454 +11644,239 @@
           <a:noFill/>
         </p:spPr>
         <p:txBody>
-          <a:bodyPr wrap="square" anchor="t">
-            <a:spAutoFit/>
+          <a:bodyPr wrap="square" rtlCol="0">
+            <a:noAutofit/>
           </a:bodyPr>
           <a:lstStyle/>
           <a:p>
-            <a:pPr algn="l" marL="320040" indent="-320040">
+            <a:pPr marL="457200" indent="-457200" algn="l">
               <a:lnSpc>
-                <a:spcPct val="103000"/>
+                <a:spcPct val="104000"/>
               </a:lnSpc>
               <a:spcBef>
                 <a:spcPts val="0"/>
               </a:spcBef>
               <a:spcAft>
-                <a:spcPts val="800"/>
+                <a:spcPts val="700"/>
               </a:spcAft>
-              <a:buClr>
-                <a:srgbClr val="F9770B"/>
-              </a:buClr>
-              <a:buFont typeface="Arial"/>
+              <a:buFont typeface="Arial" pitchFamily="34" charset="0"/>
               <a:buChar char="•"/>
             </a:pPr>
             <a:r>
-              <a:rPr sz="1900">
-                <a:solidFill>
-                  <a:srgbClr val="262626"/>
-                </a:solidFill>
+              <a:rPr sz="2500">
                 <a:latin typeface="TT Hoves"/>
               </a:rPr>
               <a:t>When a projectile launches and lands at the </a:t>
             </a:r>
             <a:r>
-              <a:rPr sz="1900" i="1">
-                <a:solidFill>
-                  <a:srgbClr val="262626"/>
-                </a:solidFill>
+              <a:rPr sz="2500" i="1">
                 <a:latin typeface="TT Hoves"/>
               </a:rPr>
               <a:t>same height</a:t>
             </a:r>
             <a:r>
-              <a:rPr sz="1900">
-                <a:solidFill>
-                  <a:srgbClr val="262626"/>
-                </a:solidFill>
+              <a:rPr sz="2500">
                 <a:latin typeface="TT Hoves"/>
               </a:rPr>
               <a:t>, two shortcut formulas save time:</a:t>
             </a:r>
           </a:p>
-        </p:txBody>
-      </p:sp>
-      <p:sp>
-        <p:nvSpPr>
-          <p:cNvPr id="15" name="Rounded Rectangle 14"/>
-          <p:cNvSpPr/>
-          <p:nvPr/>
-        </p:nvSpPr>
-        <p:spPr>
-          <a:xfrm>
-            <a:off x="1517904" y="2377440"/>
-            <a:ext cx="9144000" cy="1069848"/>
-          </a:xfrm>
-          <a:prstGeom prst="roundRect">
-            <a:avLst>
-              <a:gd name="adj" fmla="val 10000"/>
-            </a:avLst>
-          </a:prstGeom>
-          <a:solidFill>
-            <a:srgbClr val="FDF1E6"/>
-          </a:solidFill>
-          <a:ln w="15875">
-            <a:solidFill>
-              <a:srgbClr val="F9770B"/>
-            </a:solidFill>
-          </a:ln>
-          <a:effectLst/>
-        </p:spPr>
-        <p:style>
-          <a:lnRef idx="1">
-            <a:schemeClr val="accent1"/>
-          </a:lnRef>
-          <a:fillRef idx="3">
-            <a:schemeClr val="accent1"/>
-          </a:fillRef>
-          <a:effectRef idx="2">
-            <a:schemeClr val="accent1"/>
-          </a:effectRef>
-          <a:fontRef idx="minor">
-            <a:schemeClr val="lt1"/>
-          </a:fontRef>
-        </p:style>
-        <p:txBody>
-          <a:bodyPr rtlCol="0" anchor="ctr" wrap="square" tIns="50800" bIns="50800"/>
-          <a:lstStyle/>
-          <a:p>
-            <a:pPr algn="ctr">
-              <a:buNone/>
-            </a:pPr>
-            <a:r>
-              <a:rPr sz="2300" i="1">
-                <a:solidFill>
-                  <a:srgbClr val="C85A00"/>
-                </a:solidFill>
-                <a:latin typeface="TT Hoves"/>
-              </a:rPr>
-              <a:t>h</a:t>
-            </a:r>
-            <a:r>
-              <a:rPr sz="2300">
-                <a:solidFill>
-                  <a:srgbClr val="C85A00"/>
-                </a:solidFill>
-                <a:latin typeface="TT Hoves"/>
-              </a:rPr>
-              <a:t>  =  </a:t>
-            </a:r>
-            <a:r>
-              <a:rPr sz="2300" i="1">
-                <a:solidFill>
-                  <a:srgbClr val="C85A00"/>
-                </a:solidFill>
-                <a:latin typeface="TT Hoves"/>
-              </a:rPr>
-              <a:t>v</a:t>
-            </a:r>
-            <a:r>
-              <a:rPr sz="2116" baseline="-25000">
-                <a:solidFill>
-                  <a:srgbClr val="C85A00"/>
-                </a:solidFill>
-                <a:latin typeface="TT Hoves"/>
-              </a:rPr>
-              <a:t>i</a:t>
-            </a:r>
-            <a:r>
-              <a:rPr sz="2116" baseline="30000">
-                <a:solidFill>
-                  <a:srgbClr val="C85A00"/>
-                </a:solidFill>
-                <a:latin typeface="TT Hoves"/>
-              </a:rPr>
-              <a:t>2</a:t>
-            </a:r>
-            <a:r>
-              <a:rPr sz="2300">
-                <a:solidFill>
-                  <a:srgbClr val="C85A00"/>
-                </a:solidFill>
-                <a:latin typeface="TT Hoves"/>
-              </a:rPr>
-              <a:t> sin</a:t>
-            </a:r>
-            <a:r>
-              <a:rPr sz="2116" baseline="30000">
-                <a:solidFill>
-                  <a:srgbClr val="C85A00"/>
-                </a:solidFill>
-                <a:latin typeface="TT Hoves"/>
-              </a:rPr>
-              <a:t>2</a:t>
-            </a:r>
-            <a:r>
-              <a:rPr sz="2300" i="1">
-                <a:solidFill>
-                  <a:srgbClr val="C85A00"/>
-                </a:solidFill>
-                <a:latin typeface="TT Hoves"/>
-              </a:rPr>
-              <a:t>θ</a:t>
-            </a:r>
-            <a:r>
-              <a:rPr sz="2116" baseline="-25000">
-                <a:solidFill>
-                  <a:srgbClr val="C85A00"/>
-                </a:solidFill>
-                <a:latin typeface="TT Hoves"/>
-              </a:rPr>
-              <a:t>i</a:t>
-            </a:r>
-            <a:r>
-              <a:rPr sz="2300">
-                <a:solidFill>
-                  <a:srgbClr val="C85A00"/>
-                </a:solidFill>
-                <a:latin typeface="TT Hoves"/>
-              </a:rPr>
-              <a:t>  /  2</a:t>
-            </a:r>
-            <a:r>
-              <a:rPr sz="2300" i="1">
-                <a:solidFill>
-                  <a:srgbClr val="C85A00"/>
-                </a:solidFill>
-                <a:latin typeface="TT Hoves"/>
-              </a:rPr>
-              <a:t>g</a:t>
-            </a:r>
-            <a:r>
-              <a:rPr sz="2300">
-                <a:solidFill>
-                  <a:srgbClr val="C85A00"/>
-                </a:solidFill>
-                <a:latin typeface="TT Hoves"/>
-              </a:rPr>
-              <a:t>           </a:t>
-            </a:r>
-            <a:r>
-              <a:rPr sz="2300" i="1">
-                <a:solidFill>
-                  <a:srgbClr val="C85A00"/>
-                </a:solidFill>
-                <a:latin typeface="TT Hoves"/>
-              </a:rPr>
-              <a:t>R</a:t>
-            </a:r>
-            <a:r>
-              <a:rPr sz="2300">
-                <a:solidFill>
-                  <a:srgbClr val="C85A00"/>
-                </a:solidFill>
-                <a:latin typeface="TT Hoves"/>
-              </a:rPr>
-              <a:t>  =  </a:t>
-            </a:r>
-            <a:r>
-              <a:rPr sz="2300" i="1">
-                <a:solidFill>
-                  <a:srgbClr val="C85A00"/>
-                </a:solidFill>
-                <a:latin typeface="TT Hoves"/>
-              </a:rPr>
-              <a:t>v</a:t>
-            </a:r>
-            <a:r>
-              <a:rPr sz="2116" baseline="-25000">
-                <a:solidFill>
-                  <a:srgbClr val="C85A00"/>
-                </a:solidFill>
-                <a:latin typeface="TT Hoves"/>
-              </a:rPr>
-              <a:t>i</a:t>
-            </a:r>
-            <a:r>
-              <a:rPr sz="2116" baseline="30000">
-                <a:solidFill>
-                  <a:srgbClr val="C85A00"/>
-                </a:solidFill>
-                <a:latin typeface="TT Hoves"/>
-              </a:rPr>
-              <a:t>2</a:t>
-            </a:r>
-            <a:r>
-              <a:rPr sz="2300">
-                <a:solidFill>
-                  <a:srgbClr val="C85A00"/>
-                </a:solidFill>
-                <a:latin typeface="TT Hoves"/>
-              </a:rPr>
-              <a:t> sin 2</a:t>
-            </a:r>
-            <a:r>
-              <a:rPr sz="2300" i="1">
-                <a:solidFill>
-                  <a:srgbClr val="C85A00"/>
-                </a:solidFill>
-                <a:latin typeface="TT Hoves"/>
-              </a:rPr>
-              <a:t>θ</a:t>
-            </a:r>
-            <a:r>
-              <a:rPr sz="2116" baseline="-25000">
-                <a:solidFill>
-                  <a:srgbClr val="C85A00"/>
-                </a:solidFill>
-                <a:latin typeface="TT Hoves"/>
-              </a:rPr>
-              <a:t>i</a:t>
-            </a:r>
-            <a:r>
-              <a:rPr sz="2300">
-                <a:solidFill>
-                  <a:srgbClr val="C85A00"/>
-                </a:solidFill>
-                <a:latin typeface="TT Hoves"/>
-              </a:rPr>
-              <a:t>  /  </a:t>
-            </a:r>
-            <a:r>
-              <a:rPr sz="2300" i="1">
-                <a:solidFill>
-                  <a:srgbClr val="C85A00"/>
-                </a:solidFill>
-                <a:latin typeface="TT Hoves"/>
-              </a:rPr>
-              <a:t>g</a:t>
-            </a:r>
-          </a:p>
-        </p:txBody>
-      </p:sp>
-      <p:sp>
-        <p:nvSpPr>
-          <p:cNvPr id="16" name="Rounded Rectangle 15"/>
-          <p:cNvSpPr/>
-          <p:nvPr/>
-        </p:nvSpPr>
-        <p:spPr>
-          <a:xfrm>
-            <a:off x="694944" y="3977639"/>
-            <a:ext cx="10789920" cy="1463040"/>
-          </a:xfrm>
-          <a:prstGeom prst="roundRect">
-            <a:avLst>
-              <a:gd name="adj" fmla="val 6000"/>
-            </a:avLst>
-          </a:prstGeom>
-          <a:solidFill>
-            <a:srgbClr val="FBEAD9"/>
-          </a:solidFill>
-          <a:ln>
-            <a:noFill/>
-          </a:ln>
-          <a:effectLst/>
-        </p:spPr>
-        <p:style>
-          <a:lnRef idx="1">
-            <a:schemeClr val="accent1"/>
-          </a:lnRef>
-          <a:fillRef idx="3">
-            <a:schemeClr val="accent1"/>
-          </a:fillRef>
-          <a:effectRef idx="2">
-            <a:schemeClr val="accent1"/>
-          </a:effectRef>
-          <a:fontRef idx="minor">
-            <a:schemeClr val="lt1"/>
-          </a:fontRef>
-        </p:style>
-        <p:txBody>
-          <a:bodyPr rtlCol="0" anchor="ctr" wrap="square" lIns="203200" rIns="152400" tIns="76200" bIns="76200"/>
-          <a:lstStyle/>
           <a:p>
             <a:pPr algn="ctr">
               <a:lnSpc>
-                <a:spcPct val="103000"/>
+                <a:spcPct val="104000"/>
               </a:lnSpc>
+              <a:spcBef>
+                <a:spcPts val="400"/>
+              </a:spcBef>
               <a:spcAft>
-                <a:spcPts val="400"/>
+                <a:spcPts val="700"/>
               </a:spcAft>
               <a:buNone/>
             </a:pPr>
             <a:r>
-              <a:rPr sz="1800" b="1" i="1">
-                <a:solidFill>
-                  <a:srgbClr val="262626"/>
-                </a:solidFill>
+              <a:rPr sz="2700" b="1" i="1">
+                <a:latin typeface="TT Hoves"/>
+              </a:rPr>
+              <a:t>h</a:t>
+            </a:r>
+            <a:r>
+              <a:rPr sz="2700" b="1">
+                <a:latin typeface="TT Hoves"/>
+              </a:rPr>
+              <a:t> = </a:t>
+            </a:r>
+            <a:r>
+              <a:rPr sz="2700" b="1" i="1">
+                <a:latin typeface="TT Hoves"/>
+              </a:rPr>
+              <a:t>v</a:t>
+            </a:r>
+            <a:r>
+              <a:rPr sz="2484" baseline="-25000">
+                <a:latin typeface="TT Hoves"/>
+              </a:rPr>
+              <a:t>i</a:t>
+            </a:r>
+            <a:r>
+              <a:rPr sz="2484" baseline="30000">
+                <a:latin typeface="TT Hoves"/>
+              </a:rPr>
+              <a:t>2</a:t>
+            </a:r>
+            <a:r>
+              <a:rPr sz="2700" b="1">
+                <a:latin typeface="TT Hoves"/>
+              </a:rPr>
+              <a:t> sin</a:t>
+            </a:r>
+            <a:r>
+              <a:rPr sz="2484" baseline="30000">
+                <a:latin typeface="TT Hoves"/>
+              </a:rPr>
+              <a:t>2</a:t>
+            </a:r>
+            <a:r>
+              <a:rPr sz="2700" b="1" i="1">
+                <a:latin typeface="TT Hoves"/>
+              </a:rPr>
+              <a:t>θ</a:t>
+            </a:r>
+            <a:r>
+              <a:rPr sz="2484" baseline="-25000">
+                <a:latin typeface="TT Hoves"/>
+              </a:rPr>
+              <a:t>i</a:t>
+            </a:r>
+            <a:r>
+              <a:rPr sz="2700" b="1">
+                <a:latin typeface="TT Hoves"/>
+              </a:rPr>
+              <a:t>  /  2</a:t>
+            </a:r>
+            <a:r>
+              <a:rPr sz="2700" b="1" i="1">
+                <a:latin typeface="TT Hoves"/>
+              </a:rPr>
+              <a:t>g</a:t>
+            </a:r>
+            <a:r>
+              <a:rPr sz="2700" b="1">
+                <a:latin typeface="TT Hoves"/>
+              </a:rPr>
+              <a:t>            </a:t>
+            </a:r>
+            <a:r>
+              <a:rPr sz="2700" b="1" i="1">
+                <a:latin typeface="TT Hoves"/>
+              </a:rPr>
+              <a:t>R</a:t>
+            </a:r>
+            <a:r>
+              <a:rPr sz="2700" b="1">
+                <a:latin typeface="TT Hoves"/>
+              </a:rPr>
+              <a:t> = </a:t>
+            </a:r>
+            <a:r>
+              <a:rPr sz="2700" b="1" i="1">
+                <a:latin typeface="TT Hoves"/>
+              </a:rPr>
+              <a:t>v</a:t>
+            </a:r>
+            <a:r>
+              <a:rPr sz="2484" baseline="-25000">
+                <a:latin typeface="TT Hoves"/>
+              </a:rPr>
+              <a:t>i</a:t>
+            </a:r>
+            <a:r>
+              <a:rPr sz="2484" baseline="30000">
+                <a:latin typeface="TT Hoves"/>
+              </a:rPr>
+              <a:t>2</a:t>
+            </a:r>
+            <a:r>
+              <a:rPr sz="2700" b="1">
+                <a:latin typeface="TT Hoves"/>
+              </a:rPr>
+              <a:t> sin 2</a:t>
+            </a:r>
+            <a:r>
+              <a:rPr sz="2700" b="1" i="1">
+                <a:latin typeface="TT Hoves"/>
+              </a:rPr>
+              <a:t>θ</a:t>
+            </a:r>
+            <a:r>
+              <a:rPr sz="2484" baseline="-25000">
+                <a:latin typeface="TT Hoves"/>
+              </a:rPr>
+              <a:t>i</a:t>
+            </a:r>
+            <a:r>
+              <a:rPr sz="2700" b="1">
+                <a:latin typeface="TT Hoves"/>
+              </a:rPr>
+              <a:t>  /  </a:t>
+            </a:r>
+            <a:r>
+              <a:rPr sz="2700" b="1" i="1">
+                <a:latin typeface="TT Hoves"/>
+              </a:rPr>
+              <a:t>g</a:t>
+            </a:r>
+          </a:p>
+          <a:p>
+            <a:pPr marL="457200" indent="-457200" algn="l">
+              <a:lnSpc>
+                <a:spcPct val="104000"/>
+              </a:lnSpc>
+              <a:spcBef>
+                <a:spcPts val="0"/>
+              </a:spcBef>
+              <a:spcAft>
+                <a:spcPts val="700"/>
+              </a:spcAft>
+              <a:buFont typeface="Arial" pitchFamily="34" charset="0"/>
+              <a:buChar char="•"/>
+            </a:pPr>
+            <a:r>
+              <a:rPr sz="2500" b="1" i="1">
                 <a:latin typeface="TT Hoves"/>
               </a:rPr>
               <a:t>Important boundary:</a:t>
             </a:r>
             <a:r>
-              <a:rPr sz="1800">
-                <a:solidFill>
-                  <a:srgbClr val="262626"/>
-                </a:solidFill>
+              <a:rPr sz="2500">
                 <a:latin typeface="TT Hoves"/>
               </a:rPr>
               <a:t> these only work for a </a:t>
             </a:r>
             <a:r>
-              <a:rPr sz="1800" i="1">
-                <a:solidFill>
-                  <a:srgbClr val="262626"/>
-                </a:solidFill>
+              <a:rPr sz="2500" i="1">
                 <a:latin typeface="TT Hoves"/>
               </a:rPr>
               <a:t>symmetric</a:t>
             </a:r>
             <a:r>
-              <a:rPr sz="1800">
-                <a:solidFill>
-                  <a:srgbClr val="262626"/>
-                </a:solidFill>
+              <a:rPr sz="2500">
                 <a:latin typeface="TT Hoves"/>
               </a:rPr>
               <a:t> trip — same launch and landing level. If a ball is thrown off a cliff or lands on a slope, these formulas </a:t>
             </a:r>
             <a:r>
-              <a:rPr sz="1800" i="1">
-                <a:solidFill>
-                  <a:srgbClr val="262626"/>
-                </a:solidFill>
+              <a:rPr sz="2500" i="1">
                 <a:latin typeface="TT Hoves"/>
               </a:rPr>
               <a:t>don't apply</a:t>
             </a:r>
             <a:r>
-              <a:rPr sz="1800">
-                <a:solidFill>
-                  <a:srgbClr val="262626"/>
-                </a:solidFill>
-                <a:latin typeface="TT Hoves"/>
-              </a:rPr>
-              <a:t> — go back to the full equations from Slide 7 instead.</a:t>
-            </a:r>
-          </a:p>
-        </p:txBody>
-      </p:sp>
-      <p:sp>
-        <p:nvSpPr>
-          <p:cNvPr id="17" name="Rectangle 16"/>
-          <p:cNvSpPr/>
-          <p:nvPr/>
-        </p:nvSpPr>
-        <p:spPr>
-          <a:xfrm>
-            <a:off x="694944" y="3977639"/>
-            <a:ext cx="82296" cy="1463040"/>
-          </a:xfrm>
-          <a:prstGeom prst="rect">
-            <a:avLst/>
-          </a:prstGeom>
-          <a:solidFill>
-            <a:srgbClr val="F9770B"/>
-          </a:solidFill>
-          <a:ln>
-            <a:noFill/>
-          </a:ln>
-          <a:effectLst/>
-        </p:spPr>
-        <p:style>
-          <a:lnRef idx="1">
-            <a:schemeClr val="accent1"/>
-          </a:lnRef>
-          <a:fillRef idx="3">
-            <a:schemeClr val="accent1"/>
-          </a:fillRef>
-          <a:effectRef idx="2">
-            <a:schemeClr val="accent1"/>
-          </a:effectRef>
-          <a:fontRef idx="minor">
-            <a:schemeClr val="lt1"/>
-          </a:fontRef>
-        </p:style>
-        <p:txBody>
-          <a:bodyPr rtlCol="0" anchor="ctr"/>
-          <a:lstStyle/>
-          <a:p>
-            <a:pPr algn="ctr"/>
+              <a:rPr sz="2500">
+                <a:latin typeface="TT Hoves"/>
+              </a:rPr>
+              <a:t> — go back to the full equations from the previous slide instead.</a:t>
+            </a:r>
           </a:p>
         </p:txBody>
       </p:sp>
@@ -13317,8 +12131,8 @@
         </p:nvSpPr>
         <p:spPr>
           <a:xfrm>
-            <a:off x="694944" y="420624"/>
-            <a:ext cx="10789920" cy="1024128"/>
+            <a:off x="699400" y="619760"/>
+            <a:ext cx="11441800" cy="830997"/>
           </a:xfrm>
           <a:prstGeom prst="rect">
             <a:avLst/>
@@ -13332,11 +12146,25 @@
           <a:lstStyle/>
           <a:p>
             <a:r>
-              <a:rPr sz="3000" b="1">
-                <a:solidFill>
-                  <a:srgbClr val="1A1A1A"/>
-                </a:solidFill>
-                <a:latin typeface="TT Hoves ExtraBold"/>
+              <a:rPr lang="en-PH" sz="3300" dirty="0">
+                <a:gradFill flip="none" rotWithShape="1">
+                  <a:gsLst>
+                    <a:gs pos="0">
+                      <a:srgbClr val="B45404"/>
+                    </a:gs>
+                    <a:gs pos="50000">
+                      <a:srgbClr val="E86C06"/>
+                    </a:gs>
+                    <a:gs pos="100000">
+                      <a:srgbClr val="F9770B"/>
+                    </a:gs>
+                  </a:gsLst>
+                  <a:path path="circle">
+                    <a:fillToRect l="50000" t="50000" r="50000" b="50000"/>
+                  </a:path>
+                  <a:tileRect/>
+                </a:gradFill>
+                <a:latin typeface="TT Hoves ExtraBold" panose="02000903040000020004" pitchFamily="50" charset="0"/>
               </a:rPr>
               <a:t>How Launch Angle Changes the Flight</a:t>
             </a:r>
@@ -13474,58 +12302,20 @@
       </p:sp>
       <p:sp>
         <p:nvSpPr>
-          <p:cNvPr id="13" name="Rectangle 12"/>
-          <p:cNvSpPr/>
+          <p:cNvPr id="9" name="TextBox 8">
+            <a:extLst>
+              <a:ext uri="{FF2B5EF4-FFF2-40B4-BE49-F238E27FC236}">
+                <a16:creationId xmlns:a16="http://schemas.microsoft.com/office/drawing/2014/main" id="{73C00714-0F36-6BC8-C038-4D7F36CEB239}"/>
+              </a:ext>
+            </a:extLst>
+          </p:cNvPr>
+          <p:cNvSpPr txBox="1"/>
           <p:nvPr/>
         </p:nvSpPr>
         <p:spPr>
           <a:xfrm>
-            <a:off x="713232" y="1481328"/>
-            <a:ext cx="960120" cy="68580"/>
-          </a:xfrm>
-          <a:prstGeom prst="rect">
-            <a:avLst/>
-          </a:prstGeom>
-          <a:solidFill>
-            <a:srgbClr val="F9770B"/>
-          </a:solidFill>
-          <a:ln>
-            <a:noFill/>
-          </a:ln>
-          <a:effectLst/>
-        </p:spPr>
-        <p:style>
-          <a:lnRef idx="1">
-            <a:schemeClr val="accent1"/>
-          </a:lnRef>
-          <a:fillRef idx="3">
-            <a:schemeClr val="accent1"/>
-          </a:fillRef>
-          <a:effectRef idx="2">
-            <a:schemeClr val="accent1"/>
-          </a:effectRef>
-          <a:fontRef idx="minor">
-            <a:schemeClr val="lt1"/>
-          </a:fontRef>
-        </p:style>
-        <p:txBody>
-          <a:bodyPr rtlCol="0" anchor="ctr"/>
-          <a:lstStyle/>
-          <a:p>
-            <a:pPr algn="ctr"/>
-          </a:p>
-        </p:txBody>
-      </p:sp>
-      <p:sp>
-        <p:nvSpPr>
-          <p:cNvPr id="14" name="TextBox 13"/>
-          <p:cNvSpPr txBox="1"/>
-          <p:nvPr/>
-        </p:nvSpPr>
-        <p:spPr>
-          <a:xfrm>
-            <a:off x="694944" y="1691640"/>
-            <a:ext cx="5577840" cy="4206240"/>
+            <a:off x="699058" y="1536192"/>
+            <a:ext cx="10671048" cy="4270248"/>
           </a:xfrm>
           <a:prstGeom prst="rect">
             <a:avLst/>
@@ -13533,176 +12323,128 @@
           <a:noFill/>
         </p:spPr>
         <p:txBody>
-          <a:bodyPr wrap="square" anchor="t">
-            <a:spAutoFit/>
+          <a:bodyPr wrap="square" rtlCol="0">
+            <a:noAutofit/>
           </a:bodyPr>
           <a:lstStyle/>
           <a:p>
-            <a:pPr algn="l" marL="320040" indent="-320040">
+            <a:pPr marL="457200" indent="-457200" algn="l">
               <a:lnSpc>
-                <a:spcPct val="103000"/>
+                <a:spcPct val="104000"/>
               </a:lnSpc>
               <a:spcBef>
                 <a:spcPts val="0"/>
               </a:spcBef>
               <a:spcAft>
-                <a:spcPts val="800"/>
+                <a:spcPts val="700"/>
               </a:spcAft>
-              <a:buClr>
-                <a:srgbClr val="F9770B"/>
-              </a:buClr>
-              <a:buFont typeface="Arial"/>
+              <a:buFont typeface="Arial" pitchFamily="34" charset="0"/>
               <a:buChar char="•"/>
             </a:pPr>
             <a:r>
-              <a:rPr sz="1800">
-                <a:solidFill>
-                  <a:srgbClr val="262626"/>
-                </a:solidFill>
+              <a:rPr sz="2500">
                 <a:latin typeface="TT Hoves"/>
               </a:rPr>
               <a:t>Same </a:t>
             </a:r>
             <a:r>
-              <a:rPr sz="1800" i="1">
-                <a:solidFill>
-                  <a:srgbClr val="262626"/>
-                </a:solidFill>
+              <a:rPr sz="2500" i="1">
                 <a:latin typeface="TT Hoves"/>
               </a:rPr>
               <a:t>speed</a:t>
             </a:r>
             <a:r>
-              <a:rPr sz="1800">
-                <a:solidFill>
-                  <a:srgbClr val="262626"/>
-                </a:solidFill>
+              <a:rPr sz="2500">
                 <a:latin typeface="TT Hoves"/>
               </a:rPr>
               <a:t>, different </a:t>
             </a:r>
             <a:r>
-              <a:rPr sz="1800" i="1">
-                <a:solidFill>
-                  <a:srgbClr val="262626"/>
-                </a:solidFill>
+              <a:rPr sz="2500" i="1">
                 <a:latin typeface="TT Hoves"/>
               </a:rPr>
               <a:t>angle</a:t>
             </a:r>
             <a:r>
-              <a:rPr sz="1800">
-                <a:solidFill>
-                  <a:srgbClr val="262626"/>
-                </a:solidFill>
+              <a:rPr sz="2500">
                 <a:latin typeface="TT Hoves"/>
               </a:rPr>
               <a:t> → dramatically different paths.</a:t>
             </a:r>
           </a:p>
           <a:p>
-            <a:pPr algn="l" marL="320040" indent="-320040">
+            <a:pPr marL="457200" indent="-457200" algn="l">
               <a:lnSpc>
-                <a:spcPct val="103000"/>
+                <a:spcPct val="104000"/>
               </a:lnSpc>
               <a:spcBef>
                 <a:spcPts val="0"/>
               </a:spcBef>
               <a:spcAft>
-                <a:spcPts val="800"/>
+                <a:spcPts val="700"/>
               </a:spcAft>
-              <a:buClr>
-                <a:srgbClr val="F9770B"/>
-              </a:buClr>
-              <a:buFont typeface="Arial"/>
+              <a:buFont typeface="Arial" pitchFamily="34" charset="0"/>
               <a:buChar char="•"/>
             </a:pPr>
             <a:r>
-              <a:rPr sz="1800">
-                <a:solidFill>
-                  <a:srgbClr val="262626"/>
-                </a:solidFill>
+              <a:rPr sz="2500">
                 <a:latin typeface="TT Hoves"/>
               </a:rPr>
               <a:t>A shallow angle sends an object </a:t>
             </a:r>
             <a:r>
-              <a:rPr sz="1800" i="1">
-                <a:solidFill>
-                  <a:srgbClr val="262626"/>
-                </a:solidFill>
+              <a:rPr sz="2500" i="1">
                 <a:latin typeface="TT Hoves"/>
               </a:rPr>
               <a:t>far but low</a:t>
             </a:r>
             <a:r>
-              <a:rPr sz="1800">
-                <a:solidFill>
-                  <a:srgbClr val="262626"/>
-                </a:solidFill>
+              <a:rPr sz="2500">
                 <a:latin typeface="TT Hoves"/>
               </a:rPr>
               <a:t>; a steep angle sends it </a:t>
             </a:r>
             <a:r>
-              <a:rPr sz="1800" i="1">
-                <a:solidFill>
-                  <a:srgbClr val="262626"/>
-                </a:solidFill>
+              <a:rPr sz="2500" i="1">
                 <a:latin typeface="TT Hoves"/>
               </a:rPr>
               <a:t>high but not far</a:t>
             </a:r>
             <a:r>
-              <a:rPr sz="1800">
-                <a:solidFill>
-                  <a:srgbClr val="262626"/>
-                </a:solidFill>
+              <a:rPr sz="2500">
                 <a:latin typeface="TT Hoves"/>
               </a:rPr>
               <a:t>.</a:t>
             </a:r>
           </a:p>
           <a:p>
-            <a:pPr algn="l" marL="320040" indent="-320040">
+            <a:pPr marL="457200" indent="-457200" algn="l">
               <a:lnSpc>
-                <a:spcPct val="103000"/>
+                <a:spcPct val="104000"/>
               </a:lnSpc>
               <a:spcBef>
                 <a:spcPts val="0"/>
               </a:spcBef>
               <a:spcAft>
-                <a:spcPts val="800"/>
+                <a:spcPts val="700"/>
               </a:spcAft>
-              <a:buClr>
-                <a:srgbClr val="F9770B"/>
-              </a:buClr>
-              <a:buFont typeface="Arial"/>
+              <a:buFont typeface="Arial" pitchFamily="34" charset="0"/>
               <a:buChar char="•"/>
             </a:pPr>
             <a:r>
-              <a:rPr sz="1800">
-                <a:solidFill>
-                  <a:srgbClr val="262626"/>
-                </a:solidFill>
-                <a:latin typeface="TT Hoves"/>
-              </a:rPr>
-              <a:t>Somewhere between those extremes is a launch angle that maximizes horizontal distance for a given speed — the range formula from Slide 9 reveals </a:t>
-            </a:r>
-            <a:r>
-              <a:rPr sz="1800" i="1">
-                <a:solidFill>
-                  <a:srgbClr val="262626"/>
-                </a:solidFill>
+              <a:rPr sz="2500">
+                <a:latin typeface="TT Hoves"/>
+              </a:rPr>
+              <a:t>Somewhere between those extremes is a launch angle that maximizes horizontal distance for a given speed — the range formula reveals </a:t>
+            </a:r>
+            <a:r>
+              <a:rPr sz="2500" i="1">
                 <a:latin typeface="TT Hoves"/>
               </a:rPr>
               <a:t>which</a:t>
             </a:r>
             <a:r>
-              <a:rPr sz="1800">
-                <a:solidFill>
-                  <a:srgbClr val="262626"/>
-                </a:solidFill>
+              <a:rPr sz="2500">
                 <a:latin typeface="TT Hoves"/>
               </a:rPr>
               <a:t> angle that is, without needing to test every possibility by hand.</a:t>
@@ -13710,30 +12452,6 @@
           </a:p>
         </p:txBody>
       </p:sp>
-      <p:pic>
-        <p:nvPicPr>
-          <p:cNvPr id="15" name="Picture 14" descr="trajectory_fan.png"/>
-          <p:cNvPicPr>
-            <a:picLocks noChangeAspect="1"/>
-          </p:cNvPicPr>
-          <p:nvPr/>
-        </p:nvPicPr>
-        <p:blipFill>
-          <a:blip r:embed="rId3"/>
-          <a:stretch>
-            <a:fillRect/>
-          </a:stretch>
-        </p:blipFill>
-        <p:spPr>
-          <a:xfrm>
-            <a:off x="6492240" y="2735914"/>
-            <a:ext cx="4937760" cy="2209130"/>
-          </a:xfrm>
-          <a:prstGeom prst="rect">
-            <a:avLst/>
-          </a:prstGeom>
-        </p:spPr>
-      </p:pic>
     </p:spTree>
   </p:cSld>
   <p:clrMapOvr>
@@ -13985,8 +12703,8 @@
         </p:nvSpPr>
         <p:spPr>
           <a:xfrm>
-            <a:off x="694944" y="420624"/>
-            <a:ext cx="10789920" cy="1024128"/>
+            <a:off x="699400" y="619760"/>
+            <a:ext cx="11441800" cy="830997"/>
           </a:xfrm>
           <a:prstGeom prst="rect">
             <a:avLst/>
@@ -14000,11 +12718,25 @@
           <a:lstStyle/>
           <a:p>
             <a:r>
-              <a:rPr sz="3000" b="1">
-                <a:solidFill>
-                  <a:srgbClr val="1A1A1A"/>
-                </a:solidFill>
-                <a:latin typeface="TT Hoves ExtraBold"/>
+              <a:rPr lang="en-PH" sz="3300" dirty="0">
+                <a:gradFill flip="none" rotWithShape="1">
+                  <a:gsLst>
+                    <a:gs pos="0">
+                      <a:srgbClr val="B45404"/>
+                    </a:gs>
+                    <a:gs pos="50000">
+                      <a:srgbClr val="E86C06"/>
+                    </a:gs>
+                    <a:gs pos="100000">
+                      <a:srgbClr val="F9770B"/>
+                    </a:gs>
+                  </a:gsLst>
+                  <a:path path="circle">
+                    <a:fillToRect l="50000" t="50000" r="50000" b="50000"/>
+                  </a:path>
+                  <a:tileRect/>
+                </a:gradFill>
+                <a:latin typeface="TT Hoves ExtraBold" panose="02000903040000020004" pitchFamily="50" charset="0"/>
               </a:rPr>
               <a:t>How Launch Speed Changes the Flight</a:t>
             </a:r>
@@ -14142,58 +12874,20 @@
       </p:sp>
       <p:sp>
         <p:nvSpPr>
-          <p:cNvPr id="13" name="Rectangle 12"/>
-          <p:cNvSpPr/>
+          <p:cNvPr id="9" name="TextBox 8">
+            <a:extLst>
+              <a:ext uri="{FF2B5EF4-FFF2-40B4-BE49-F238E27FC236}">
+                <a16:creationId xmlns:a16="http://schemas.microsoft.com/office/drawing/2014/main" id="{73C00714-0F36-6BC8-C038-4D7F36CEB239}"/>
+              </a:ext>
+            </a:extLst>
+          </p:cNvPr>
+          <p:cNvSpPr txBox="1"/>
           <p:nvPr/>
         </p:nvSpPr>
         <p:spPr>
           <a:xfrm>
-            <a:off x="713232" y="1481328"/>
-            <a:ext cx="960120" cy="68580"/>
-          </a:xfrm>
-          <a:prstGeom prst="rect">
-            <a:avLst/>
-          </a:prstGeom>
-          <a:solidFill>
-            <a:srgbClr val="F9770B"/>
-          </a:solidFill>
-          <a:ln>
-            <a:noFill/>
-          </a:ln>
-          <a:effectLst/>
-        </p:spPr>
-        <p:style>
-          <a:lnRef idx="1">
-            <a:schemeClr val="accent1"/>
-          </a:lnRef>
-          <a:fillRef idx="3">
-            <a:schemeClr val="accent1"/>
-          </a:fillRef>
-          <a:effectRef idx="2">
-            <a:schemeClr val="accent1"/>
-          </a:effectRef>
-          <a:fontRef idx="minor">
-            <a:schemeClr val="lt1"/>
-          </a:fontRef>
-        </p:style>
-        <p:txBody>
-          <a:bodyPr rtlCol="0" anchor="ctr"/>
-          <a:lstStyle/>
-          <a:p>
-            <a:pPr algn="ctr"/>
-          </a:p>
-        </p:txBody>
-      </p:sp>
-      <p:sp>
-        <p:nvSpPr>
-          <p:cNvPr id="14" name="TextBox 13"/>
-          <p:cNvSpPr txBox="1"/>
-          <p:nvPr/>
-        </p:nvSpPr>
-        <p:spPr>
-          <a:xfrm>
-            <a:off x="694944" y="2057400"/>
-            <a:ext cx="10789920" cy="3474720"/>
+            <a:off x="699058" y="1536192"/>
+            <a:ext cx="10671048" cy="4270248"/>
           </a:xfrm>
           <a:prstGeom prst="rect">
             <a:avLst/>
@@ -14201,176 +12895,128 @@
           <a:noFill/>
         </p:spPr>
         <p:txBody>
-          <a:bodyPr wrap="square" anchor="t">
-            <a:spAutoFit/>
+          <a:bodyPr wrap="square" rtlCol="0">
+            <a:noAutofit/>
           </a:bodyPr>
           <a:lstStyle/>
           <a:p>
-            <a:pPr algn="l" marL="320040" indent="-320040">
+            <a:pPr marL="457200" indent="-457200" algn="l">
               <a:lnSpc>
-                <a:spcPct val="103000"/>
+                <a:spcPct val="104000"/>
               </a:lnSpc>
               <a:spcBef>
                 <a:spcPts val="0"/>
               </a:spcBef>
               <a:spcAft>
-                <a:spcPts val="1400"/>
+                <a:spcPts val="700"/>
               </a:spcAft>
-              <a:buClr>
-                <a:srgbClr val="F9770B"/>
-              </a:buClr>
-              <a:buFont typeface="Arial"/>
+              <a:buFont typeface="Arial" pitchFamily="34" charset="0"/>
               <a:buChar char="•"/>
             </a:pPr>
             <a:r>
-              <a:rPr sz="2200">
-                <a:solidFill>
-                  <a:srgbClr val="262626"/>
-                </a:solidFill>
+              <a:rPr sz="2500">
                 <a:latin typeface="TT Hoves"/>
               </a:rPr>
               <a:t>Same </a:t>
             </a:r>
             <a:r>
-              <a:rPr sz="2200" i="1">
-                <a:solidFill>
-                  <a:srgbClr val="262626"/>
-                </a:solidFill>
+              <a:rPr sz="2500" i="1">
                 <a:latin typeface="TT Hoves"/>
               </a:rPr>
               <a:t>angle</a:t>
             </a:r>
             <a:r>
-              <a:rPr sz="2200">
-                <a:solidFill>
-                  <a:srgbClr val="262626"/>
-                </a:solidFill>
+              <a:rPr sz="2500">
                 <a:latin typeface="TT Hoves"/>
               </a:rPr>
               <a:t>, different </a:t>
             </a:r>
             <a:r>
-              <a:rPr sz="2200" i="1">
-                <a:solidFill>
-                  <a:srgbClr val="262626"/>
-                </a:solidFill>
+              <a:rPr sz="2500" i="1">
                 <a:latin typeface="TT Hoves"/>
               </a:rPr>
               <a:t>speed</a:t>
             </a:r>
             <a:r>
-              <a:rPr sz="2200">
-                <a:solidFill>
-                  <a:srgbClr val="262626"/>
-                </a:solidFill>
+              <a:rPr sz="2500">
                 <a:latin typeface="TT Hoves"/>
               </a:rPr>
               <a:t> → same </a:t>
             </a:r>
             <a:r>
-              <a:rPr sz="2200" i="1">
-                <a:solidFill>
-                  <a:srgbClr val="262626"/>
-                </a:solidFill>
+              <a:rPr sz="2500" i="1">
                 <a:latin typeface="TT Hoves"/>
               </a:rPr>
               <a:t>shape</a:t>
             </a:r>
             <a:r>
-              <a:rPr sz="2200">
-                <a:solidFill>
-                  <a:srgbClr val="262626"/>
-                </a:solidFill>
+              <a:rPr sz="2500">
                 <a:latin typeface="TT Hoves"/>
               </a:rPr>
               <a:t>, different </a:t>
             </a:r>
             <a:r>
-              <a:rPr sz="2200" i="1">
-                <a:solidFill>
-                  <a:srgbClr val="262626"/>
-                </a:solidFill>
+              <a:rPr sz="2500" i="1">
                 <a:latin typeface="TT Hoves"/>
               </a:rPr>
               <a:t>scale</a:t>
             </a:r>
             <a:r>
-              <a:rPr sz="2200">
-                <a:solidFill>
-                  <a:srgbClr val="262626"/>
-                </a:solidFill>
+              <a:rPr sz="2500">
                 <a:latin typeface="TT Hoves"/>
               </a:rPr>
               <a:t>.</a:t>
             </a:r>
           </a:p>
           <a:p>
-            <a:pPr algn="l" marL="320040" indent="-320040">
+            <a:pPr marL="457200" indent="-457200" algn="l">
               <a:lnSpc>
-                <a:spcPct val="103000"/>
+                <a:spcPct val="104000"/>
               </a:lnSpc>
               <a:spcBef>
                 <a:spcPts val="0"/>
               </a:spcBef>
               <a:spcAft>
-                <a:spcPts val="1400"/>
+                <a:spcPts val="700"/>
               </a:spcAft>
-              <a:buClr>
-                <a:srgbClr val="F9770B"/>
-              </a:buClr>
-              <a:buFont typeface="Arial"/>
+              <a:buFont typeface="Arial" pitchFamily="34" charset="0"/>
               <a:buChar char="•"/>
             </a:pPr>
             <a:r>
-              <a:rPr sz="2200">
-                <a:solidFill>
-                  <a:srgbClr val="262626"/>
-                </a:solidFill>
+              <a:rPr sz="2500">
                 <a:latin typeface="TT Hoves"/>
               </a:rPr>
               <a:t>Doubling the launch speed doesn't just double the range — because speed appears </a:t>
             </a:r>
             <a:r>
-              <a:rPr sz="2200" i="1">
-                <a:solidFill>
-                  <a:srgbClr val="262626"/>
-                </a:solidFill>
+              <a:rPr sz="2500" i="1">
                 <a:latin typeface="TT Hoves"/>
               </a:rPr>
               <a:t>squared</a:t>
             </a:r>
             <a:r>
-              <a:rPr sz="2200">
-                <a:solidFill>
-                  <a:srgbClr val="262626"/>
-                </a:solidFill>
+              <a:rPr sz="2500">
                 <a:latin typeface="TT Hoves"/>
               </a:rPr>
               <a:t> in both the range and max-height formulas, the effect compounds fast.</a:t>
             </a:r>
           </a:p>
           <a:p>
-            <a:pPr algn="l" marL="320040" indent="-320040">
+            <a:pPr marL="457200" indent="-457200" algn="l">
               <a:lnSpc>
-                <a:spcPct val="103000"/>
+                <a:spcPct val="104000"/>
               </a:lnSpc>
               <a:spcBef>
                 <a:spcPts val="0"/>
               </a:spcBef>
               <a:spcAft>
-                <a:spcPts val="1400"/>
+                <a:spcPts val="700"/>
               </a:spcAft>
-              <a:buClr>
-                <a:srgbClr val="F9770B"/>
-              </a:buClr>
-              <a:buFont typeface="Arial"/>
+              <a:buFont typeface="Arial" pitchFamily="34" charset="0"/>
               <a:buChar char="•"/>
             </a:pPr>
             <a:r>
-              <a:rPr sz="2200">
-                <a:solidFill>
-                  <a:srgbClr val="262626"/>
-                </a:solidFill>
+              <a:rPr sz="2500">
                 <a:latin typeface="TT Hoves"/>
               </a:rPr>
               <a:t>This matters anywhere launch speed is the variable an athlete, engineer, or animal can actually control — angle is often fixed by circumstance, but speed rarely is.</a:t>
@@ -15167,8 +13813,8 @@
         </p:nvSpPr>
         <p:spPr>
           <a:xfrm>
-            <a:off x="694944" y="420624"/>
-            <a:ext cx="10789920" cy="1024128"/>
+            <a:off x="699400" y="619760"/>
+            <a:ext cx="11441800" cy="830997"/>
           </a:xfrm>
           <a:prstGeom prst="rect">
             <a:avLst/>
@@ -15182,11 +13828,25 @@
           <a:lstStyle/>
           <a:p>
             <a:r>
-              <a:rPr sz="2500" b="1">
-                <a:solidFill>
-                  <a:srgbClr val="1A1A1A"/>
-                </a:solidFill>
-                <a:latin typeface="TT Hoves ExtraBold"/>
+              <a:rPr lang="en-PH" sz="2800" dirty="0">
+                <a:gradFill flip="none" rotWithShape="1">
+                  <a:gsLst>
+                    <a:gs pos="0">
+                      <a:srgbClr val="B45404"/>
+                    </a:gs>
+                    <a:gs pos="50000">
+                      <a:srgbClr val="E86C06"/>
+                    </a:gs>
+                    <a:gs pos="100000">
+                      <a:srgbClr val="F9770B"/>
+                    </a:gs>
+                  </a:gsLst>
+                  <a:path path="circle">
+                    <a:fillToRect l="50000" t="50000" r="50000" b="50000"/>
+                  </a:path>
+                  <a:tileRect/>
+                </a:gradFill>
+                <a:latin typeface="TT Hoves ExtraBold" panose="02000903040000020004" pitchFamily="50" charset="0"/>
               </a:rPr>
               <a:t>From Straight Lines to Circles — A New Kind of Motion</a:t>
             </a:r>
@@ -15324,58 +13984,20 @@
       </p:sp>
       <p:sp>
         <p:nvSpPr>
-          <p:cNvPr id="13" name="Rectangle 12"/>
-          <p:cNvSpPr/>
+          <p:cNvPr id="9" name="TextBox 8">
+            <a:extLst>
+              <a:ext uri="{FF2B5EF4-FFF2-40B4-BE49-F238E27FC236}">
+                <a16:creationId xmlns:a16="http://schemas.microsoft.com/office/drawing/2014/main" id="{73C00714-0F36-6BC8-C038-4D7F36CEB239}"/>
+              </a:ext>
+            </a:extLst>
+          </p:cNvPr>
+          <p:cNvSpPr txBox="1"/>
           <p:nvPr/>
         </p:nvSpPr>
         <p:spPr>
           <a:xfrm>
-            <a:off x="713232" y="1481328"/>
-            <a:ext cx="960120" cy="68580"/>
-          </a:xfrm>
-          <a:prstGeom prst="rect">
-            <a:avLst/>
-          </a:prstGeom>
-          <a:solidFill>
-            <a:srgbClr val="F9770B"/>
-          </a:solidFill>
-          <a:ln>
-            <a:noFill/>
-          </a:ln>
-          <a:effectLst/>
-        </p:spPr>
-        <p:style>
-          <a:lnRef idx="1">
-            <a:schemeClr val="accent1"/>
-          </a:lnRef>
-          <a:fillRef idx="3">
-            <a:schemeClr val="accent1"/>
-          </a:fillRef>
-          <a:effectRef idx="2">
-            <a:schemeClr val="accent1"/>
-          </a:effectRef>
-          <a:fontRef idx="minor">
-            <a:schemeClr val="lt1"/>
-          </a:fontRef>
-        </p:style>
-        <p:txBody>
-          <a:bodyPr rtlCol="0" anchor="ctr"/>
-          <a:lstStyle/>
-          <a:p>
-            <a:pPr algn="ctr"/>
-          </a:p>
-        </p:txBody>
-      </p:sp>
-      <p:sp>
-        <p:nvSpPr>
-          <p:cNvPr id="14" name="TextBox 13"/>
-          <p:cNvSpPr txBox="1"/>
-          <p:nvPr/>
-        </p:nvSpPr>
-        <p:spPr>
-          <a:xfrm>
-            <a:off x="694944" y="2057400"/>
-            <a:ext cx="10789920" cy="3474720"/>
+            <a:off x="699058" y="1536192"/>
+            <a:ext cx="10671048" cy="4270248"/>
           </a:xfrm>
           <a:prstGeom prst="rect">
             <a:avLst/>
@@ -15383,176 +14005,128 @@
           <a:noFill/>
         </p:spPr>
         <p:txBody>
-          <a:bodyPr wrap="square" anchor="t">
-            <a:spAutoFit/>
+          <a:bodyPr wrap="square" rtlCol="0">
+            <a:noAutofit/>
           </a:bodyPr>
           <a:lstStyle/>
           <a:p>
-            <a:pPr algn="l" marL="320040" indent="-320040">
+            <a:pPr marL="457200" indent="-457200" algn="l">
               <a:lnSpc>
-                <a:spcPct val="103000"/>
+                <a:spcPct val="104000"/>
               </a:lnSpc>
               <a:spcBef>
                 <a:spcPts val="0"/>
               </a:spcBef>
               <a:spcAft>
-                <a:spcPts val="1400"/>
+                <a:spcPts val="700"/>
               </a:spcAft>
-              <a:buClr>
-                <a:srgbClr val="F9770B"/>
-              </a:buClr>
-              <a:buFont typeface="Arial"/>
+              <a:buFont typeface="Arial" pitchFamily="34" charset="0"/>
               <a:buChar char="•"/>
             </a:pPr>
             <a:r>
-              <a:rPr sz="2200">
-                <a:solidFill>
-                  <a:srgbClr val="262626"/>
-                </a:solidFill>
+              <a:rPr sz="2500">
                 <a:latin typeface="TT Hoves"/>
               </a:rPr>
               <a:t>Everything so far involved a </a:t>
             </a:r>
             <a:r>
-              <a:rPr sz="2200" i="1">
-                <a:solidFill>
-                  <a:srgbClr val="262626"/>
-                </a:solidFill>
+              <a:rPr sz="2500" i="1">
                 <a:latin typeface="TT Hoves"/>
               </a:rPr>
               <a:t>changing</a:t>
             </a:r>
             <a:r>
-              <a:rPr sz="2200">
-                <a:solidFill>
-                  <a:srgbClr val="262626"/>
-                </a:solidFill>
+              <a:rPr sz="2500">
                 <a:latin typeface="TT Hoves"/>
               </a:rPr>
               <a:t> speed and a </a:t>
             </a:r>
             <a:r>
-              <a:rPr sz="2200" i="1">
-                <a:solidFill>
-                  <a:srgbClr val="262626"/>
-                </a:solidFill>
+              <a:rPr sz="2500" i="1">
                 <a:latin typeface="TT Hoves"/>
               </a:rPr>
               <a:t>changing</a:t>
             </a:r>
             <a:r>
-              <a:rPr sz="2200">
-                <a:solidFill>
-                  <a:srgbClr val="262626"/>
-                </a:solidFill>
+              <a:rPr sz="2500">
                 <a:latin typeface="TT Hoves"/>
               </a:rPr>
               <a:t> direction, both driven by gravity.</a:t>
             </a:r>
           </a:p>
           <a:p>
-            <a:pPr algn="l" marL="320040" indent="-320040">
+            <a:pPr marL="457200" indent="-457200" algn="l">
               <a:lnSpc>
-                <a:spcPct val="103000"/>
+                <a:spcPct val="104000"/>
               </a:lnSpc>
               <a:spcBef>
                 <a:spcPts val="0"/>
               </a:spcBef>
               <a:spcAft>
-                <a:spcPts val="1400"/>
+                <a:spcPts val="700"/>
               </a:spcAft>
-              <a:buClr>
-                <a:srgbClr val="F9770B"/>
-              </a:buClr>
-              <a:buFont typeface="Arial"/>
+              <a:buFont typeface="Arial" pitchFamily="34" charset="0"/>
               <a:buChar char="•"/>
             </a:pPr>
             <a:r>
-              <a:rPr sz="2200">
-                <a:solidFill>
-                  <a:srgbClr val="262626"/>
-                </a:solidFill>
+              <a:rPr sz="2500">
                 <a:latin typeface="TT Hoves"/>
               </a:rPr>
               <a:t>Now: a Ferris wheel car, a satellite in orbit, a car rounding a curve — all moving at </a:t>
             </a:r>
             <a:r>
-              <a:rPr sz="2200" i="1">
-                <a:solidFill>
-                  <a:srgbClr val="262626"/>
-                </a:solidFill>
+              <a:rPr sz="2500" i="1">
                 <a:latin typeface="TT Hoves"/>
               </a:rPr>
               <a:t>roughly constant speed</a:t>
             </a:r>
             <a:r>
-              <a:rPr sz="2200">
-                <a:solidFill>
-                  <a:srgbClr val="262626"/>
-                </a:solidFill>
+              <a:rPr sz="2500">
                 <a:latin typeface="TT Hoves"/>
               </a:rPr>
               <a:t>, yet still very clearly </a:t>
             </a:r>
             <a:r>
-              <a:rPr sz="2200" i="1">
-                <a:solidFill>
-                  <a:srgbClr val="262626"/>
-                </a:solidFill>
+              <a:rPr sz="2500" i="1">
                 <a:latin typeface="TT Hoves"/>
               </a:rPr>
               <a:t>not</a:t>
             </a:r>
             <a:r>
-              <a:rPr sz="2200">
-                <a:solidFill>
-                  <a:srgbClr val="262626"/>
-                </a:solidFill>
+              <a:rPr sz="2500">
                 <a:latin typeface="TT Hoves"/>
               </a:rPr>
               <a:t> moving in a straight line.</a:t>
             </a:r>
           </a:p>
           <a:p>
-            <a:pPr algn="l" marL="320040" indent="-320040">
+            <a:pPr marL="457200" indent="-457200" algn="l">
               <a:lnSpc>
-                <a:spcPct val="103000"/>
+                <a:spcPct val="104000"/>
               </a:lnSpc>
               <a:spcBef>
                 <a:spcPts val="0"/>
               </a:spcBef>
               <a:spcAft>
-                <a:spcPts val="1400"/>
+                <a:spcPts val="700"/>
               </a:spcAft>
-              <a:buClr>
-                <a:srgbClr val="F9770B"/>
-              </a:buClr>
-              <a:buFont typeface="Arial"/>
+              <a:buFont typeface="Arial" pitchFamily="34" charset="0"/>
               <a:buChar char="•"/>
             </a:pPr>
             <a:r>
-              <a:rPr sz="2200">
-                <a:solidFill>
-                  <a:srgbClr val="262626"/>
-                </a:solidFill>
+              <a:rPr sz="2500">
                 <a:latin typeface="TT Hoves"/>
               </a:rPr>
               <a:t>That's </a:t>
             </a:r>
             <a:r>
-              <a:rPr sz="2200" b="1" i="1">
-                <a:solidFill>
-                  <a:srgbClr val="262626"/>
-                </a:solidFill>
+              <a:rPr sz="2500" b="1" i="1">
                 <a:latin typeface="TT Hoves"/>
               </a:rPr>
               <a:t>circular motion</a:t>
             </a:r>
             <a:r>
-              <a:rPr sz="2200">
-                <a:solidFill>
-                  <a:srgbClr val="262626"/>
-                </a:solidFill>
+              <a:rPr sz="2500">
                 <a:latin typeface="TT Hoves"/>
               </a:rPr>
               <a:t> — a different curved path, driven by a completely different cause.</a:t>
@@ -15811,8 +14385,8 @@
         </p:nvSpPr>
         <p:spPr>
           <a:xfrm>
-            <a:off x="694944" y="420624"/>
-            <a:ext cx="10789920" cy="1024128"/>
+            <a:off x="699400" y="619760"/>
+            <a:ext cx="11441800" cy="830997"/>
           </a:xfrm>
           <a:prstGeom prst="rect">
             <a:avLst/>
@@ -15826,11 +14400,25 @@
           <a:lstStyle/>
           <a:p>
             <a:r>
-              <a:rPr sz="3000" b="1">
-                <a:solidFill>
-                  <a:srgbClr val="1A1A1A"/>
-                </a:solidFill>
-                <a:latin typeface="TT Hoves ExtraBold"/>
+              <a:rPr lang="en-PH" sz="3800" dirty="0">
+                <a:gradFill flip="none" rotWithShape="1">
+                  <a:gsLst>
+                    <a:gs pos="0">
+                      <a:srgbClr val="B45404"/>
+                    </a:gs>
+                    <a:gs pos="50000">
+                      <a:srgbClr val="E86C06"/>
+                    </a:gs>
+                    <a:gs pos="100000">
+                      <a:srgbClr val="F9770B"/>
+                    </a:gs>
+                  </a:gsLst>
+                  <a:path path="circle">
+                    <a:fillToRect l="50000" t="50000" r="50000" b="50000"/>
+                  </a:path>
+                  <a:tileRect/>
+                </a:gradFill>
+                <a:latin typeface="TT Hoves ExtraBold" panose="02000903040000020004" pitchFamily="50" charset="0"/>
               </a:rPr>
               <a:t>Uniform Circular Motion Defined</a:t>
             </a:r>
@@ -15968,58 +14556,20 @@
       </p:sp>
       <p:sp>
         <p:nvSpPr>
-          <p:cNvPr id="13" name="Rectangle 12"/>
-          <p:cNvSpPr/>
+          <p:cNvPr id="9" name="TextBox 8">
+            <a:extLst>
+              <a:ext uri="{FF2B5EF4-FFF2-40B4-BE49-F238E27FC236}">
+                <a16:creationId xmlns:a16="http://schemas.microsoft.com/office/drawing/2014/main" id="{73C00714-0F36-6BC8-C038-4D7F36CEB239}"/>
+              </a:ext>
+            </a:extLst>
+          </p:cNvPr>
+          <p:cNvSpPr txBox="1"/>
           <p:nvPr/>
         </p:nvSpPr>
         <p:spPr>
           <a:xfrm>
-            <a:off x="713232" y="1481328"/>
-            <a:ext cx="960120" cy="68580"/>
-          </a:xfrm>
-          <a:prstGeom prst="rect">
-            <a:avLst/>
-          </a:prstGeom>
-          <a:solidFill>
-            <a:srgbClr val="F9770B"/>
-          </a:solidFill>
-          <a:ln>
-            <a:noFill/>
-          </a:ln>
-          <a:effectLst/>
-        </p:spPr>
-        <p:style>
-          <a:lnRef idx="1">
-            <a:schemeClr val="accent1"/>
-          </a:lnRef>
-          <a:fillRef idx="3">
-            <a:schemeClr val="accent1"/>
-          </a:fillRef>
-          <a:effectRef idx="2">
-            <a:schemeClr val="accent1"/>
-          </a:effectRef>
-          <a:fontRef idx="minor">
-            <a:schemeClr val="lt1"/>
-          </a:fontRef>
-        </p:style>
-        <p:txBody>
-          <a:bodyPr rtlCol="0" anchor="ctr"/>
-          <a:lstStyle/>
-          <a:p>
-            <a:pPr algn="ctr"/>
-          </a:p>
-        </p:txBody>
-      </p:sp>
-      <p:sp>
-        <p:nvSpPr>
-          <p:cNvPr id="14" name="TextBox 13"/>
-          <p:cNvSpPr txBox="1"/>
-          <p:nvPr/>
-        </p:nvSpPr>
-        <p:spPr>
-          <a:xfrm>
-            <a:off x="694944" y="2057400"/>
-            <a:ext cx="10789920" cy="3474720"/>
+            <a:off x="699058" y="1536192"/>
+            <a:ext cx="10671048" cy="4270248"/>
           </a:xfrm>
           <a:prstGeom prst="rect">
             <a:avLst/>
@@ -16027,176 +14577,128 @@
           <a:noFill/>
         </p:spPr>
         <p:txBody>
-          <a:bodyPr wrap="square" anchor="t">
-            <a:spAutoFit/>
+          <a:bodyPr wrap="square" rtlCol="0">
+            <a:noAutofit/>
           </a:bodyPr>
           <a:lstStyle/>
           <a:p>
-            <a:pPr algn="l" marL="320040" indent="-320040">
+            <a:pPr marL="457200" indent="-457200" algn="l">
               <a:lnSpc>
-                <a:spcPct val="103000"/>
+                <a:spcPct val="104000"/>
               </a:lnSpc>
               <a:spcBef>
                 <a:spcPts val="0"/>
               </a:spcBef>
               <a:spcAft>
-                <a:spcPts val="1400"/>
+                <a:spcPts val="700"/>
               </a:spcAft>
-              <a:buClr>
-                <a:srgbClr val="F9770B"/>
-              </a:buClr>
-              <a:buFont typeface="Arial"/>
+              <a:buFont typeface="Arial" pitchFamily="34" charset="0"/>
               <a:buChar char="•"/>
             </a:pPr>
             <a:r>
-              <a:rPr sz="2200">
-                <a:solidFill>
-                  <a:srgbClr val="262626"/>
-                </a:solidFill>
+              <a:rPr sz="2500">
                 <a:latin typeface="TT Hoves"/>
               </a:rPr>
               <a:t>When an object travels a circular path at a </a:t>
             </a:r>
             <a:r>
-              <a:rPr sz="2200" i="1">
-                <a:solidFill>
-                  <a:srgbClr val="262626"/>
-                </a:solidFill>
+              <a:rPr sz="2500" i="1">
                 <a:latin typeface="TT Hoves"/>
               </a:rPr>
               <a:t>constant speed</a:t>
             </a:r>
             <a:r>
-              <a:rPr sz="2200">
-                <a:solidFill>
-                  <a:srgbClr val="262626"/>
-                </a:solidFill>
+              <a:rPr sz="2500">
                 <a:latin typeface="TT Hoves"/>
               </a:rPr>
               <a:t>, physicists call it </a:t>
             </a:r>
             <a:r>
-              <a:rPr sz="2200" b="1" i="1">
-                <a:solidFill>
-                  <a:srgbClr val="262626"/>
-                </a:solidFill>
+              <a:rPr sz="2500" b="1" i="1">
                 <a:latin typeface="TT Hoves"/>
               </a:rPr>
               <a:t>uniform circular motion</a:t>
             </a:r>
             <a:r>
-              <a:rPr sz="2200">
-                <a:solidFill>
-                  <a:srgbClr val="262626"/>
-                </a:solidFill>
+              <a:rPr sz="2500">
                 <a:latin typeface="TT Hoves"/>
               </a:rPr>
               <a:t> — common enough to earn its own name and its own toolkit of equations.</a:t>
             </a:r>
           </a:p>
           <a:p>
-            <a:pPr algn="l" marL="320040" indent="-320040">
+            <a:pPr marL="457200" indent="-457200" algn="l">
               <a:lnSpc>
-                <a:spcPct val="103000"/>
+                <a:spcPct val="104000"/>
               </a:lnSpc>
               <a:spcBef>
                 <a:spcPts val="0"/>
               </a:spcBef>
               <a:spcAft>
-                <a:spcPts val="1400"/>
+                <a:spcPts val="700"/>
               </a:spcAft>
-              <a:buClr>
-                <a:srgbClr val="F9770B"/>
-              </a:buClr>
-              <a:buFont typeface="Arial"/>
+              <a:buFont typeface="Arial" pitchFamily="34" charset="0"/>
               <a:buChar char="•"/>
             </a:pPr>
             <a:r>
-              <a:rPr sz="2200">
-                <a:solidFill>
-                  <a:srgbClr val="262626"/>
-                </a:solidFill>
+              <a:rPr sz="2500">
                 <a:latin typeface="TT Hoves"/>
               </a:rPr>
               <a:t>A spinning record, a carousel horse, a satellite in a circular orbit — all textbook examples of the same underlying motion.</a:t>
             </a:r>
           </a:p>
           <a:p>
-            <a:pPr algn="l" marL="320040" indent="-320040">
+            <a:pPr marL="457200" indent="-457200" algn="l">
               <a:lnSpc>
-                <a:spcPct val="103000"/>
+                <a:spcPct val="104000"/>
               </a:lnSpc>
               <a:spcBef>
                 <a:spcPts val="0"/>
               </a:spcBef>
               <a:spcAft>
-                <a:spcPts val="1400"/>
+                <a:spcPts val="700"/>
               </a:spcAft>
-              <a:buClr>
-                <a:srgbClr val="F9770B"/>
-              </a:buClr>
-              <a:buFont typeface="Arial"/>
+              <a:buFont typeface="Arial" pitchFamily="34" charset="0"/>
               <a:buChar char="•"/>
             </a:pPr>
             <a:r>
-              <a:rPr sz="2200">
-                <a:solidFill>
-                  <a:srgbClr val="262626"/>
-                </a:solidFill>
+              <a:rPr sz="2500">
                 <a:latin typeface="TT Hoves"/>
               </a:rPr>
               <a:t>The one thing that's </a:t>
             </a:r>
             <a:r>
-              <a:rPr sz="2200" i="1">
-                <a:solidFill>
-                  <a:srgbClr val="262626"/>
-                </a:solidFill>
+              <a:rPr sz="2500" i="1">
                 <a:latin typeface="TT Hoves"/>
               </a:rPr>
               <a:t>always</a:t>
             </a:r>
             <a:r>
-              <a:rPr sz="2200">
-                <a:solidFill>
-                  <a:srgbClr val="262626"/>
-                </a:solidFill>
+              <a:rPr sz="2500">
                 <a:latin typeface="TT Hoves"/>
               </a:rPr>
               <a:t> true: the velocity vector is </a:t>
             </a:r>
             <a:r>
-              <a:rPr sz="2200" i="1">
-                <a:solidFill>
-                  <a:srgbClr val="262626"/>
-                </a:solidFill>
+              <a:rPr sz="2500" i="1">
                 <a:latin typeface="TT Hoves"/>
               </a:rPr>
               <a:t>tangent</a:t>
             </a:r>
             <a:r>
-              <a:rPr sz="2200">
-                <a:solidFill>
-                  <a:srgbClr val="262626"/>
-                </a:solidFill>
+              <a:rPr sz="2500">
                 <a:latin typeface="TT Hoves"/>
               </a:rPr>
               <a:t> to the circle at every instant, and </a:t>
             </a:r>
             <a:r>
-              <a:rPr sz="2200" i="1">
-                <a:solidFill>
-                  <a:srgbClr val="262626"/>
-                </a:solidFill>
+              <a:rPr sz="2500" i="1">
                 <a:latin typeface="TT Hoves"/>
               </a:rPr>
               <a:t>perpendicular</a:t>
             </a:r>
             <a:r>
-              <a:rPr sz="2200">
-                <a:solidFill>
-                  <a:srgbClr val="262626"/>
-                </a:solidFill>
+              <a:rPr sz="2500">
                 <a:latin typeface="TT Hoves"/>
               </a:rPr>
               <a:t> to the radius.</a:t>
@@ -16455,8 +14957,8 @@
         </p:nvSpPr>
         <p:spPr>
           <a:xfrm>
-            <a:off x="694944" y="420624"/>
-            <a:ext cx="10789920" cy="1024128"/>
+            <a:off x="699400" y="619760"/>
+            <a:ext cx="11441800" cy="830997"/>
           </a:xfrm>
           <a:prstGeom prst="rect">
             <a:avLst/>
@@ -16470,11 +14972,25 @@
           <a:lstStyle/>
           <a:p>
             <a:r>
-              <a:rPr sz="3000" b="1">
-                <a:solidFill>
-                  <a:srgbClr val="1A1A1A"/>
-                </a:solidFill>
-                <a:latin typeface="TT Hoves ExtraBold"/>
+              <a:rPr lang="en-PH" sz="3300" dirty="0">
+                <a:gradFill flip="none" rotWithShape="1">
+                  <a:gsLst>
+                    <a:gs pos="0">
+                      <a:srgbClr val="B45404"/>
+                    </a:gs>
+                    <a:gs pos="50000">
+                      <a:srgbClr val="E86C06"/>
+                    </a:gs>
+                    <a:gs pos="100000">
+                      <a:srgbClr val="F9770B"/>
+                    </a:gs>
+                  </a:gsLst>
+                  <a:path path="circle">
+                    <a:fillToRect l="50000" t="50000" r="50000" b="50000"/>
+                  </a:path>
+                  <a:tileRect/>
+                </a:gradFill>
+                <a:latin typeface="TT Hoves ExtraBold" panose="02000903040000020004" pitchFamily="50" charset="0"/>
               </a:rPr>
               <a:t>Why Constant Speed Still Means Accelerating</a:t>
             </a:r>
@@ -16612,58 +15128,20 @@
       </p:sp>
       <p:sp>
         <p:nvSpPr>
-          <p:cNvPr id="13" name="Rectangle 12"/>
-          <p:cNvSpPr/>
+          <p:cNvPr id="9" name="TextBox 8">
+            <a:extLst>
+              <a:ext uri="{FF2B5EF4-FFF2-40B4-BE49-F238E27FC236}">
+                <a16:creationId xmlns:a16="http://schemas.microsoft.com/office/drawing/2014/main" id="{73C00714-0F36-6BC8-C038-4D7F36CEB239}"/>
+              </a:ext>
+            </a:extLst>
+          </p:cNvPr>
+          <p:cNvSpPr txBox="1"/>
           <p:nvPr/>
         </p:nvSpPr>
         <p:spPr>
           <a:xfrm>
-            <a:off x="713232" y="1481328"/>
-            <a:ext cx="960120" cy="68580"/>
-          </a:xfrm>
-          <a:prstGeom prst="rect">
-            <a:avLst/>
-          </a:prstGeom>
-          <a:solidFill>
-            <a:srgbClr val="F9770B"/>
-          </a:solidFill>
-          <a:ln>
-            <a:noFill/>
-          </a:ln>
-          <a:effectLst/>
-        </p:spPr>
-        <p:style>
-          <a:lnRef idx="1">
-            <a:schemeClr val="accent1"/>
-          </a:lnRef>
-          <a:fillRef idx="3">
-            <a:schemeClr val="accent1"/>
-          </a:fillRef>
-          <a:effectRef idx="2">
-            <a:schemeClr val="accent1"/>
-          </a:effectRef>
-          <a:fontRef idx="minor">
-            <a:schemeClr val="lt1"/>
-          </a:fontRef>
-        </p:style>
-        <p:txBody>
-          <a:bodyPr rtlCol="0" anchor="ctr"/>
-          <a:lstStyle/>
-          <a:p>
-            <a:pPr algn="ctr"/>
-          </a:p>
-        </p:txBody>
-      </p:sp>
-      <p:sp>
-        <p:nvSpPr>
-          <p:cNvPr id="14" name="TextBox 13"/>
-          <p:cNvSpPr txBox="1"/>
-          <p:nvPr/>
-        </p:nvSpPr>
-        <p:spPr>
-          <a:xfrm>
-            <a:off x="694944" y="1691640"/>
-            <a:ext cx="5943600" cy="4206240"/>
+            <a:off x="699058" y="1536192"/>
+            <a:ext cx="10671048" cy="4270248"/>
           </a:xfrm>
           <a:prstGeom prst="rect">
             <a:avLst/>
@@ -16671,131 +15149,98 @@
           <a:noFill/>
         </p:spPr>
         <p:txBody>
-          <a:bodyPr wrap="square" anchor="t">
-            <a:spAutoFit/>
+          <a:bodyPr wrap="square" rtlCol="0">
+            <a:noAutofit/>
           </a:bodyPr>
           <a:lstStyle/>
           <a:p>
-            <a:pPr algn="l" marL="320040" indent="-320040">
+            <a:pPr marL="457200" indent="-457200" algn="l">
               <a:lnSpc>
-                <a:spcPct val="103000"/>
+                <a:spcPct val="104000"/>
               </a:lnSpc>
               <a:spcBef>
                 <a:spcPts val="0"/>
               </a:spcBef>
               <a:spcAft>
-                <a:spcPts val="800"/>
+                <a:spcPts val="700"/>
               </a:spcAft>
-              <a:buClr>
-                <a:srgbClr val="F9770B"/>
-              </a:buClr>
-              <a:buFont typeface="Arial"/>
+              <a:buFont typeface="Arial" pitchFamily="34" charset="0"/>
               <a:buChar char="•"/>
             </a:pPr>
             <a:r>
-              <a:rPr sz="1900">
-                <a:solidFill>
-                  <a:srgbClr val="262626"/>
-                </a:solidFill>
+              <a:rPr sz="2800">
                 <a:latin typeface="TT Hoves"/>
               </a:rPr>
               <a:t>Common misconception: "constant speed" means "no acceleration." </a:t>
             </a:r>
             <a:r>
-              <a:rPr sz="1900" b="1">
-                <a:solidFill>
-                  <a:srgbClr val="262626"/>
-                </a:solidFill>
+              <a:rPr sz="2800" b="1">
                 <a:latin typeface="TT Hoves"/>
               </a:rPr>
               <a:t>False.</a:t>
             </a:r>
           </a:p>
           <a:p>
-            <a:pPr algn="l" marL="320040" indent="-320040">
+            <a:pPr marL="457200" indent="-457200" algn="l">
               <a:lnSpc>
-                <a:spcPct val="103000"/>
+                <a:spcPct val="104000"/>
               </a:lnSpc>
               <a:spcBef>
                 <a:spcPts val="0"/>
               </a:spcBef>
               <a:spcAft>
-                <a:spcPts val="800"/>
+                <a:spcPts val="700"/>
               </a:spcAft>
-              <a:buClr>
-                <a:srgbClr val="F9770B"/>
-              </a:buClr>
-              <a:buFont typeface="Arial"/>
+              <a:buFont typeface="Arial" pitchFamily="34" charset="0"/>
               <a:buChar char="•"/>
             </a:pPr>
             <a:r>
-              <a:rPr sz="1900" b="1" i="1">
-                <a:solidFill>
-                  <a:srgbClr val="262626"/>
-                </a:solidFill>
+              <a:rPr sz="2800" b="1" i="1">
                 <a:latin typeface="TT Hoves"/>
               </a:rPr>
               <a:t>Acceleration is a change in velocity — and velocity is a vector, made of both speed and direction.</a:t>
             </a:r>
           </a:p>
           <a:p>
-            <a:pPr algn="l" marL="320040" indent="-320040">
+            <a:pPr marL="457200" indent="-457200" algn="l">
               <a:lnSpc>
-                <a:spcPct val="103000"/>
+                <a:spcPct val="104000"/>
               </a:lnSpc>
               <a:spcBef>
                 <a:spcPts val="0"/>
               </a:spcBef>
               <a:spcAft>
-                <a:spcPts val="800"/>
+                <a:spcPts val="700"/>
               </a:spcAft>
-              <a:buClr>
-                <a:srgbClr val="F9770B"/>
-              </a:buClr>
-              <a:buFont typeface="Arial"/>
+              <a:buFont typeface="Arial" pitchFamily="34" charset="0"/>
               <a:buChar char="•"/>
             </a:pPr>
             <a:r>
-              <a:rPr sz="1900">
-                <a:solidFill>
-                  <a:srgbClr val="262626"/>
-                </a:solidFill>
+              <a:rPr sz="2800">
                 <a:latin typeface="TT Hoves"/>
               </a:rPr>
               <a:t>In circular motion, the </a:t>
             </a:r>
             <a:r>
-              <a:rPr sz="1900" i="1">
-                <a:solidFill>
-                  <a:srgbClr val="262626"/>
-                </a:solidFill>
+              <a:rPr sz="2800" i="1">
                 <a:latin typeface="TT Hoves"/>
               </a:rPr>
               <a:t>speed</a:t>
             </a:r>
             <a:r>
-              <a:rPr sz="1900">
-                <a:solidFill>
-                  <a:srgbClr val="262626"/>
-                </a:solidFill>
+              <a:rPr sz="2800">
                 <a:latin typeface="TT Hoves"/>
               </a:rPr>
               <a:t> never changes, but the </a:t>
             </a:r>
             <a:r>
-              <a:rPr sz="1900" i="1">
-                <a:solidFill>
-                  <a:srgbClr val="262626"/>
-                </a:solidFill>
+              <a:rPr sz="2800" i="1">
                 <a:latin typeface="TT Hoves"/>
               </a:rPr>
               <a:t>direction</a:t>
             </a:r>
             <a:r>
-              <a:rPr sz="1900">
-                <a:solidFill>
-                  <a:srgbClr val="262626"/>
-                </a:solidFill>
+              <a:rPr sz="2800">
                 <a:latin typeface="TT Hoves"/>
               </a:rPr>
               <a:t> is changing at every single instant — and that alone is enough to count as acceleration.</a:t>
@@ -16803,30 +15248,6 @@
           </a:p>
         </p:txBody>
       </p:sp>
-      <p:pic>
-        <p:nvPicPr>
-          <p:cNvPr id="15" name="Picture 14" descr="circle_vectors.png"/>
-          <p:cNvPicPr>
-            <a:picLocks noChangeAspect="1"/>
-          </p:cNvPicPr>
-          <p:nvPr/>
-        </p:nvPicPr>
-        <p:blipFill>
-          <a:blip r:embed="rId3"/>
-          <a:stretch>
-            <a:fillRect/>
-          </a:stretch>
-        </p:blipFill>
-        <p:spPr>
-          <a:xfrm>
-            <a:off x="7018020" y="1691640"/>
-            <a:ext cx="4297680" cy="4297680"/>
-          </a:xfrm>
-          <a:prstGeom prst="rect">
-            <a:avLst/>
-          </a:prstGeom>
-        </p:spPr>
-      </p:pic>
     </p:spTree>
   </p:cSld>
   <p:clrMapOvr>
@@ -17078,8 +15499,8 @@
         </p:nvSpPr>
         <p:spPr>
           <a:xfrm>
-            <a:off x="694944" y="420624"/>
-            <a:ext cx="10789920" cy="1024128"/>
+            <a:off x="699400" y="619760"/>
+            <a:ext cx="11441800" cy="830997"/>
           </a:xfrm>
           <a:prstGeom prst="rect">
             <a:avLst/>
@@ -17093,11 +15514,25 @@
           <a:lstStyle/>
           <a:p>
             <a:r>
-              <a:rPr sz="2500" b="1">
-                <a:solidFill>
-                  <a:srgbClr val="1A1A1A"/>
-                </a:solidFill>
-                <a:latin typeface="TT Hoves ExtraBold"/>
+              <a:rPr lang="en-PH" sz="2800" dirty="0">
+                <a:gradFill flip="none" rotWithShape="1">
+                  <a:gsLst>
+                    <a:gs pos="0">
+                      <a:srgbClr val="B45404"/>
+                    </a:gs>
+                    <a:gs pos="50000">
+                      <a:srgbClr val="E86C06"/>
+                    </a:gs>
+                    <a:gs pos="100000">
+                      <a:srgbClr val="F9770B"/>
+                    </a:gs>
+                  </a:gsLst>
+                  <a:path path="circle">
+                    <a:fillToRect l="50000" t="50000" r="50000" b="50000"/>
+                  </a:path>
+                  <a:tileRect/>
+                </a:gradFill>
+                <a:latin typeface="TT Hoves ExtraBold" panose="02000903040000020004" pitchFamily="50" charset="0"/>
               </a:rPr>
               <a:t>Centripetal Acceleration — Always Toward the Center</a:t>
             </a:r>
@@ -17235,171 +15670,20 @@
       </p:sp>
       <p:sp>
         <p:nvSpPr>
-          <p:cNvPr id="13" name="Rectangle 12"/>
-          <p:cNvSpPr/>
+          <p:cNvPr id="9" name="TextBox 8">
+            <a:extLst>
+              <a:ext uri="{FF2B5EF4-FFF2-40B4-BE49-F238E27FC236}">
+                <a16:creationId xmlns:a16="http://schemas.microsoft.com/office/drawing/2014/main" id="{73C00714-0F36-6BC8-C038-4D7F36CEB239}"/>
+              </a:ext>
+            </a:extLst>
+          </p:cNvPr>
+          <p:cNvSpPr txBox="1"/>
           <p:nvPr/>
         </p:nvSpPr>
         <p:spPr>
           <a:xfrm>
-            <a:off x="713232" y="1481328"/>
-            <a:ext cx="960120" cy="68580"/>
-          </a:xfrm>
-          <a:prstGeom prst="rect">
-            <a:avLst/>
-          </a:prstGeom>
-          <a:solidFill>
-            <a:srgbClr val="F9770B"/>
-          </a:solidFill>
-          <a:ln>
-            <a:noFill/>
-          </a:ln>
-          <a:effectLst/>
-        </p:spPr>
-        <p:style>
-          <a:lnRef idx="1">
-            <a:schemeClr val="accent1"/>
-          </a:lnRef>
-          <a:fillRef idx="3">
-            <a:schemeClr val="accent1"/>
-          </a:fillRef>
-          <a:effectRef idx="2">
-            <a:schemeClr val="accent1"/>
-          </a:effectRef>
-          <a:fontRef idx="minor">
-            <a:schemeClr val="lt1"/>
-          </a:fontRef>
-        </p:style>
-        <p:txBody>
-          <a:bodyPr rtlCol="0" anchor="ctr"/>
-          <a:lstStyle/>
-          <a:p>
-            <a:pPr algn="ctr"/>
-          </a:p>
-        </p:txBody>
-      </p:sp>
-      <p:sp>
-        <p:nvSpPr>
-          <p:cNvPr id="14" name="Rounded Rectangle 13"/>
-          <p:cNvSpPr/>
-          <p:nvPr/>
-        </p:nvSpPr>
-        <p:spPr>
-          <a:xfrm>
-            <a:off x="3529584" y="1828800"/>
-            <a:ext cx="5120640" cy="1069848"/>
-          </a:xfrm>
-          <a:prstGeom prst="roundRect">
-            <a:avLst>
-              <a:gd name="adj" fmla="val 10000"/>
-            </a:avLst>
-          </a:prstGeom>
-          <a:solidFill>
-            <a:srgbClr val="FDF1E6"/>
-          </a:solidFill>
-          <a:ln w="15875">
-            <a:solidFill>
-              <a:srgbClr val="F9770B"/>
-            </a:solidFill>
-          </a:ln>
-          <a:effectLst/>
-        </p:spPr>
-        <p:style>
-          <a:lnRef idx="1">
-            <a:schemeClr val="accent1"/>
-          </a:lnRef>
-          <a:fillRef idx="3">
-            <a:schemeClr val="accent1"/>
-          </a:fillRef>
-          <a:effectRef idx="2">
-            <a:schemeClr val="accent1"/>
-          </a:effectRef>
-          <a:fontRef idx="minor">
-            <a:schemeClr val="lt1"/>
-          </a:fontRef>
-        </p:style>
-        <p:txBody>
-          <a:bodyPr rtlCol="0" anchor="ctr" wrap="square" tIns="50800" bIns="50800"/>
-          <a:lstStyle/>
-          <a:p>
-            <a:pPr algn="ctr">
-              <a:buNone/>
-            </a:pPr>
-            <a:r>
-              <a:rPr sz="2700" i="1">
-                <a:solidFill>
-                  <a:srgbClr val="C85A00"/>
-                </a:solidFill>
-                <a:latin typeface="TT Hoves"/>
-              </a:rPr>
-              <a:t>a</a:t>
-            </a:r>
-            <a:r>
-              <a:rPr sz="2484" baseline="-25000">
-                <a:solidFill>
-                  <a:srgbClr val="C85A00"/>
-                </a:solidFill>
-                <a:latin typeface="TT Hoves"/>
-              </a:rPr>
-              <a:t>c</a:t>
-            </a:r>
-            <a:r>
-              <a:rPr sz="2700">
-                <a:solidFill>
-                  <a:srgbClr val="C85A00"/>
-                </a:solidFill>
-                <a:latin typeface="TT Hoves"/>
-              </a:rPr>
-              <a:t>  =  </a:t>
-            </a:r>
-            <a:r>
-              <a:rPr sz="2700" i="1">
-                <a:solidFill>
-                  <a:srgbClr val="C85A00"/>
-                </a:solidFill>
-                <a:latin typeface="TT Hoves"/>
-              </a:rPr>
-              <a:t>v</a:t>
-            </a:r>
-            <a:r>
-              <a:rPr sz="2484" baseline="30000">
-                <a:solidFill>
-                  <a:srgbClr val="C85A00"/>
-                </a:solidFill>
-                <a:latin typeface="TT Hoves"/>
-              </a:rPr>
-              <a:t>2</a:t>
-            </a:r>
-            <a:r>
-              <a:rPr sz="2700">
-                <a:solidFill>
-                  <a:srgbClr val="C85A00"/>
-                </a:solidFill>
-                <a:latin typeface="TT Hoves"/>
-              </a:rPr>
-              <a:t>  /  </a:t>
-            </a:r>
-            <a:r>
-              <a:rPr sz="2700" i="1">
-                <a:solidFill>
-                  <a:srgbClr val="C85A00"/>
-                </a:solidFill>
-                <a:latin typeface="TT Hoves"/>
-              </a:rPr>
-              <a:t>r</a:t>
-            </a:r>
-          </a:p>
-        </p:txBody>
-      </p:sp>
-      <p:sp>
-        <p:nvSpPr>
-          <p:cNvPr id="15" name="TextBox 14"/>
-          <p:cNvSpPr txBox="1"/>
-          <p:nvPr/>
-        </p:nvSpPr>
-        <p:spPr>
-          <a:xfrm>
-            <a:off x="694944" y="3063240"/>
-            <a:ext cx="10789920" cy="2926080"/>
+            <a:off x="699058" y="1536192"/>
+            <a:ext cx="10671048" cy="4270248"/>
           </a:xfrm>
           <a:prstGeom prst="rect">
             <a:avLst/>
@@ -17407,140 +15691,160 @@
           <a:noFill/>
         </p:spPr>
         <p:txBody>
-          <a:bodyPr wrap="square" anchor="t">
-            <a:spAutoFit/>
+          <a:bodyPr wrap="square" rtlCol="0">
+            <a:noAutofit/>
           </a:bodyPr>
           <a:lstStyle/>
           <a:p>
-            <a:pPr algn="l" marL="320040" indent="-320040">
+            <a:pPr algn="ctr">
               <a:lnSpc>
-                <a:spcPct val="103000"/>
+                <a:spcPct val="104000"/>
+              </a:lnSpc>
+              <a:spcBef>
+                <a:spcPts val="400"/>
+              </a:spcBef>
+              <a:spcAft>
+                <a:spcPts val="700"/>
+              </a:spcAft>
+              <a:buNone/>
+            </a:pPr>
+            <a:r>
+              <a:rPr sz="2700" b="1" i="1">
+                <a:latin typeface="TT Hoves"/>
+              </a:rPr>
+              <a:t>a</a:t>
+            </a:r>
+            <a:r>
+              <a:rPr sz="2484" baseline="-25000">
+                <a:latin typeface="TT Hoves"/>
+              </a:rPr>
+              <a:t>c</a:t>
+            </a:r>
+            <a:r>
+              <a:rPr sz="2700" b="1">
+                <a:latin typeface="TT Hoves"/>
+              </a:rPr>
+              <a:t> = </a:t>
+            </a:r>
+            <a:r>
+              <a:rPr sz="2700" b="1" i="1">
+                <a:latin typeface="TT Hoves"/>
+              </a:rPr>
+              <a:t>v</a:t>
+            </a:r>
+            <a:r>
+              <a:rPr sz="2484" baseline="30000">
+                <a:latin typeface="TT Hoves"/>
+              </a:rPr>
+              <a:t>2</a:t>
+            </a:r>
+            <a:r>
+              <a:rPr sz="2700" b="1">
+                <a:latin typeface="TT Hoves"/>
+              </a:rPr>
+              <a:t>  /  </a:t>
+            </a:r>
+            <a:r>
+              <a:rPr sz="2700" b="1" i="1">
+                <a:latin typeface="TT Hoves"/>
+              </a:rPr>
+              <a:t>r</a:t>
+            </a:r>
+          </a:p>
+          <a:p>
+            <a:pPr marL="457200" indent="-457200" algn="l">
+              <a:lnSpc>
+                <a:spcPct val="104000"/>
               </a:lnSpc>
               <a:spcBef>
                 <a:spcPts val="0"/>
               </a:spcBef>
               <a:spcAft>
-                <a:spcPts val="1200"/>
+                <a:spcPts val="700"/>
               </a:spcAft>
-              <a:buClr>
-                <a:srgbClr val="F9770B"/>
-              </a:buClr>
-              <a:buFont typeface="Arial"/>
+              <a:buFont typeface="Arial" pitchFamily="34" charset="0"/>
               <a:buChar char="•"/>
             </a:pPr>
             <a:r>
-              <a:rPr sz="2000">
-                <a:solidFill>
-                  <a:srgbClr val="262626"/>
-                </a:solidFill>
+              <a:rPr sz="2500">
                 <a:latin typeface="TT Hoves"/>
               </a:rPr>
               <a:t>Called </a:t>
             </a:r>
             <a:r>
-              <a:rPr sz="2000" b="1" i="1">
-                <a:solidFill>
-                  <a:srgbClr val="262626"/>
-                </a:solidFill>
+              <a:rPr sz="2500" b="1" i="1">
                 <a:latin typeface="TT Hoves"/>
               </a:rPr>
               <a:t>centripetal</a:t>
             </a:r>
             <a:r>
-              <a:rPr sz="2000">
-                <a:solidFill>
-                  <a:srgbClr val="262626"/>
-                </a:solidFill>
+              <a:rPr sz="2500">
                 <a:latin typeface="TT Hoves"/>
               </a:rPr>
               <a:t> acceleration — literally "center-seeking."</a:t>
             </a:r>
           </a:p>
           <a:p>
-            <a:pPr algn="l" marL="320040" indent="-320040">
+            <a:pPr marL="457200" indent="-457200" algn="l">
               <a:lnSpc>
-                <a:spcPct val="103000"/>
+                <a:spcPct val="104000"/>
               </a:lnSpc>
               <a:spcBef>
                 <a:spcPts val="0"/>
               </a:spcBef>
               <a:spcAft>
-                <a:spcPts val="1200"/>
+                <a:spcPts val="700"/>
               </a:spcAft>
-              <a:buClr>
-                <a:srgbClr val="F9770B"/>
-              </a:buClr>
-              <a:buFont typeface="Arial"/>
+              <a:buFont typeface="Arial" pitchFamily="34" charset="0"/>
               <a:buChar char="•"/>
             </a:pPr>
             <a:r>
-              <a:rPr sz="2000">
-                <a:solidFill>
-                  <a:srgbClr val="262626"/>
-                </a:solidFill>
+              <a:rPr sz="2500">
                 <a:latin typeface="TT Hoves"/>
               </a:rPr>
               <a:t>It </a:t>
             </a:r>
             <a:r>
-              <a:rPr sz="2000" i="1">
-                <a:solidFill>
-                  <a:srgbClr val="262626"/>
-                </a:solidFill>
+              <a:rPr sz="2500" i="1">
                 <a:latin typeface="TT Hoves"/>
               </a:rPr>
               <a:t>always</a:t>
             </a:r>
             <a:r>
-              <a:rPr sz="2000">
-                <a:solidFill>
-                  <a:srgbClr val="262626"/>
-                </a:solidFill>
+              <a:rPr sz="2500">
                 <a:latin typeface="TT Hoves"/>
               </a:rPr>
               <a:t> points from the object straight toward the center of the circle, never along the path itself.</a:t>
             </a:r>
           </a:p>
           <a:p>
-            <a:pPr algn="l" marL="320040" indent="-320040">
+            <a:pPr marL="457200" indent="-457200" algn="l">
               <a:lnSpc>
-                <a:spcPct val="103000"/>
+                <a:spcPct val="104000"/>
               </a:lnSpc>
               <a:spcBef>
                 <a:spcPts val="0"/>
               </a:spcBef>
               <a:spcAft>
-                <a:spcPts val="1200"/>
+                <a:spcPts val="700"/>
               </a:spcAft>
-              <a:buClr>
-                <a:srgbClr val="F9770B"/>
-              </a:buClr>
-              <a:buFont typeface="Arial"/>
+              <a:buFont typeface="Arial" pitchFamily="34" charset="0"/>
               <a:buChar char="•"/>
             </a:pPr>
             <a:r>
-              <a:rPr sz="2000">
-                <a:solidFill>
-                  <a:srgbClr val="262626"/>
-                </a:solidFill>
+              <a:rPr sz="2500">
                 <a:latin typeface="TT Hoves"/>
               </a:rPr>
               <a:t>Bigger speed </a:t>
             </a:r>
             <a:r>
-              <a:rPr sz="2000" i="1">
-                <a:solidFill>
-                  <a:srgbClr val="262626"/>
-                </a:solidFill>
+              <a:rPr sz="2500" i="1">
                 <a:latin typeface="TT Hoves"/>
               </a:rPr>
               <a:t>or</a:t>
             </a:r>
             <a:r>
-              <a:rPr sz="2000">
-                <a:solidFill>
-                  <a:srgbClr val="262626"/>
-                </a:solidFill>
+              <a:rPr sz="2500">
                 <a:latin typeface="TT Hoves"/>
               </a:rPr>
               <a:t> smaller radius → bigger acceleration. That relationship is the entire foundation of today's upcoming investigation.</a:t>
@@ -17799,8 +16103,8 @@
         </p:nvSpPr>
         <p:spPr>
           <a:xfrm>
-            <a:off x="694944" y="420624"/>
-            <a:ext cx="10789920" cy="1024128"/>
+            <a:off x="699400" y="619760"/>
+            <a:ext cx="11441800" cy="830997"/>
           </a:xfrm>
           <a:prstGeom prst="rect">
             <a:avLst/>
@@ -17814,11 +16118,25 @@
           <a:lstStyle/>
           <a:p>
             <a:r>
-              <a:rPr sz="3000" b="1">
-                <a:solidFill>
-                  <a:srgbClr val="1A1A1A"/>
-                </a:solidFill>
-                <a:latin typeface="TT Hoves ExtraBold"/>
+              <a:rPr lang="en-PH" sz="3300" dirty="0">
+                <a:gradFill flip="none" rotWithShape="1">
+                  <a:gsLst>
+                    <a:gs pos="0">
+                      <a:srgbClr val="B45404"/>
+                    </a:gs>
+                    <a:gs pos="50000">
+                      <a:srgbClr val="E86C06"/>
+                    </a:gs>
+                    <a:gs pos="100000">
+                      <a:srgbClr val="F9770B"/>
+                    </a:gs>
+                  </a:gsLst>
+                  <a:path path="circle">
+                    <a:fillToRect l="50000" t="50000" r="50000" b="50000"/>
+                  </a:path>
+                  <a:tileRect/>
+                </a:gradFill>
+                <a:latin typeface="TT Hoves ExtraBold" panose="02000903040000020004" pitchFamily="50" charset="0"/>
               </a:rPr>
               <a:t>Measuring the Motion — Period and Speed</a:t>
             </a:r>
@@ -17956,153 +16274,20 @@
       </p:sp>
       <p:sp>
         <p:nvSpPr>
-          <p:cNvPr id="13" name="Rectangle 12"/>
-          <p:cNvSpPr/>
+          <p:cNvPr id="9" name="TextBox 8">
+            <a:extLst>
+              <a:ext uri="{FF2B5EF4-FFF2-40B4-BE49-F238E27FC236}">
+                <a16:creationId xmlns:a16="http://schemas.microsoft.com/office/drawing/2014/main" id="{73C00714-0F36-6BC8-C038-4D7F36CEB239}"/>
+              </a:ext>
+            </a:extLst>
+          </p:cNvPr>
+          <p:cNvSpPr txBox="1"/>
           <p:nvPr/>
         </p:nvSpPr>
         <p:spPr>
           <a:xfrm>
-            <a:off x="713232" y="1481328"/>
-            <a:ext cx="960120" cy="68580"/>
-          </a:xfrm>
-          <a:prstGeom prst="rect">
-            <a:avLst/>
-          </a:prstGeom>
-          <a:solidFill>
-            <a:srgbClr val="F9770B"/>
-          </a:solidFill>
-          <a:ln>
-            <a:noFill/>
-          </a:ln>
-          <a:effectLst/>
-        </p:spPr>
-        <p:style>
-          <a:lnRef idx="1">
-            <a:schemeClr val="accent1"/>
-          </a:lnRef>
-          <a:fillRef idx="3">
-            <a:schemeClr val="accent1"/>
-          </a:fillRef>
-          <a:effectRef idx="2">
-            <a:schemeClr val="accent1"/>
-          </a:effectRef>
-          <a:fontRef idx="minor">
-            <a:schemeClr val="lt1"/>
-          </a:fontRef>
-        </p:style>
-        <p:txBody>
-          <a:bodyPr rtlCol="0" anchor="ctr"/>
-          <a:lstStyle/>
-          <a:p>
-            <a:pPr algn="ctr"/>
-          </a:p>
-        </p:txBody>
-      </p:sp>
-      <p:sp>
-        <p:nvSpPr>
-          <p:cNvPr id="14" name="Rounded Rectangle 13"/>
-          <p:cNvSpPr/>
-          <p:nvPr/>
-        </p:nvSpPr>
-        <p:spPr>
-          <a:xfrm>
-            <a:off x="3529584" y="1828800"/>
-            <a:ext cx="5120640" cy="1069848"/>
-          </a:xfrm>
-          <a:prstGeom prst="roundRect">
-            <a:avLst>
-              <a:gd name="adj" fmla="val 10000"/>
-            </a:avLst>
-          </a:prstGeom>
-          <a:solidFill>
-            <a:srgbClr val="FDF1E6"/>
-          </a:solidFill>
-          <a:ln w="15875">
-            <a:solidFill>
-              <a:srgbClr val="F9770B"/>
-            </a:solidFill>
-          </a:ln>
-          <a:effectLst/>
-        </p:spPr>
-        <p:style>
-          <a:lnRef idx="1">
-            <a:schemeClr val="accent1"/>
-          </a:lnRef>
-          <a:fillRef idx="3">
-            <a:schemeClr val="accent1"/>
-          </a:fillRef>
-          <a:effectRef idx="2">
-            <a:schemeClr val="accent1"/>
-          </a:effectRef>
-          <a:fontRef idx="minor">
-            <a:schemeClr val="lt1"/>
-          </a:fontRef>
-        </p:style>
-        <p:txBody>
-          <a:bodyPr rtlCol="0" anchor="ctr" wrap="square" tIns="50800" bIns="50800"/>
-          <a:lstStyle/>
-          <a:p>
-            <a:pPr algn="ctr">
-              <a:buNone/>
-            </a:pPr>
-            <a:r>
-              <a:rPr sz="2700" i="1">
-                <a:solidFill>
-                  <a:srgbClr val="C85A00"/>
-                </a:solidFill>
-                <a:latin typeface="TT Hoves"/>
-              </a:rPr>
-              <a:t>T</a:t>
-            </a:r>
-            <a:r>
-              <a:rPr sz="2700">
-                <a:solidFill>
-                  <a:srgbClr val="C85A00"/>
-                </a:solidFill>
-                <a:latin typeface="TT Hoves"/>
-              </a:rPr>
-              <a:t>  =  2π</a:t>
-            </a:r>
-            <a:r>
-              <a:rPr sz="2700" i="1">
-                <a:solidFill>
-                  <a:srgbClr val="C85A00"/>
-                </a:solidFill>
-                <a:latin typeface="TT Hoves"/>
-              </a:rPr>
-              <a:t>r</a:t>
-            </a:r>
-            <a:r>
-              <a:rPr sz="2700">
-                <a:solidFill>
-                  <a:srgbClr val="C85A00"/>
-                </a:solidFill>
-                <a:latin typeface="TT Hoves"/>
-              </a:rPr>
-              <a:t>  /  </a:t>
-            </a:r>
-            <a:r>
-              <a:rPr sz="2700" i="1">
-                <a:solidFill>
-                  <a:srgbClr val="C85A00"/>
-                </a:solidFill>
-                <a:latin typeface="TT Hoves"/>
-              </a:rPr>
-              <a:t>v</a:t>
-            </a:r>
-          </a:p>
-        </p:txBody>
-      </p:sp>
-      <p:sp>
-        <p:nvSpPr>
-          <p:cNvPr id="15" name="TextBox 14"/>
-          <p:cNvSpPr txBox="1"/>
-          <p:nvPr/>
-        </p:nvSpPr>
-        <p:spPr>
-          <a:xfrm>
-            <a:off x="694944" y="3063240"/>
-            <a:ext cx="10789920" cy="2926080"/>
+            <a:off x="699058" y="1536192"/>
+            <a:ext cx="10671048" cy="4270248"/>
           </a:xfrm>
           <a:prstGeom prst="rect">
             <a:avLst/>
@@ -18110,194 +16295,184 @@
           <a:noFill/>
         </p:spPr>
         <p:txBody>
-          <a:bodyPr wrap="square" anchor="t">
-            <a:spAutoFit/>
+          <a:bodyPr wrap="square" rtlCol="0">
+            <a:noAutofit/>
           </a:bodyPr>
           <a:lstStyle/>
           <a:p>
-            <a:pPr algn="l" marL="320040" indent="-320040">
+            <a:pPr algn="ctr">
               <a:lnSpc>
-                <a:spcPct val="103000"/>
+                <a:spcPct val="104000"/>
+              </a:lnSpc>
+              <a:spcBef>
+                <a:spcPts val="400"/>
+              </a:spcBef>
+              <a:spcAft>
+                <a:spcPts val="700"/>
+              </a:spcAft>
+              <a:buNone/>
+            </a:pPr>
+            <a:r>
+              <a:rPr sz="2400" b="1" i="1">
+                <a:latin typeface="TT Hoves"/>
+              </a:rPr>
+              <a:t>T</a:t>
+            </a:r>
+            <a:r>
+              <a:rPr sz="2400" b="1">
+                <a:latin typeface="TT Hoves"/>
+              </a:rPr>
+              <a:t> = 2π</a:t>
+            </a:r>
+            <a:r>
+              <a:rPr sz="2400" b="1" i="1">
+                <a:latin typeface="TT Hoves"/>
+              </a:rPr>
+              <a:t>r</a:t>
+            </a:r>
+            <a:r>
+              <a:rPr sz="2400" b="1">
+                <a:latin typeface="TT Hoves"/>
+              </a:rPr>
+              <a:t>  /  </a:t>
+            </a:r>
+            <a:r>
+              <a:rPr sz="2400" b="1" i="1">
+                <a:latin typeface="TT Hoves"/>
+              </a:rPr>
+              <a:t>v</a:t>
+            </a:r>
+          </a:p>
+          <a:p>
+            <a:pPr marL="457200" indent="-457200" algn="l">
+              <a:lnSpc>
+                <a:spcPct val="104000"/>
               </a:lnSpc>
               <a:spcBef>
                 <a:spcPts val="0"/>
               </a:spcBef>
               <a:spcAft>
-                <a:spcPts val="1200"/>
+                <a:spcPts val="700"/>
               </a:spcAft>
-              <a:buClr>
-                <a:srgbClr val="F9770B"/>
-              </a:buClr>
-              <a:buFont typeface="Arial"/>
+              <a:buFont typeface="Arial" pitchFamily="34" charset="0"/>
               <a:buChar char="•"/>
             </a:pPr>
             <a:r>
-              <a:rPr sz="2000">
-                <a:solidFill>
-                  <a:srgbClr val="262626"/>
-                </a:solidFill>
+              <a:rPr sz="2200">
                 <a:latin typeface="TT Hoves"/>
               </a:rPr>
               <a:t>The </a:t>
             </a:r>
             <a:r>
-              <a:rPr sz="2000" b="1" i="1">
-                <a:solidFill>
-                  <a:srgbClr val="262626"/>
-                </a:solidFill>
+              <a:rPr sz="2200" b="1" i="1">
                 <a:latin typeface="TT Hoves"/>
               </a:rPr>
               <a:t>period</a:t>
             </a:r>
             <a:r>
-              <a:rPr sz="2000">
-                <a:solidFill>
-                  <a:srgbClr val="262626"/>
-                </a:solidFill>
+              <a:rPr sz="2200">
                 <a:latin typeface="TT Hoves"/>
               </a:rPr>
               <a:t> </a:t>
             </a:r>
             <a:r>
-              <a:rPr sz="2000" i="1">
-                <a:solidFill>
-                  <a:srgbClr val="262626"/>
-                </a:solidFill>
+              <a:rPr sz="2200" i="1">
                 <a:latin typeface="TT Hoves"/>
               </a:rPr>
               <a:t>T</a:t>
             </a:r>
             <a:r>
-              <a:rPr sz="2000">
-                <a:solidFill>
-                  <a:srgbClr val="262626"/>
-                </a:solidFill>
+              <a:rPr sz="2200">
                 <a:latin typeface="TT Hoves"/>
               </a:rPr>
               <a:t> is simply the time for </a:t>
             </a:r>
             <a:r>
-              <a:rPr sz="2000" i="1">
-                <a:solidFill>
-                  <a:srgbClr val="262626"/>
-                </a:solidFill>
+              <a:rPr sz="2200" i="1">
                 <a:latin typeface="TT Hoves"/>
               </a:rPr>
               <a:t>one full lap</a:t>
             </a:r>
             <a:r>
-              <a:rPr sz="2000">
-                <a:solidFill>
-                  <a:srgbClr val="262626"/>
-                </a:solidFill>
+              <a:rPr sz="2200">
                 <a:latin typeface="TT Hoves"/>
               </a:rPr>
               <a:t> around the circle.</a:t>
             </a:r>
           </a:p>
           <a:p>
-            <a:pPr algn="l" marL="320040" indent="-320040">
+            <a:pPr marL="457200" indent="-457200" algn="l">
               <a:lnSpc>
-                <a:spcPct val="103000"/>
+                <a:spcPct val="104000"/>
               </a:lnSpc>
               <a:spcBef>
                 <a:spcPts val="0"/>
               </a:spcBef>
               <a:spcAft>
-                <a:spcPts val="1200"/>
+                <a:spcPts val="700"/>
               </a:spcAft>
-              <a:buClr>
-                <a:srgbClr val="F9770B"/>
-              </a:buClr>
-              <a:buFont typeface="Arial"/>
+              <a:buFont typeface="Arial" pitchFamily="34" charset="0"/>
               <a:buChar char="•"/>
             </a:pPr>
             <a:r>
-              <a:rPr sz="2000">
-                <a:solidFill>
-                  <a:srgbClr val="262626"/>
-                </a:solidFill>
+              <a:rPr sz="2200">
                 <a:latin typeface="TT Hoves"/>
               </a:rPr>
               <a:t>Useful because </a:t>
             </a:r>
             <a:r>
-              <a:rPr sz="2000" i="1">
-                <a:solidFill>
-                  <a:srgbClr val="262626"/>
-                </a:solidFill>
+              <a:rPr sz="2200" i="1">
                 <a:latin typeface="TT Hoves"/>
               </a:rPr>
               <a:t>T</a:t>
             </a:r>
             <a:r>
-              <a:rPr sz="2000">
-                <a:solidFill>
-                  <a:srgbClr val="262626"/>
-                </a:solidFill>
+              <a:rPr sz="2200">
                 <a:latin typeface="TT Hoves"/>
               </a:rPr>
               <a:t> is often the number you actually </a:t>
             </a:r>
             <a:r>
-              <a:rPr sz="2000" i="1">
-                <a:solidFill>
-                  <a:srgbClr val="262626"/>
-                </a:solidFill>
+              <a:rPr sz="2200" i="1">
                 <a:latin typeface="TT Hoves"/>
               </a:rPr>
               <a:t>know</a:t>
             </a:r>
             <a:r>
-              <a:rPr sz="2000">
-                <a:solidFill>
-                  <a:srgbClr val="262626"/>
-                </a:solidFill>
+              <a:rPr sz="2200">
                 <a:latin typeface="TT Hoves"/>
               </a:rPr>
               <a:t> in real life — a satellite's orbital period, a wheel's rotations per minute, a Ferris wheel's ride time — while </a:t>
             </a:r>
             <a:r>
-              <a:rPr sz="2000" i="1">
-                <a:solidFill>
-                  <a:srgbClr val="262626"/>
-                </a:solidFill>
+              <a:rPr sz="2200" i="1">
                 <a:latin typeface="TT Hoves"/>
               </a:rPr>
               <a:t>v</a:t>
             </a:r>
             <a:r>
-              <a:rPr sz="2000">
-                <a:solidFill>
-                  <a:srgbClr val="262626"/>
-                </a:solidFill>
+              <a:rPr sz="2200">
                 <a:latin typeface="TT Hoves"/>
               </a:rPr>
               <a:t> is usually the harder number to measure directly.</a:t>
             </a:r>
           </a:p>
           <a:p>
-            <a:pPr algn="l" marL="320040" indent="-320040">
+            <a:pPr marL="457200" indent="-457200" algn="l">
               <a:lnSpc>
-                <a:spcPct val="103000"/>
+                <a:spcPct val="104000"/>
               </a:lnSpc>
               <a:spcBef>
                 <a:spcPts val="0"/>
               </a:spcBef>
               <a:spcAft>
-                <a:spcPts val="1200"/>
+                <a:spcPts val="700"/>
               </a:spcAft>
-              <a:buClr>
-                <a:srgbClr val="F9770B"/>
-              </a:buClr>
-              <a:buFont typeface="Arial"/>
+              <a:buFont typeface="Arial" pitchFamily="34" charset="0"/>
               <a:buChar char="•"/>
             </a:pPr>
             <a:r>
-              <a:rPr sz="2000">
-                <a:solidFill>
-                  <a:srgbClr val="262626"/>
-                </a:solidFill>
+              <a:rPr sz="2200">
                 <a:latin typeface="TT Hoves"/>
               </a:rPr>
               <a:t>This equation is really just "distance = speed × time," rearranged, applied to the circle's circumference.</a:t>
@@ -18556,8 +16731,8 @@
         </p:nvSpPr>
         <p:spPr>
           <a:xfrm>
-            <a:off x="694944" y="420624"/>
-            <a:ext cx="10789920" cy="1024128"/>
+            <a:off x="699400" y="619760"/>
+            <a:ext cx="11441800" cy="830997"/>
           </a:xfrm>
           <a:prstGeom prst="rect">
             <a:avLst/>
@@ -18571,11 +16746,25 @@
           <a:lstStyle/>
           <a:p>
             <a:r>
-              <a:rPr sz="3000" b="1">
-                <a:solidFill>
-                  <a:srgbClr val="1A1A1A"/>
-                </a:solidFill>
-                <a:latin typeface="TT Hoves ExtraBold"/>
+              <a:rPr lang="en-PH" sz="2800" dirty="0">
+                <a:gradFill flip="none" rotWithShape="1">
+                  <a:gsLst>
+                    <a:gs pos="0">
+                      <a:srgbClr val="B45404"/>
+                    </a:gs>
+                    <a:gs pos="50000">
+                      <a:srgbClr val="E86C06"/>
+                    </a:gs>
+                    <a:gs pos="100000">
+                      <a:srgbClr val="F9770B"/>
+                    </a:gs>
+                  </a:gsLst>
+                  <a:path path="circle">
+                    <a:fillToRect l="50000" t="50000" r="50000" b="50000"/>
+                  </a:path>
+                  <a:tileRect/>
+                </a:gradFill>
+                <a:latin typeface="TT Hoves ExtraBold" panose="02000903040000020004" pitchFamily="50" charset="0"/>
               </a:rPr>
               <a:t>Centripetal Force — The Push Toward the Center</a:t>
             </a:r>
@@ -18713,180 +16902,20 @@
       </p:sp>
       <p:sp>
         <p:nvSpPr>
-          <p:cNvPr id="13" name="Rectangle 12"/>
-          <p:cNvSpPr/>
+          <p:cNvPr id="9" name="TextBox 8">
+            <a:extLst>
+              <a:ext uri="{FF2B5EF4-FFF2-40B4-BE49-F238E27FC236}">
+                <a16:creationId xmlns:a16="http://schemas.microsoft.com/office/drawing/2014/main" id="{73C00714-0F36-6BC8-C038-4D7F36CEB239}"/>
+              </a:ext>
+            </a:extLst>
+          </p:cNvPr>
+          <p:cNvSpPr txBox="1"/>
           <p:nvPr/>
         </p:nvSpPr>
         <p:spPr>
           <a:xfrm>
-            <a:off x="713232" y="1481328"/>
-            <a:ext cx="960120" cy="68580"/>
-          </a:xfrm>
-          <a:prstGeom prst="rect">
-            <a:avLst/>
-          </a:prstGeom>
-          <a:solidFill>
-            <a:srgbClr val="F9770B"/>
-          </a:solidFill>
-          <a:ln>
-            <a:noFill/>
-          </a:ln>
-          <a:effectLst/>
-        </p:spPr>
-        <p:style>
-          <a:lnRef idx="1">
-            <a:schemeClr val="accent1"/>
-          </a:lnRef>
-          <a:fillRef idx="3">
-            <a:schemeClr val="accent1"/>
-          </a:fillRef>
-          <a:effectRef idx="2">
-            <a:schemeClr val="accent1"/>
-          </a:effectRef>
-          <a:fontRef idx="minor">
-            <a:schemeClr val="lt1"/>
-          </a:fontRef>
-        </p:style>
-        <p:txBody>
-          <a:bodyPr rtlCol="0" anchor="ctr"/>
-          <a:lstStyle/>
-          <a:p>
-            <a:pPr algn="ctr"/>
-          </a:p>
-        </p:txBody>
-      </p:sp>
-      <p:sp>
-        <p:nvSpPr>
-          <p:cNvPr id="14" name="Rounded Rectangle 13"/>
-          <p:cNvSpPr/>
-          <p:nvPr/>
-        </p:nvSpPr>
-        <p:spPr>
-          <a:xfrm>
-            <a:off x="3346704" y="1828800"/>
-            <a:ext cx="5486400" cy="1069848"/>
-          </a:xfrm>
-          <a:prstGeom prst="roundRect">
-            <a:avLst>
-              <a:gd name="adj" fmla="val 10000"/>
-            </a:avLst>
-          </a:prstGeom>
-          <a:solidFill>
-            <a:srgbClr val="FDF1E6"/>
-          </a:solidFill>
-          <a:ln w="15875">
-            <a:solidFill>
-              <a:srgbClr val="F9770B"/>
-            </a:solidFill>
-          </a:ln>
-          <a:effectLst/>
-        </p:spPr>
-        <p:style>
-          <a:lnRef idx="1">
-            <a:schemeClr val="accent1"/>
-          </a:lnRef>
-          <a:fillRef idx="3">
-            <a:schemeClr val="accent1"/>
-          </a:fillRef>
-          <a:effectRef idx="2">
-            <a:schemeClr val="accent1"/>
-          </a:effectRef>
-          <a:fontRef idx="minor">
-            <a:schemeClr val="lt1"/>
-          </a:fontRef>
-        </p:style>
-        <p:txBody>
-          <a:bodyPr rtlCol="0" anchor="ctr" wrap="square" tIns="50800" bIns="50800"/>
-          <a:lstStyle/>
-          <a:p>
-            <a:pPr algn="ctr">
-              <a:buNone/>
-            </a:pPr>
-            <a:r>
-              <a:rPr sz="2700" i="1">
-                <a:solidFill>
-                  <a:srgbClr val="C85A00"/>
-                </a:solidFill>
-                <a:latin typeface="TT Hoves"/>
-              </a:rPr>
-              <a:t>F</a:t>
-            </a:r>
-            <a:r>
-              <a:rPr sz="2484" baseline="-25000">
-                <a:solidFill>
-                  <a:srgbClr val="C85A00"/>
-                </a:solidFill>
-                <a:latin typeface="TT Hoves"/>
-              </a:rPr>
-              <a:t>c</a:t>
-            </a:r>
-            <a:r>
-              <a:rPr sz="2700">
-                <a:solidFill>
-                  <a:srgbClr val="C85A00"/>
-                </a:solidFill>
-                <a:latin typeface="TT Hoves"/>
-              </a:rPr>
-              <a:t>  =  </a:t>
-            </a:r>
-            <a:r>
-              <a:rPr sz="2700" i="1">
-                <a:solidFill>
-                  <a:srgbClr val="C85A00"/>
-                </a:solidFill>
-                <a:latin typeface="TT Hoves"/>
-              </a:rPr>
-              <a:t>m</a:t>
-            </a:r>
-            <a:r>
-              <a:rPr sz="2700" i="1">
-                <a:solidFill>
-                  <a:srgbClr val="C85A00"/>
-                </a:solidFill>
-                <a:latin typeface="TT Hoves"/>
-              </a:rPr>
-              <a:t>v</a:t>
-            </a:r>
-            <a:r>
-              <a:rPr sz="2484" baseline="30000">
-                <a:solidFill>
-                  <a:srgbClr val="C85A00"/>
-                </a:solidFill>
-                <a:latin typeface="TT Hoves"/>
-              </a:rPr>
-              <a:t>2</a:t>
-            </a:r>
-            <a:r>
-              <a:rPr sz="2700">
-                <a:solidFill>
-                  <a:srgbClr val="C85A00"/>
-                </a:solidFill>
-                <a:latin typeface="TT Hoves"/>
-              </a:rPr>
-              <a:t>  /  </a:t>
-            </a:r>
-            <a:r>
-              <a:rPr sz="2700" i="1">
-                <a:solidFill>
-                  <a:srgbClr val="C85A00"/>
-                </a:solidFill>
-                <a:latin typeface="TT Hoves"/>
-              </a:rPr>
-              <a:t>r</a:t>
-            </a:r>
-          </a:p>
-        </p:txBody>
-      </p:sp>
-      <p:sp>
-        <p:nvSpPr>
-          <p:cNvPr id="15" name="TextBox 14"/>
-          <p:cNvSpPr txBox="1"/>
-          <p:nvPr/>
-        </p:nvSpPr>
-        <p:spPr>
-          <a:xfrm>
-            <a:off x="694944" y="3063240"/>
-            <a:ext cx="10789920" cy="2926080"/>
+            <a:off x="699058" y="1536192"/>
+            <a:ext cx="10671048" cy="4270248"/>
           </a:xfrm>
           <a:prstGeom prst="rect">
             <a:avLst/>
@@ -18894,179 +16923,193 @@
           <a:noFill/>
         </p:spPr>
         <p:txBody>
-          <a:bodyPr wrap="square" anchor="t">
-            <a:spAutoFit/>
+          <a:bodyPr wrap="square" rtlCol="0">
+            <a:noAutofit/>
           </a:bodyPr>
           <a:lstStyle/>
           <a:p>
-            <a:pPr algn="l" marL="320040" indent="-320040">
+            <a:pPr algn="ctr">
               <a:lnSpc>
-                <a:spcPct val="103000"/>
+                <a:spcPct val="104000"/>
+              </a:lnSpc>
+              <a:spcBef>
+                <a:spcPts val="400"/>
+              </a:spcBef>
+              <a:spcAft>
+                <a:spcPts val="700"/>
+              </a:spcAft>
+              <a:buNone/>
+            </a:pPr>
+            <a:r>
+              <a:rPr sz="2300" b="1" i="1">
+                <a:latin typeface="TT Hoves"/>
+              </a:rPr>
+              <a:t>F</a:t>
+            </a:r>
+            <a:r>
+              <a:rPr sz="2116" baseline="-25000">
+                <a:latin typeface="TT Hoves"/>
+              </a:rPr>
+              <a:t>c</a:t>
+            </a:r>
+            <a:r>
+              <a:rPr sz="2300" b="1">
+                <a:latin typeface="TT Hoves"/>
+              </a:rPr>
+              <a:t> = </a:t>
+            </a:r>
+            <a:r>
+              <a:rPr sz="2300" b="1" i="1">
+                <a:latin typeface="TT Hoves"/>
+              </a:rPr>
+              <a:t>m</a:t>
+            </a:r>
+            <a:r>
+              <a:rPr sz="2300" b="1" i="1">
+                <a:latin typeface="TT Hoves"/>
+              </a:rPr>
+              <a:t>v</a:t>
+            </a:r>
+            <a:r>
+              <a:rPr sz="2116" baseline="30000">
+                <a:latin typeface="TT Hoves"/>
+              </a:rPr>
+              <a:t>2</a:t>
+            </a:r>
+            <a:r>
+              <a:rPr sz="2300" b="1">
+                <a:latin typeface="TT Hoves"/>
+              </a:rPr>
+              <a:t>  /  </a:t>
+            </a:r>
+            <a:r>
+              <a:rPr sz="2300" b="1" i="1">
+                <a:latin typeface="TT Hoves"/>
+              </a:rPr>
+              <a:t>r</a:t>
+            </a:r>
+          </a:p>
+          <a:p>
+            <a:pPr marL="457200" indent="-457200" algn="l">
+              <a:lnSpc>
+                <a:spcPct val="104000"/>
               </a:lnSpc>
               <a:spcBef>
                 <a:spcPts val="0"/>
               </a:spcBef>
               <a:spcAft>
-                <a:spcPts val="800"/>
+                <a:spcPts val="700"/>
               </a:spcAft>
-              <a:buClr>
-                <a:srgbClr val="F9770B"/>
-              </a:buClr>
-              <a:buFont typeface="Arial"/>
+              <a:buFont typeface="Arial" pitchFamily="34" charset="0"/>
               <a:buChar char="•"/>
             </a:pPr>
             <a:r>
-              <a:rPr sz="1800">
-                <a:solidFill>
-                  <a:srgbClr val="262626"/>
-                </a:solidFill>
+              <a:rPr sz="2100">
                 <a:latin typeface="TT Hoves"/>
               </a:rPr>
               <a:t>Acceleration doesn't happen on its own — something has to </a:t>
             </a:r>
             <a:r>
-              <a:rPr sz="1800" i="1">
-                <a:solidFill>
-                  <a:srgbClr val="262626"/>
-                </a:solidFill>
+              <a:rPr sz="2100" i="1">
                 <a:latin typeface="TT Hoves"/>
               </a:rPr>
               <a:t>cause</a:t>
             </a:r>
             <a:r>
-              <a:rPr sz="1800">
-                <a:solidFill>
-                  <a:srgbClr val="262626"/>
-                </a:solidFill>
+              <a:rPr sz="2100">
                 <a:latin typeface="TT Hoves"/>
               </a:rPr>
               <a:t> it. For circular motion, that cause is the </a:t>
             </a:r>
             <a:r>
-              <a:rPr sz="1800" b="1" i="1">
-                <a:solidFill>
-                  <a:srgbClr val="262626"/>
-                </a:solidFill>
+              <a:rPr sz="2100" b="1" i="1">
                 <a:latin typeface="TT Hoves"/>
               </a:rPr>
               <a:t>centripetal force</a:t>
             </a:r>
             <a:r>
-              <a:rPr sz="1800">
-                <a:solidFill>
-                  <a:srgbClr val="262626"/>
-                </a:solidFill>
+              <a:rPr sz="2100">
                 <a:latin typeface="TT Hoves"/>
               </a:rPr>
               <a:t>, always aimed toward the center, same direction as the acceleration it produces.</a:t>
             </a:r>
           </a:p>
           <a:p>
-            <a:pPr algn="l" marL="320040" indent="-320040">
+            <a:pPr marL="457200" indent="-457200" algn="l">
               <a:lnSpc>
-                <a:spcPct val="103000"/>
+                <a:spcPct val="104000"/>
               </a:lnSpc>
               <a:spcBef>
                 <a:spcPts val="0"/>
               </a:spcBef>
               <a:spcAft>
-                <a:spcPts val="800"/>
+                <a:spcPts val="700"/>
               </a:spcAft>
-              <a:buClr>
-                <a:srgbClr val="F9770B"/>
-              </a:buClr>
-              <a:buFont typeface="Arial"/>
+              <a:buFont typeface="Arial" pitchFamily="34" charset="0"/>
               <a:buChar char="•"/>
             </a:pPr>
             <a:r>
-              <a:rPr sz="1800">
-                <a:solidFill>
-                  <a:srgbClr val="262626"/>
-                </a:solidFill>
+              <a:rPr sz="2100">
                 <a:latin typeface="TT Hoves"/>
               </a:rPr>
               <a:t>In real life, that force wears many disguises: </a:t>
             </a:r>
             <a:r>
-              <a:rPr sz="1800" i="1">
-                <a:solidFill>
-                  <a:srgbClr val="262626"/>
-                </a:solidFill>
+              <a:rPr sz="2100" i="1">
                 <a:latin typeface="TT Hoves"/>
               </a:rPr>
               <a:t>tension</a:t>
             </a:r>
             <a:r>
-              <a:rPr sz="1800">
-                <a:solidFill>
-                  <a:srgbClr val="262626"/>
-                </a:solidFill>
+              <a:rPr sz="2100">
                 <a:latin typeface="TT Hoves"/>
               </a:rPr>
               <a:t> in a swung string, </a:t>
             </a:r>
             <a:r>
-              <a:rPr sz="1800" i="1">
-                <a:solidFill>
-                  <a:srgbClr val="262626"/>
-                </a:solidFill>
+              <a:rPr sz="2100" i="1">
                 <a:latin typeface="TT Hoves"/>
               </a:rPr>
               <a:t>friction</a:t>
             </a:r>
             <a:r>
-              <a:rPr sz="1800">
-                <a:solidFill>
-                  <a:srgbClr val="262626"/>
-                </a:solidFill>
+              <a:rPr sz="2100">
                 <a:latin typeface="TT Hoves"/>
               </a:rPr>
               <a:t> between tires and road on a curve, </a:t>
             </a:r>
             <a:r>
-              <a:rPr sz="1800" i="1">
-                <a:solidFill>
-                  <a:srgbClr val="262626"/>
-                </a:solidFill>
+              <a:rPr sz="2100" i="1">
                 <a:latin typeface="TT Hoves"/>
               </a:rPr>
               <a:t>gravity</a:t>
             </a:r>
             <a:r>
-              <a:rPr sz="1800">
-                <a:solidFill>
-                  <a:srgbClr val="262626"/>
-                </a:solidFill>
+              <a:rPr sz="2100">
                 <a:latin typeface="TT Hoves"/>
               </a:rPr>
               <a:t> pulling a satellite inward.</a:t>
             </a:r>
           </a:p>
           <a:p>
-            <a:pPr algn="l" marL="320040" indent="-320040">
+            <a:pPr marL="457200" indent="-457200" algn="l">
               <a:lnSpc>
-                <a:spcPct val="103000"/>
+                <a:spcPct val="104000"/>
               </a:lnSpc>
               <a:spcBef>
                 <a:spcPts val="0"/>
               </a:spcBef>
               <a:spcAft>
-                <a:spcPts val="800"/>
+                <a:spcPts val="700"/>
               </a:spcAft>
-              <a:buClr>
-                <a:srgbClr val="F9770B"/>
-              </a:buClr>
-              <a:buFont typeface="Arial"/>
+              <a:buFont typeface="Arial" pitchFamily="34" charset="0"/>
               <a:buChar char="•"/>
             </a:pPr>
             <a:r>
-              <a:rPr sz="1800">
-                <a:solidFill>
-                  <a:srgbClr val="262626"/>
-                </a:solidFill>
-                <a:latin typeface="TT Hoves"/>
-              </a:rPr>
-              <a:t>This formula is really just Newton's second law (F = ma), applied to the acceleration formula from Slide 18 — a preview of the dynamics work coming on August 4th.</a:t>
+              <a:rPr sz="2100">
+                <a:latin typeface="TT Hoves"/>
+              </a:rPr>
+              <a:t>This formula is really just Newton's second law (F = ma), applied to the acceleration formula — a preview of the dynamics work coming on August 4th.</a:t>
             </a:r>
           </a:p>
         </p:txBody>
@@ -19322,8 +17365,8 @@
         </p:nvSpPr>
         <p:spPr>
           <a:xfrm>
-            <a:off x="694944" y="420624"/>
-            <a:ext cx="10789920" cy="1024128"/>
+            <a:off x="699400" y="619760"/>
+            <a:ext cx="11441800" cy="830997"/>
           </a:xfrm>
           <a:prstGeom prst="rect">
             <a:avLst/>
@@ -19337,11 +17380,25 @@
           <a:lstStyle/>
           <a:p>
             <a:r>
-              <a:rPr sz="3000" b="1">
-                <a:solidFill>
-                  <a:srgbClr val="1A1A1A"/>
-                </a:solidFill>
-                <a:latin typeface="TT Hoves ExtraBold"/>
+              <a:rPr lang="en-PH" sz="3300" dirty="0">
+                <a:gradFill flip="none" rotWithShape="1">
+                  <a:gsLst>
+                    <a:gs pos="0">
+                      <a:srgbClr val="B45404"/>
+                    </a:gs>
+                    <a:gs pos="50000">
+                      <a:srgbClr val="E86C06"/>
+                    </a:gs>
+                    <a:gs pos="100000">
+                      <a:srgbClr val="F9770B"/>
+                    </a:gs>
+                  </a:gsLst>
+                  <a:path path="circle">
+                    <a:fillToRect l="50000" t="50000" r="50000" b="50000"/>
+                  </a:path>
+                  <a:tileRect/>
+                </a:gradFill>
+                <a:latin typeface="TT Hoves ExtraBold" panose="02000903040000020004" pitchFamily="50" charset="0"/>
               </a:rPr>
               <a:t>Heads-Up: A Gap in This Chapter's Problems</a:t>
             </a:r>
@@ -19479,58 +17536,20 @@
       </p:sp>
       <p:sp>
         <p:nvSpPr>
-          <p:cNvPr id="13" name="Rectangle 12"/>
-          <p:cNvSpPr/>
+          <p:cNvPr id="9" name="TextBox 8">
+            <a:extLst>
+              <a:ext uri="{FF2B5EF4-FFF2-40B4-BE49-F238E27FC236}">
+                <a16:creationId xmlns:a16="http://schemas.microsoft.com/office/drawing/2014/main" id="{73C00714-0F36-6BC8-C038-4D7F36CEB239}"/>
+              </a:ext>
+            </a:extLst>
+          </p:cNvPr>
+          <p:cNvSpPr txBox="1"/>
           <p:nvPr/>
         </p:nvSpPr>
         <p:spPr>
           <a:xfrm>
-            <a:off x="713232" y="1481328"/>
-            <a:ext cx="960120" cy="68580"/>
-          </a:xfrm>
-          <a:prstGeom prst="rect">
-            <a:avLst/>
-          </a:prstGeom>
-          <a:solidFill>
-            <a:srgbClr val="F9770B"/>
-          </a:solidFill>
-          <a:ln>
-            <a:noFill/>
-          </a:ln>
-          <a:effectLst/>
-        </p:spPr>
-        <p:style>
-          <a:lnRef idx="1">
-            <a:schemeClr val="accent1"/>
-          </a:lnRef>
-          <a:fillRef idx="3">
-            <a:schemeClr val="accent1"/>
-          </a:fillRef>
-          <a:effectRef idx="2">
-            <a:schemeClr val="accent1"/>
-          </a:effectRef>
-          <a:fontRef idx="minor">
-            <a:schemeClr val="lt1"/>
-          </a:fontRef>
-        </p:style>
-        <p:txBody>
-          <a:bodyPr rtlCol="0" anchor="ctr"/>
-          <a:lstStyle/>
-          <a:p>
-            <a:pPr algn="ctr"/>
-          </a:p>
-        </p:txBody>
-      </p:sp>
-      <p:sp>
-        <p:nvSpPr>
-          <p:cNvPr id="14" name="TextBox 13"/>
-          <p:cNvSpPr txBox="1"/>
-          <p:nvPr/>
-        </p:nvSpPr>
-        <p:spPr>
-          <a:xfrm>
-            <a:off x="694944" y="1691640"/>
-            <a:ext cx="10789920" cy="1828800"/>
+            <a:off x="699058" y="1536192"/>
+            <a:ext cx="10671048" cy="4270248"/>
           </a:xfrm>
           <a:prstGeom prst="rect">
             <a:avLst/>
@@ -19538,269 +17557,138 @@
           <a:noFill/>
         </p:spPr>
         <p:txBody>
-          <a:bodyPr wrap="square" anchor="t">
-            <a:spAutoFit/>
+          <a:bodyPr wrap="square" rtlCol="0">
+            <a:noAutofit/>
           </a:bodyPr>
           <a:lstStyle/>
           <a:p>
-            <a:pPr algn="l" marL="320040" indent="-320040">
+            <a:pPr marL="457200" indent="-457200" algn="l">
               <a:lnSpc>
-                <a:spcPct val="103000"/>
+                <a:spcPct val="104000"/>
               </a:lnSpc>
               <a:spcBef>
                 <a:spcPts val="0"/>
               </a:spcBef>
               <a:spcAft>
-                <a:spcPts val="800"/>
+                <a:spcPts val="700"/>
               </a:spcAft>
-              <a:buClr>
-                <a:srgbClr val="F9770B"/>
-              </a:buClr>
-              <a:buFont typeface="Arial"/>
+              <a:buFont typeface="Arial" pitchFamily="34" charset="0"/>
               <a:buChar char="•"/>
             </a:pPr>
             <a:r>
-              <a:rPr sz="1900">
-                <a:solidFill>
-                  <a:srgbClr val="262626"/>
-                </a:solidFill>
+              <a:rPr sz="2200">
                 <a:latin typeface="TT Hoves"/>
               </a:rPr>
               <a:t>This textbook chapter covers circular motion purely as </a:t>
             </a:r>
             <a:r>
-              <a:rPr sz="1900" b="1" i="1">
-                <a:solidFill>
-                  <a:srgbClr val="262626"/>
-                </a:solidFill>
+              <a:rPr sz="2200" b="1" i="1">
                 <a:latin typeface="TT Hoves"/>
               </a:rPr>
               <a:t>kinematics</a:t>
             </a:r>
             <a:r>
-              <a:rPr sz="1900">
-                <a:solidFill>
-                  <a:srgbClr val="262626"/>
-                </a:solidFill>
+              <a:rPr sz="2200">
                 <a:latin typeface="TT Hoves"/>
               </a:rPr>
               <a:t> — acceleration, period, and speed — because </a:t>
             </a:r>
             <a:r>
-              <a:rPr sz="1900" i="1">
-                <a:solidFill>
-                  <a:srgbClr val="262626"/>
-                </a:solidFill>
+              <a:rPr sz="2200" i="1">
                 <a:latin typeface="TT Hoves"/>
               </a:rPr>
               <a:t>force</a:t>
             </a:r>
             <a:r>
-              <a:rPr sz="1900">
-                <a:solidFill>
-                  <a:srgbClr val="262626"/>
-                </a:solidFill>
+              <a:rPr sz="2200">
                 <a:latin typeface="TT Hoves"/>
               </a:rPr>
               <a:t> isn't formally introduced until the </a:t>
             </a:r>
             <a:r>
-              <a:rPr sz="1900" i="1">
-                <a:solidFill>
-                  <a:srgbClr val="262626"/>
-                </a:solidFill>
+              <a:rPr sz="2200" i="1">
                 <a:latin typeface="TT Hoves"/>
               </a:rPr>
               <a:t>next</a:t>
             </a:r>
             <a:r>
-              <a:rPr sz="1900">
-                <a:solidFill>
-                  <a:srgbClr val="262626"/>
-                </a:solidFill>
+              <a:rPr sz="2200">
                 <a:latin typeface="TT Hoves"/>
               </a:rPr>
               <a:t> chapter (Newton's Laws).</a:t>
             </a:r>
           </a:p>
           <a:p>
-            <a:pPr algn="l" marL="320040" indent="-320040">
+            <a:pPr marL="457200" indent="-457200" algn="l">
               <a:lnSpc>
-                <a:spcPct val="103000"/>
+                <a:spcPct val="104000"/>
               </a:lnSpc>
               <a:spcBef>
                 <a:spcPts val="0"/>
               </a:spcBef>
               <a:spcAft>
-                <a:spcPts val="800"/>
+                <a:spcPts val="700"/>
               </a:spcAft>
-              <a:buClr>
-                <a:srgbClr val="F9770B"/>
-              </a:buClr>
-              <a:buFont typeface="Arial"/>
+              <a:buFont typeface="Arial" pitchFamily="34" charset="0"/>
               <a:buChar char="•"/>
             </a:pPr>
             <a:r>
-              <a:rPr sz="1900">
-                <a:solidFill>
-                  <a:srgbClr val="262626"/>
-                </a:solidFill>
+              <a:rPr sz="2200">
                 <a:latin typeface="TT Hoves"/>
               </a:rPr>
               <a:t>Result: none of this chapter's practice problems ask students to solve for centripetal </a:t>
             </a:r>
             <a:r>
-              <a:rPr sz="1900" i="1">
-                <a:solidFill>
-                  <a:srgbClr val="262626"/>
-                </a:solidFill>
+              <a:rPr sz="2200" i="1">
                 <a:latin typeface="TT Hoves"/>
               </a:rPr>
               <a:t>force</a:t>
             </a:r>
             <a:r>
-              <a:rPr sz="1900">
-                <a:solidFill>
-                  <a:srgbClr val="262626"/>
-                </a:solidFill>
+              <a:rPr sz="2200">
                 <a:latin typeface="TT Hoves"/>
               </a:rPr>
               <a:t> numerically.</a:t>
             </a:r>
           </a:p>
-        </p:txBody>
-      </p:sp>
-      <p:sp>
-        <p:nvSpPr>
-          <p:cNvPr id="15" name="Rounded Rectangle 14"/>
-          <p:cNvSpPr/>
-          <p:nvPr/>
-        </p:nvSpPr>
-        <p:spPr>
-          <a:xfrm>
-            <a:off x="694944" y="3977639"/>
-            <a:ext cx="10789920" cy="1371600"/>
-          </a:xfrm>
-          <a:prstGeom prst="roundRect">
-            <a:avLst>
-              <a:gd name="adj" fmla="val 6000"/>
-            </a:avLst>
-          </a:prstGeom>
-          <a:solidFill>
-            <a:srgbClr val="FBEAD9"/>
-          </a:solidFill>
-          <a:ln>
-            <a:noFill/>
-          </a:ln>
-          <a:effectLst/>
-        </p:spPr>
-        <p:style>
-          <a:lnRef idx="1">
-            <a:schemeClr val="accent1"/>
-          </a:lnRef>
-          <a:fillRef idx="3">
-            <a:schemeClr val="accent1"/>
-          </a:fillRef>
-          <a:effectRef idx="2">
-            <a:schemeClr val="accent1"/>
-          </a:effectRef>
-          <a:fontRef idx="minor">
-            <a:schemeClr val="lt1"/>
-          </a:fontRef>
-        </p:style>
-        <p:txBody>
-          <a:bodyPr rtlCol="0" anchor="ctr" wrap="square" lIns="203200" rIns="152400" tIns="76200" bIns="76200"/>
-          <a:lstStyle/>
-          <a:p>
-            <a:pPr algn="ctr">
+          <a:p>
+            <a:pPr marL="457200" indent="-457200" algn="l">
               <a:lnSpc>
-                <a:spcPct val="103000"/>
+                <a:spcPct val="104000"/>
               </a:lnSpc>
+              <a:spcBef>
+                <a:spcPts val="0"/>
+              </a:spcBef>
               <a:spcAft>
-                <a:spcPts val="400"/>
+                <a:spcPts val="700"/>
               </a:spcAft>
-              <a:buNone/>
+              <a:buFont typeface="Arial" pitchFamily="34" charset="0"/>
+              <a:buChar char="•"/>
             </a:pPr>
             <a:r>
-              <a:rPr sz="1800" b="1">
-                <a:solidFill>
-                  <a:srgbClr val="262626"/>
-                </a:solidFill>
+              <a:rPr sz="2200" b="1">
                 <a:latin typeface="TT Hoves"/>
               </a:rPr>
               <a:t>Workaround:</a:t>
             </a:r>
             <a:r>
-              <a:rPr sz="1800">
-                <a:solidFill>
-                  <a:srgbClr val="262626"/>
-                </a:solidFill>
-                <a:latin typeface="TT Hoves"/>
-              </a:rPr>
-              <a:t> since Fᴄ = mv²/r = m · aᴄ , force and acceleration scale </a:t>
-            </a:r>
-            <a:r>
-              <a:rPr sz="1800" i="1">
-                <a:solidFill>
-                  <a:srgbClr val="262626"/>
-                </a:solidFill>
+              <a:rPr sz="2200">
+                <a:latin typeface="TT Hoves"/>
+              </a:rPr>
+              <a:t> since Fᴄ = m·v²/r = m·aᴄ , force and acceleration scale </a:t>
+            </a:r>
+            <a:r>
+              <a:rPr sz="2200" i="1">
                 <a:latin typeface="TT Hoves"/>
               </a:rPr>
               <a:t>identically</a:t>
             </a:r>
             <a:r>
-              <a:rPr sz="1800">
-                <a:solidFill>
-                  <a:srgbClr val="262626"/>
-                </a:solidFill>
+              <a:rPr sz="2200">
                 <a:latin typeface="TT Hoves"/>
               </a:rPr>
               <a:t> for a fixed mass — every acceleration problem coming up doubles as a force problem in disguise, once mass is added.</a:t>
             </a:r>
-          </a:p>
-        </p:txBody>
-      </p:sp>
-      <p:sp>
-        <p:nvSpPr>
-          <p:cNvPr id="16" name="Rectangle 15"/>
-          <p:cNvSpPr/>
-          <p:nvPr/>
-        </p:nvSpPr>
-        <p:spPr>
-          <a:xfrm>
-            <a:off x="694944" y="3977639"/>
-            <a:ext cx="82296" cy="1371600"/>
-          </a:xfrm>
-          <a:prstGeom prst="rect">
-            <a:avLst/>
-          </a:prstGeom>
-          <a:solidFill>
-            <a:srgbClr val="F9770B"/>
-          </a:solidFill>
-          <a:ln>
-            <a:noFill/>
-          </a:ln>
-          <a:effectLst/>
-        </p:spPr>
-        <p:style>
-          <a:lnRef idx="1">
-            <a:schemeClr val="accent1"/>
-          </a:lnRef>
-          <a:fillRef idx="3">
-            <a:schemeClr val="accent1"/>
-          </a:fillRef>
-          <a:effectRef idx="2">
-            <a:schemeClr val="accent1"/>
-          </a:effectRef>
-          <a:fontRef idx="minor">
-            <a:schemeClr val="lt1"/>
-          </a:fontRef>
-        </p:style>
-        <p:txBody>
-          <a:bodyPr rtlCol="0" anchor="ctr"/>
-          <a:lstStyle/>
-          <a:p>
-            <a:pPr algn="ctr"/>
           </a:p>
         </p:txBody>
       </p:sp>
@@ -20055,8 +17943,8 @@
         </p:nvSpPr>
         <p:spPr>
           <a:xfrm>
-            <a:off x="694944" y="420624"/>
-            <a:ext cx="10789920" cy="1024128"/>
+            <a:off x="699400" y="619760"/>
+            <a:ext cx="11441800" cy="830997"/>
           </a:xfrm>
           <a:prstGeom prst="rect">
             <a:avLst/>
@@ -20070,11 +17958,25 @@
           <a:lstStyle/>
           <a:p>
             <a:r>
-              <a:rPr sz="2500" b="1">
-                <a:solidFill>
-                  <a:srgbClr val="1A1A1A"/>
-                </a:solidFill>
-                <a:latin typeface="TT Hoves ExtraBold"/>
+              <a:rPr lang="en-PH" sz="2500" dirty="0">
+                <a:gradFill flip="none" rotWithShape="1">
+                  <a:gsLst>
+                    <a:gs pos="0">
+                      <a:srgbClr val="B45404"/>
+                    </a:gs>
+                    <a:gs pos="50000">
+                      <a:srgbClr val="E86C06"/>
+                    </a:gs>
+                    <a:gs pos="100000">
+                      <a:srgbClr val="F9770B"/>
+                    </a:gs>
+                  </a:gsLst>
+                  <a:path path="circle">
+                    <a:fillToRect l="50000" t="50000" r="50000" b="50000"/>
+                  </a:path>
+                  <a:tileRect/>
+                </a:gradFill>
+                <a:latin typeface="TT Hoves ExtraBold" panose="02000903040000020004" pitchFamily="50" charset="0"/>
               </a:rPr>
               <a:t>The Investigation Question — What Affects Centripetal Force?</a:t>
             </a:r>
@@ -20212,58 +18114,20 @@
       </p:sp>
       <p:sp>
         <p:nvSpPr>
-          <p:cNvPr id="13" name="Rectangle 12"/>
-          <p:cNvSpPr/>
+          <p:cNvPr id="9" name="TextBox 8">
+            <a:extLst>
+              <a:ext uri="{FF2B5EF4-FFF2-40B4-BE49-F238E27FC236}">
+                <a16:creationId xmlns:a16="http://schemas.microsoft.com/office/drawing/2014/main" id="{73C00714-0F36-6BC8-C038-4D7F36CEB239}"/>
+              </a:ext>
+            </a:extLst>
+          </p:cNvPr>
+          <p:cNvSpPr txBox="1"/>
           <p:nvPr/>
         </p:nvSpPr>
         <p:spPr>
           <a:xfrm>
-            <a:off x="713232" y="1481328"/>
-            <a:ext cx="960120" cy="68580"/>
-          </a:xfrm>
-          <a:prstGeom prst="rect">
-            <a:avLst/>
-          </a:prstGeom>
-          <a:solidFill>
-            <a:srgbClr val="F9770B"/>
-          </a:solidFill>
-          <a:ln>
-            <a:noFill/>
-          </a:ln>
-          <a:effectLst/>
-        </p:spPr>
-        <p:style>
-          <a:lnRef idx="1">
-            <a:schemeClr val="accent1"/>
-          </a:lnRef>
-          <a:fillRef idx="3">
-            <a:schemeClr val="accent1"/>
-          </a:fillRef>
-          <a:effectRef idx="2">
-            <a:schemeClr val="accent1"/>
-          </a:effectRef>
-          <a:fontRef idx="minor">
-            <a:schemeClr val="lt1"/>
-          </a:fontRef>
-        </p:style>
-        <p:txBody>
-          <a:bodyPr rtlCol="0" anchor="ctr"/>
-          <a:lstStyle/>
-          <a:p>
-            <a:pPr algn="ctr"/>
-          </a:p>
-        </p:txBody>
-      </p:sp>
-      <p:sp>
-        <p:nvSpPr>
-          <p:cNvPr id="14" name="TextBox 13"/>
-          <p:cNvSpPr txBox="1"/>
-          <p:nvPr/>
-        </p:nvSpPr>
-        <p:spPr>
-          <a:xfrm>
-            <a:off x="694944" y="1691640"/>
-            <a:ext cx="10789920" cy="1371600"/>
+            <a:off x="699058" y="1536192"/>
+            <a:ext cx="10671048" cy="4270248"/>
           </a:xfrm>
           <a:prstGeom prst="rect">
             <a:avLst/>
@@ -20271,293 +18135,141 @@
           <a:noFill/>
         </p:spPr>
         <p:txBody>
-          <a:bodyPr wrap="square" anchor="t">
-            <a:spAutoFit/>
+          <a:bodyPr wrap="square" rtlCol="0">
+            <a:noAutofit/>
           </a:bodyPr>
           <a:lstStyle/>
           <a:p>
-            <a:pPr algn="l" marL="320040" indent="-320040">
+            <a:pPr marL="457200" indent="-457200" algn="l">
               <a:lnSpc>
-                <a:spcPct val="103000"/>
+                <a:spcPct val="104000"/>
               </a:lnSpc>
               <a:spcBef>
                 <a:spcPts val="0"/>
               </a:spcBef>
               <a:spcAft>
-                <a:spcPts val="800"/>
+                <a:spcPts val="700"/>
               </a:spcAft>
-              <a:buClr>
-                <a:srgbClr val="F9770B"/>
-              </a:buClr>
-              <a:buFont typeface="Arial"/>
+              <a:buFont typeface="Arial" pitchFamily="34" charset="0"/>
               <a:buChar char="•"/>
             </a:pPr>
             <a:r>
-              <a:rPr sz="1800">
-                <a:solidFill>
-                  <a:srgbClr val="262626"/>
-                </a:solidFill>
+              <a:rPr sz="2400">
                 <a:latin typeface="TT Hoves"/>
               </a:rPr>
               <a:t>Today's guiding question, the one students will physically test: </a:t>
             </a:r>
             <a:r>
-              <a:rPr sz="1800" b="1" i="1">
-                <a:solidFill>
-                  <a:srgbClr val="262626"/>
-                </a:solidFill>
+              <a:rPr sz="2400" b="1" i="1">
                 <a:latin typeface="TT Hoves"/>
               </a:rPr>
               <a:t>how do speed and radius affect the centripetal force needed to keep an object moving in a circle?</a:t>
             </a:r>
           </a:p>
           <a:p>
-            <a:pPr algn="l" marL="320040" indent="-320040">
+            <a:pPr marL="457200" indent="-457200" algn="l">
               <a:lnSpc>
-                <a:spcPct val="103000"/>
+                <a:spcPct val="104000"/>
               </a:lnSpc>
               <a:spcBef>
                 <a:spcPts val="0"/>
               </a:spcBef>
               <a:spcAft>
-                <a:spcPts val="800"/>
+                <a:spcPts val="700"/>
               </a:spcAft>
-              <a:buClr>
-                <a:srgbClr val="F9770B"/>
-              </a:buClr>
-              <a:buFont typeface="Arial"/>
+              <a:buFont typeface="Arial" pitchFamily="34" charset="0"/>
               <a:buChar char="•"/>
             </a:pPr>
             <a:r>
-              <a:rPr sz="1800">
-                <a:solidFill>
-                  <a:srgbClr val="262626"/>
-                </a:solidFill>
+              <a:rPr sz="2400">
                 <a:latin typeface="TT Hoves"/>
               </a:rPr>
               <a:t>Before any data collection, the variables need to be sorted:</a:t>
             </a:r>
           </a:p>
-        </p:txBody>
-      </p:sp>
-      <p:graphicFrame>
-        <p:nvGraphicFramePr>
-          <p:cNvPr id="15" name="Table 14"/>
-          <p:cNvGraphicFramePr>
-            <a:graphicFrameLocks noGrp="1"/>
-          </p:cNvGraphicFramePr>
-          <p:nvPr/>
-        </p:nvGraphicFramePr>
-        <p:xfrm>
-          <a:off x="694944" y="3246120"/>
-          <a:ext cx="10789919" cy="2267712"/>
-        </p:xfrm>
-        <a:graphic>
-          <a:graphicData uri="http://schemas.openxmlformats.org/drawingml/2006/table">
-            <a:tbl>
-              <a:tblPr firstRow="1">
-                <a:tableStyleId>{5C22544A-7EE6-4342-B048-85BDC9FD1C3A}</a:tableStyleId>
-              </a:tblPr>
-              <a:tblGrid>
-                <a:gridCol w="3291840"/>
-                <a:gridCol w="7498079"/>
-              </a:tblGrid>
-              <a:tr h="566928">
-                <a:tc>
-                  <a:txBody>
-                    <a:bodyPr wrap="square"/>
-                    <a:lstStyle/>
-                    <a:p>
-                      <a:pPr algn="l"/>
-                      <a:r>
-                        <a:rPr sz="1800" b="1">
-                          <a:solidFill>
-                            <a:srgbClr val="FFFFFF"/>
-                          </a:solidFill>
-                          <a:latin typeface="TT Hoves"/>
-                        </a:rPr>
-                        <a:t>Variable Type</a:t>
-                      </a:r>
-                    </a:p>
-                  </a:txBody>
-                  <a:tcPr marL="114300" marR="114300" marT="63500" marB="63500" anchor="ctr">
-                    <a:solidFill>
-                      <a:srgbClr val="F9770B"/>
-                    </a:solidFill>
-                  </a:tcPr>
-                </a:tc>
-                <a:tc>
-                  <a:txBody>
-                    <a:bodyPr wrap="square"/>
-                    <a:lstStyle/>
-                    <a:p>
-                      <a:pPr algn="l"/>
-                      <a:r>
-                        <a:rPr sz="1800" b="1">
-                          <a:solidFill>
-                            <a:srgbClr val="FFFFFF"/>
-                          </a:solidFill>
-                          <a:latin typeface="TT Hoves"/>
-                        </a:rPr>
-                        <a:t>What It Is</a:t>
-                      </a:r>
-                    </a:p>
-                  </a:txBody>
-                  <a:tcPr marL="114300" marR="114300" marT="63500" marB="63500" anchor="ctr">
-                    <a:solidFill>
-                      <a:srgbClr val="F9770B"/>
-                    </a:solidFill>
-                  </a:tcPr>
-                </a:tc>
-              </a:tr>
-              <a:tr h="566928">
-                <a:tc>
-                  <a:txBody>
-                    <a:bodyPr wrap="square"/>
-                    <a:lstStyle/>
-                    <a:p>
-                      <a:pPr algn="l"/>
-                      <a:r>
-                        <a:rPr sz="1800" b="1">
-                          <a:solidFill>
-                            <a:srgbClr val="C85A00"/>
-                          </a:solidFill>
-                          <a:latin typeface="TT Hoves"/>
-                        </a:rPr>
-                        <a:t>Independent</a:t>
-                      </a:r>
-                    </a:p>
-                  </a:txBody>
-                  <a:tcPr marL="114300" marR="114300" marT="63500" marB="63500" anchor="ctr">
-                    <a:solidFill>
-                      <a:srgbClr val="FFFFFF"/>
-                    </a:solidFill>
-                  </a:tcPr>
-                </a:tc>
-                <a:tc>
-                  <a:txBody>
-                    <a:bodyPr wrap="square"/>
-                    <a:lstStyle/>
-                    <a:p>
-                      <a:pPr algn="l"/>
-                      <a:r>
-                        <a:rPr sz="1800">
-                          <a:solidFill>
-                            <a:srgbClr val="262626"/>
-                          </a:solidFill>
-                          <a:latin typeface="TT Hoves"/>
-                        </a:rPr>
-                        <a:t>speed, radius</a:t>
-                      </a:r>
-                    </a:p>
-                  </a:txBody>
-                  <a:tcPr marL="114300" marR="114300" marT="63500" marB="63500" anchor="ctr">
-                    <a:solidFill>
-                      <a:srgbClr val="FFFFFF"/>
-                    </a:solidFill>
-                  </a:tcPr>
-                </a:tc>
-              </a:tr>
-              <a:tr h="566928">
-                <a:tc>
-                  <a:txBody>
-                    <a:bodyPr wrap="square"/>
-                    <a:lstStyle/>
-                    <a:p>
-                      <a:pPr algn="l"/>
-                      <a:r>
-                        <a:rPr sz="1800" b="1">
-                          <a:solidFill>
-                            <a:srgbClr val="C85A00"/>
-                          </a:solidFill>
-                          <a:latin typeface="TT Hoves"/>
-                        </a:rPr>
-                        <a:t>Dependent</a:t>
-                      </a:r>
-                    </a:p>
-                  </a:txBody>
-                  <a:tcPr marL="114300" marR="114300" marT="63500" marB="63500" anchor="ctr">
-                    <a:solidFill>
-                      <a:srgbClr val="FBF3EC"/>
-                    </a:solidFill>
-                  </a:tcPr>
-                </a:tc>
-                <a:tc>
-                  <a:txBody>
-                    <a:bodyPr wrap="square"/>
-                    <a:lstStyle/>
-                    <a:p>
-                      <a:pPr algn="l"/>
-                      <a:r>
-                        <a:rPr sz="1800">
-                          <a:solidFill>
-                            <a:srgbClr val="262626"/>
-                          </a:solidFill>
-                          <a:latin typeface="TT Hoves"/>
-                        </a:rPr>
-                        <a:t>centripetal force</a:t>
-                      </a:r>
-                    </a:p>
-                  </a:txBody>
-                  <a:tcPr marL="114300" marR="114300" marT="63500" marB="63500" anchor="ctr">
-                    <a:solidFill>
-                      <a:srgbClr val="FBF3EC"/>
-                    </a:solidFill>
-                  </a:tcPr>
-                </a:tc>
-              </a:tr>
-              <a:tr h="566928">
-                <a:tc>
-                  <a:txBody>
-                    <a:bodyPr wrap="square"/>
-                    <a:lstStyle/>
-                    <a:p>
-                      <a:pPr algn="l"/>
-                      <a:r>
-                        <a:rPr sz="1800" b="1">
-                          <a:solidFill>
-                            <a:srgbClr val="C85A00"/>
-                          </a:solidFill>
-                          <a:latin typeface="TT Hoves"/>
-                        </a:rPr>
-                        <a:t>Controlled</a:t>
-                      </a:r>
-                    </a:p>
-                  </a:txBody>
-                  <a:tcPr marL="114300" marR="114300" marT="63500" marB="63500" anchor="ctr">
-                    <a:solidFill>
-                      <a:srgbClr val="FFFFFF"/>
-                    </a:solidFill>
-                  </a:tcPr>
-                </a:tc>
-                <a:tc>
-                  <a:txBody>
-                    <a:bodyPr wrap="square"/>
-                    <a:lstStyle/>
-                    <a:p>
-                      <a:pPr algn="l"/>
-                      <a:r>
-                        <a:rPr sz="1800">
-                          <a:solidFill>
-                            <a:srgbClr val="262626"/>
-                          </a:solidFill>
-                          <a:latin typeface="TT Hoves"/>
-                        </a:rPr>
-                        <a:t>mass of the spinning object</a:t>
-                      </a:r>
-                    </a:p>
-                  </a:txBody>
-                  <a:tcPr marL="114300" marR="114300" marT="63500" marB="63500" anchor="ctr">
-                    <a:solidFill>
-                      <a:srgbClr val="FFFFFF"/>
-                    </a:solidFill>
-                  </a:tcPr>
-                </a:tc>
-              </a:tr>
-            </a:tbl>
-          </a:graphicData>
-        </a:graphic>
-      </p:graphicFrame>
+          <a:p>
+            <a:pPr marL="457200" indent="-457200" algn="l">
+              <a:lnSpc>
+                <a:spcPct val="104000"/>
+              </a:lnSpc>
+              <a:spcBef>
+                <a:spcPts val="0"/>
+              </a:spcBef>
+              <a:spcAft>
+                <a:spcPts val="700"/>
+              </a:spcAft>
+              <a:buFont typeface="Arial" pitchFamily="34" charset="0"/>
+              <a:buChar char="•"/>
+            </a:pPr>
+            <a:r>
+              <a:rPr sz="2400" b="1">
+                <a:latin typeface="TT Hoves"/>
+              </a:rPr>
+              <a:t>Independent variables:</a:t>
+            </a:r>
+            <a:r>
+              <a:rPr sz="2400">
+                <a:latin typeface="TT Hoves"/>
+              </a:rPr>
+              <a:t> speed and radius.</a:t>
+            </a:r>
+          </a:p>
+          <a:p>
+            <a:pPr marL="457200" indent="-457200" algn="l">
+              <a:lnSpc>
+                <a:spcPct val="104000"/>
+              </a:lnSpc>
+              <a:spcBef>
+                <a:spcPts val="0"/>
+              </a:spcBef>
+              <a:spcAft>
+                <a:spcPts val="700"/>
+              </a:spcAft>
+              <a:buFont typeface="Arial" pitchFamily="34" charset="0"/>
+              <a:buChar char="•"/>
+            </a:pPr>
+            <a:r>
+              <a:rPr sz="2400" b="1">
+                <a:latin typeface="TT Hoves"/>
+              </a:rPr>
+              <a:t>Dependent variable:</a:t>
+            </a:r>
+            <a:r>
+              <a:rPr sz="2400">
+                <a:latin typeface="TT Hoves"/>
+              </a:rPr>
+              <a:t> centripetal force.</a:t>
+            </a:r>
+          </a:p>
+          <a:p>
+            <a:pPr marL="457200" indent="-457200" algn="l">
+              <a:lnSpc>
+                <a:spcPct val="104000"/>
+              </a:lnSpc>
+              <a:spcBef>
+                <a:spcPts val="0"/>
+              </a:spcBef>
+              <a:spcAft>
+                <a:spcPts val="700"/>
+              </a:spcAft>
+              <a:buFont typeface="Arial" pitchFamily="34" charset="0"/>
+              <a:buChar char="•"/>
+            </a:pPr>
+            <a:r>
+              <a:rPr sz="2400" b="1">
+                <a:latin typeface="TT Hoves"/>
+              </a:rPr>
+              <a:t>Controlled variable:</a:t>
+            </a:r>
+            <a:r>
+              <a:rPr sz="2400">
+                <a:latin typeface="TT Hoves"/>
+              </a:rPr>
+              <a:t> the mass of the spinning object.</a:t>
+            </a:r>
+          </a:p>
+        </p:txBody>
+      </p:sp>
     </p:spTree>
   </p:cSld>
   <p:clrMapOvr>
@@ -20809,8 +18521,8 @@
         </p:nvSpPr>
         <p:spPr>
           <a:xfrm>
-            <a:off x="694944" y="420624"/>
-            <a:ext cx="10789920" cy="1024128"/>
+            <a:off x="699400" y="619760"/>
+            <a:ext cx="11441800" cy="830997"/>
           </a:xfrm>
           <a:prstGeom prst="rect">
             <a:avLst/>
@@ -20824,11 +18536,25 @@
           <a:lstStyle/>
           <a:p>
             <a:r>
-              <a:rPr sz="3000" b="1">
-                <a:solidFill>
-                  <a:srgbClr val="1A1A1A"/>
-                </a:solidFill>
-                <a:latin typeface="TT Hoves ExtraBold"/>
+              <a:rPr lang="en-PH" sz="3300" dirty="0">
+                <a:gradFill flip="none" rotWithShape="1">
+                  <a:gsLst>
+                    <a:gs pos="0">
+                      <a:srgbClr val="B45404"/>
+                    </a:gs>
+                    <a:gs pos="50000">
+                      <a:srgbClr val="E86C06"/>
+                    </a:gs>
+                    <a:gs pos="100000">
+                      <a:srgbClr val="F9770B"/>
+                    </a:gs>
+                  </a:gsLst>
+                  <a:path path="circle">
+                    <a:fillToRect l="50000" t="50000" r="50000" b="50000"/>
+                  </a:path>
+                  <a:tileRect/>
+                </a:gradFill>
+                <a:latin typeface="TT Hoves ExtraBold" panose="02000903040000020004" pitchFamily="50" charset="0"/>
               </a:rPr>
               <a:t>Apparatus and Setup for the Investigation</a:t>
             </a:r>
@@ -20966,58 +18692,20 @@
       </p:sp>
       <p:sp>
         <p:nvSpPr>
-          <p:cNvPr id="13" name="Rectangle 12"/>
-          <p:cNvSpPr/>
+          <p:cNvPr id="9" name="TextBox 8">
+            <a:extLst>
+              <a:ext uri="{FF2B5EF4-FFF2-40B4-BE49-F238E27FC236}">
+                <a16:creationId xmlns:a16="http://schemas.microsoft.com/office/drawing/2014/main" id="{73C00714-0F36-6BC8-C038-4D7F36CEB239}"/>
+              </a:ext>
+            </a:extLst>
+          </p:cNvPr>
+          <p:cNvSpPr txBox="1"/>
           <p:nvPr/>
         </p:nvSpPr>
         <p:spPr>
           <a:xfrm>
-            <a:off x="713232" y="1481328"/>
-            <a:ext cx="960120" cy="68580"/>
-          </a:xfrm>
-          <a:prstGeom prst="rect">
-            <a:avLst/>
-          </a:prstGeom>
-          <a:solidFill>
-            <a:srgbClr val="F9770B"/>
-          </a:solidFill>
-          <a:ln>
-            <a:noFill/>
-          </a:ln>
-          <a:effectLst/>
-        </p:spPr>
-        <p:style>
-          <a:lnRef idx="1">
-            <a:schemeClr val="accent1"/>
-          </a:lnRef>
-          <a:fillRef idx="3">
-            <a:schemeClr val="accent1"/>
-          </a:fillRef>
-          <a:effectRef idx="2">
-            <a:schemeClr val="accent1"/>
-          </a:effectRef>
-          <a:fontRef idx="minor">
-            <a:schemeClr val="lt1"/>
-          </a:fontRef>
-        </p:style>
-        <p:txBody>
-          <a:bodyPr rtlCol="0" anchor="ctr"/>
-          <a:lstStyle/>
-          <a:p>
-            <a:pPr algn="ctr"/>
-          </a:p>
-        </p:txBody>
-      </p:sp>
-      <p:sp>
-        <p:nvSpPr>
-          <p:cNvPr id="14" name="TextBox 13"/>
-          <p:cNvSpPr txBox="1"/>
-          <p:nvPr/>
-        </p:nvSpPr>
-        <p:spPr>
-          <a:xfrm>
-            <a:off x="694944" y="1691640"/>
-            <a:ext cx="6400800" cy="4206240"/>
+            <a:off x="699058" y="1536192"/>
+            <a:ext cx="10671048" cy="4270248"/>
           </a:xfrm>
           <a:prstGeom prst="rect">
             <a:avLst/>
@@ -21025,104 +18713,80 @@
           <a:noFill/>
         </p:spPr>
         <p:txBody>
-          <a:bodyPr wrap="square" anchor="t">
-            <a:spAutoFit/>
+          <a:bodyPr wrap="square" rtlCol="0">
+            <a:noAutofit/>
           </a:bodyPr>
           <a:lstStyle/>
           <a:p>
-            <a:pPr algn="l" marL="320040" indent="-320040">
+            <a:pPr marL="457200" indent="-457200" algn="l">
               <a:lnSpc>
-                <a:spcPct val="103000"/>
+                <a:spcPct val="104000"/>
               </a:lnSpc>
               <a:spcBef>
                 <a:spcPts val="0"/>
               </a:spcBef>
               <a:spcAft>
-                <a:spcPts val="800"/>
+                <a:spcPts val="700"/>
               </a:spcAft>
-              <a:buClr>
-                <a:srgbClr val="F9770B"/>
-              </a:buClr>
-              <a:buFont typeface="Arial"/>
+              <a:buFont typeface="Arial" pitchFamily="34" charset="0"/>
               <a:buChar char="•"/>
             </a:pPr>
             <a:r>
-              <a:rPr sz="1800">
-                <a:solidFill>
-                  <a:srgbClr val="262626"/>
-                </a:solidFill>
+              <a:rPr sz="2200">
                 <a:latin typeface="TT Hoves"/>
               </a:rPr>
               <a:t>Classic classroom setup: a small stopper (or rubber tube) tied to one end of a string, threaded through a hollow tube, with a set of washers hung from the other end to provide a known, adjustable pulling force.</a:t>
             </a:r>
           </a:p>
           <a:p>
-            <a:pPr algn="l" marL="320040" indent="-320040">
+            <a:pPr marL="457200" indent="-457200" algn="l">
               <a:lnSpc>
-                <a:spcPct val="103000"/>
+                <a:spcPct val="104000"/>
               </a:lnSpc>
               <a:spcBef>
                 <a:spcPts val="0"/>
               </a:spcBef>
               <a:spcAft>
-                <a:spcPts val="800"/>
+                <a:spcPts val="700"/>
               </a:spcAft>
-              <a:buClr>
-                <a:srgbClr val="F9770B"/>
-              </a:buClr>
-              <a:buFont typeface="Arial"/>
+              <a:buFont typeface="Arial" pitchFamily="34" charset="0"/>
               <a:buChar char="•"/>
             </a:pPr>
             <a:r>
-              <a:rPr sz="1800">
-                <a:solidFill>
-                  <a:srgbClr val="262626"/>
-                </a:solidFill>
+              <a:rPr sz="2200">
                 <a:latin typeface="TT Hoves"/>
               </a:rPr>
               <a:t>The stopper is whirled overhead in a horizontal circle; the string length between hand and stopper sets the </a:t>
             </a:r>
             <a:r>
-              <a:rPr sz="1800" i="1">
-                <a:solidFill>
-                  <a:srgbClr val="262626"/>
-                </a:solidFill>
+              <a:rPr sz="2200" i="1">
                 <a:latin typeface="TT Hoves"/>
               </a:rPr>
               <a:t>radius</a:t>
             </a:r>
             <a:r>
-              <a:rPr sz="1800">
-                <a:solidFill>
-                  <a:srgbClr val="262626"/>
-                </a:solidFill>
+              <a:rPr sz="2200">
                 <a:latin typeface="TT Hoves"/>
               </a:rPr>
               <a:t>, and the speed of the whirl is adjusted so the hanging washers stay steady.</a:t>
             </a:r>
           </a:p>
           <a:p>
-            <a:pPr algn="l" marL="320040" indent="-320040">
+            <a:pPr marL="457200" indent="-457200" algn="l">
               <a:lnSpc>
-                <a:spcPct val="103000"/>
+                <a:spcPct val="104000"/>
               </a:lnSpc>
               <a:spcBef>
                 <a:spcPts val="0"/>
               </a:spcBef>
               <a:spcAft>
-                <a:spcPts val="800"/>
+                <a:spcPts val="700"/>
               </a:spcAft>
-              <a:buClr>
-                <a:srgbClr val="F9770B"/>
-              </a:buClr>
-              <a:buFont typeface="Arial"/>
+              <a:buFont typeface="Arial" pitchFamily="34" charset="0"/>
               <a:buChar char="•"/>
             </a:pPr>
             <a:r>
-              <a:rPr sz="1800">
-                <a:solidFill>
-                  <a:srgbClr val="262626"/>
-                </a:solidFill>
+              <a:rPr sz="2200">
                 <a:latin typeface="TT Hoves"/>
               </a:rPr>
               <a:t>If a physical apparatus isn't available, a simulation of the same setup works identically for testing the same variables.</a:t>
@@ -21130,30 +18794,6 @@
           </a:p>
         </p:txBody>
       </p:sp>
-      <p:pic>
-        <p:nvPicPr>
-          <p:cNvPr id="15" name="Picture 14" descr="apparatus.png"/>
-          <p:cNvPicPr>
-            <a:picLocks noChangeAspect="1"/>
-          </p:cNvPicPr>
-          <p:nvPr/>
-        </p:nvPicPr>
-        <p:blipFill>
-          <a:blip r:embed="rId3"/>
-          <a:stretch>
-            <a:fillRect/>
-          </a:stretch>
-        </p:blipFill>
-        <p:spPr>
-          <a:xfrm>
-            <a:off x="7368102" y="1691640"/>
-            <a:ext cx="4054715" cy="4297680"/>
-          </a:xfrm>
-          <a:prstGeom prst="rect">
-            <a:avLst/>
-          </a:prstGeom>
-        </p:spPr>
-      </p:pic>
     </p:spTree>
   </p:cSld>
   <p:clrMapOvr>
@@ -21405,8 +19045,8 @@
         </p:nvSpPr>
         <p:spPr>
           <a:xfrm>
-            <a:off x="694944" y="420624"/>
-            <a:ext cx="10789920" cy="1024128"/>
+            <a:off x="699400" y="619760"/>
+            <a:ext cx="11441800" cy="830997"/>
           </a:xfrm>
           <a:prstGeom prst="rect">
             <a:avLst/>
@@ -21420,11 +19060,25 @@
           <a:lstStyle/>
           <a:p>
             <a:r>
-              <a:rPr sz="3000" b="1">
-                <a:solidFill>
-                  <a:srgbClr val="1A1A1A"/>
-                </a:solidFill>
-                <a:latin typeface="TT Hoves ExtraBold"/>
+              <a:rPr lang="en-PH" sz="3300" dirty="0">
+                <a:gradFill flip="none" rotWithShape="1">
+                  <a:gsLst>
+                    <a:gs pos="0">
+                      <a:srgbClr val="B45404"/>
+                    </a:gs>
+                    <a:gs pos="50000">
+                      <a:srgbClr val="E86C06"/>
+                    </a:gs>
+                    <a:gs pos="100000">
+                      <a:srgbClr val="F9770B"/>
+                    </a:gs>
+                  </a:gsLst>
+                  <a:path path="circle">
+                    <a:fillToRect l="50000" t="50000" r="50000" b="50000"/>
+                  </a:path>
+                  <a:tileRect/>
+                </a:gradFill>
+                <a:latin typeface="TT Hoves ExtraBold" panose="02000903040000020004" pitchFamily="50" charset="0"/>
               </a:rPr>
               <a:t>Predicting the Relationships Before Testing</a:t>
             </a:r>
@@ -21562,58 +19216,20 @@
       </p:sp>
       <p:sp>
         <p:nvSpPr>
-          <p:cNvPr id="13" name="Rectangle 12"/>
-          <p:cNvSpPr/>
+          <p:cNvPr id="9" name="TextBox 8">
+            <a:extLst>
+              <a:ext uri="{FF2B5EF4-FFF2-40B4-BE49-F238E27FC236}">
+                <a16:creationId xmlns:a16="http://schemas.microsoft.com/office/drawing/2014/main" id="{73C00714-0F36-6BC8-C038-4D7F36CEB239}"/>
+              </a:ext>
+            </a:extLst>
+          </p:cNvPr>
+          <p:cNvSpPr txBox="1"/>
           <p:nvPr/>
         </p:nvSpPr>
         <p:spPr>
           <a:xfrm>
-            <a:off x="713232" y="1481328"/>
-            <a:ext cx="960120" cy="68580"/>
-          </a:xfrm>
-          <a:prstGeom prst="rect">
-            <a:avLst/>
-          </a:prstGeom>
-          <a:solidFill>
-            <a:srgbClr val="F9770B"/>
-          </a:solidFill>
-          <a:ln>
-            <a:noFill/>
-          </a:ln>
-          <a:effectLst/>
-        </p:spPr>
-        <p:style>
-          <a:lnRef idx="1">
-            <a:schemeClr val="accent1"/>
-          </a:lnRef>
-          <a:fillRef idx="3">
-            <a:schemeClr val="accent1"/>
-          </a:fillRef>
-          <a:effectRef idx="2">
-            <a:schemeClr val="accent1"/>
-          </a:effectRef>
-          <a:fontRef idx="minor">
-            <a:schemeClr val="lt1"/>
-          </a:fontRef>
-        </p:style>
-        <p:txBody>
-          <a:bodyPr rtlCol="0" anchor="ctr"/>
-          <a:lstStyle/>
-          <a:p>
-            <a:pPr algn="ctr"/>
-          </a:p>
-        </p:txBody>
-      </p:sp>
-      <p:sp>
-        <p:nvSpPr>
-          <p:cNvPr id="14" name="TextBox 13"/>
-          <p:cNvSpPr txBox="1"/>
-          <p:nvPr/>
-        </p:nvSpPr>
-        <p:spPr>
-          <a:xfrm>
-            <a:off x="694944" y="1691640"/>
-            <a:ext cx="10789920" cy="640080"/>
+            <a:off x="699058" y="1536192"/>
+            <a:ext cx="10671048" cy="4270248"/>
           </a:xfrm>
           <a:prstGeom prst="rect">
             <a:avLst/>
@@ -21621,312 +19237,187 @@
           <a:noFill/>
         </p:spPr>
         <p:txBody>
-          <a:bodyPr wrap="square" anchor="t">
-            <a:spAutoFit/>
+          <a:bodyPr wrap="square" rtlCol="0">
+            <a:noAutofit/>
           </a:bodyPr>
           <a:lstStyle/>
           <a:p>
-            <a:pPr algn="l" marL="320040" indent="-320040">
+            <a:pPr marL="457200" indent="-457200" algn="l">
               <a:lnSpc>
-                <a:spcPct val="103000"/>
+                <a:spcPct val="104000"/>
               </a:lnSpc>
               <a:spcBef>
                 <a:spcPts val="0"/>
               </a:spcBef>
               <a:spcAft>
-                <a:spcPts val="800"/>
+                <a:spcPts val="700"/>
               </a:spcAft>
-              <a:buClr>
-                <a:srgbClr val="F9770B"/>
-              </a:buClr>
-              <a:buFont typeface="Arial"/>
+              <a:buFont typeface="Arial" pitchFamily="34" charset="0"/>
               <a:buChar char="•"/>
             </a:pPr>
             <a:r>
-              <a:rPr sz="1800">
-                <a:solidFill>
-                  <a:srgbClr val="262626"/>
-                </a:solidFill>
+              <a:rPr sz="2100">
                 <a:latin typeface="TT Hoves"/>
               </a:rPr>
               <a:t>Before collecting a single data point, use the formula itself to make a prediction:</a:t>
             </a:r>
           </a:p>
-        </p:txBody>
-      </p:sp>
-      <p:sp>
-        <p:nvSpPr>
-          <p:cNvPr id="15" name="Rounded Rectangle 14"/>
-          <p:cNvSpPr/>
-          <p:nvPr/>
-        </p:nvSpPr>
-        <p:spPr>
-          <a:xfrm>
-            <a:off x="3346704" y="2331720"/>
-            <a:ext cx="5486400" cy="1069848"/>
-          </a:xfrm>
-          <a:prstGeom prst="roundRect">
-            <a:avLst>
-              <a:gd name="adj" fmla="val 10000"/>
-            </a:avLst>
-          </a:prstGeom>
-          <a:solidFill>
-            <a:srgbClr val="FDF1E6"/>
-          </a:solidFill>
-          <a:ln w="15875">
-            <a:solidFill>
-              <a:srgbClr val="F9770B"/>
-            </a:solidFill>
-          </a:ln>
-          <a:effectLst/>
-        </p:spPr>
-        <p:style>
-          <a:lnRef idx="1">
-            <a:schemeClr val="accent1"/>
-          </a:lnRef>
-          <a:fillRef idx="3">
-            <a:schemeClr val="accent1"/>
-          </a:fillRef>
-          <a:effectRef idx="2">
-            <a:schemeClr val="accent1"/>
-          </a:effectRef>
-          <a:fontRef idx="minor">
-            <a:schemeClr val="lt1"/>
-          </a:fontRef>
-        </p:style>
-        <p:txBody>
-          <a:bodyPr rtlCol="0" anchor="ctr" wrap="square" tIns="50800" bIns="50800"/>
-          <a:lstStyle/>
           <a:p>
             <a:pPr algn="ctr">
+              <a:lnSpc>
+                <a:spcPct val="104000"/>
+              </a:lnSpc>
+              <a:spcBef>
+                <a:spcPts val="400"/>
+              </a:spcBef>
+              <a:spcAft>
+                <a:spcPts val="700"/>
+              </a:spcAft>
               <a:buNone/>
             </a:pPr>
             <a:r>
-              <a:rPr sz="2400" i="1">
-                <a:solidFill>
-                  <a:srgbClr val="C85A00"/>
-                </a:solidFill>
+              <a:rPr sz="2300" b="1" i="1">
                 <a:latin typeface="TT Hoves"/>
               </a:rPr>
               <a:t>F</a:t>
             </a:r>
             <a:r>
-              <a:rPr sz="2208" baseline="-25000">
-                <a:solidFill>
-                  <a:srgbClr val="C85A00"/>
-                </a:solidFill>
+              <a:rPr sz="2116" baseline="-25000">
                 <a:latin typeface="TT Hoves"/>
               </a:rPr>
               <a:t>c</a:t>
             </a:r>
             <a:r>
-              <a:rPr sz="2400">
-                <a:solidFill>
-                  <a:srgbClr val="C85A00"/>
-                </a:solidFill>
-                <a:latin typeface="TT Hoves"/>
-              </a:rPr>
-              <a:t>  =  </a:t>
-            </a:r>
-            <a:r>
-              <a:rPr sz="2400" i="1">
-                <a:solidFill>
-                  <a:srgbClr val="C85A00"/>
-                </a:solidFill>
+              <a:rPr sz="2300" b="1">
+                <a:latin typeface="TT Hoves"/>
+              </a:rPr>
+              <a:t> = </a:t>
+            </a:r>
+            <a:r>
+              <a:rPr sz="2300" b="1" i="1">
                 <a:latin typeface="TT Hoves"/>
               </a:rPr>
               <a:t>m</a:t>
             </a:r>
             <a:r>
-              <a:rPr sz="2400" i="1">
-                <a:solidFill>
-                  <a:srgbClr val="C85A00"/>
-                </a:solidFill>
+              <a:rPr sz="2300" b="1" i="1">
                 <a:latin typeface="TT Hoves"/>
               </a:rPr>
               <a:t>v</a:t>
             </a:r>
             <a:r>
-              <a:rPr sz="2208" baseline="30000">
-                <a:solidFill>
-                  <a:srgbClr val="C85A00"/>
-                </a:solidFill>
+              <a:rPr sz="2116" baseline="30000">
                 <a:latin typeface="TT Hoves"/>
               </a:rPr>
               <a:t>2</a:t>
             </a:r>
             <a:r>
-              <a:rPr sz="2400">
-                <a:solidFill>
-                  <a:srgbClr val="C85A00"/>
-                </a:solidFill>
+              <a:rPr sz="2300" b="1">
                 <a:latin typeface="TT Hoves"/>
               </a:rPr>
               <a:t>  /  </a:t>
             </a:r>
             <a:r>
-              <a:rPr sz="2400" i="1">
-                <a:solidFill>
-                  <a:srgbClr val="C85A00"/>
-                </a:solidFill>
+              <a:rPr sz="2300" b="1" i="1">
                 <a:latin typeface="TT Hoves"/>
               </a:rPr>
               <a:t>r</a:t>
             </a:r>
           </a:p>
-        </p:txBody>
-      </p:sp>
-      <p:sp>
-        <p:nvSpPr>
-          <p:cNvPr id="16" name="TextBox 15"/>
-          <p:cNvSpPr txBox="1"/>
-          <p:nvPr/>
-        </p:nvSpPr>
-        <p:spPr>
-          <a:xfrm>
-            <a:off x="694944" y="3657600"/>
-            <a:ext cx="10789920" cy="2377440"/>
-          </a:xfrm>
-          <a:prstGeom prst="rect">
-            <a:avLst/>
-          </a:prstGeom>
-          <a:noFill/>
-        </p:spPr>
-        <p:txBody>
-          <a:bodyPr wrap="square" anchor="t">
-            <a:spAutoFit/>
-          </a:bodyPr>
-          <a:lstStyle/>
-          <a:p>
-            <a:pPr algn="l" marL="320040" indent="-320040">
+          <a:p>
+            <a:pPr marL="457200" indent="-457200" algn="l">
               <a:lnSpc>
-                <a:spcPct val="103000"/>
+                <a:spcPct val="104000"/>
               </a:lnSpc>
               <a:spcBef>
                 <a:spcPts val="0"/>
               </a:spcBef>
               <a:spcAft>
-                <a:spcPts val="800"/>
+                <a:spcPts val="700"/>
               </a:spcAft>
-              <a:buClr>
-                <a:srgbClr val="F9770B"/>
-              </a:buClr>
-              <a:buFont typeface="Arial"/>
+              <a:buFont typeface="Arial" pitchFamily="34" charset="0"/>
               <a:buChar char="•"/>
             </a:pPr>
             <a:r>
-              <a:rPr sz="1800">
-                <a:solidFill>
-                  <a:srgbClr val="262626"/>
-                </a:solidFill>
+              <a:rPr sz="2100">
                 <a:latin typeface="TT Hoves"/>
               </a:rPr>
               <a:t>Holding radius and mass fixed, doubling speed should </a:t>
             </a:r>
             <a:r>
-              <a:rPr sz="1800" i="1">
-                <a:solidFill>
-                  <a:srgbClr val="262626"/>
-                </a:solidFill>
+              <a:rPr sz="2100" i="1">
                 <a:latin typeface="TT Hoves"/>
               </a:rPr>
               <a:t>quadruple</a:t>
             </a:r>
             <a:r>
-              <a:rPr sz="1800">
-                <a:solidFill>
-                  <a:srgbClr val="262626"/>
-                </a:solidFill>
+              <a:rPr sz="2100">
                 <a:latin typeface="TT Hoves"/>
               </a:rPr>
               <a:t> the force needed (speed is squared).</a:t>
             </a:r>
           </a:p>
           <a:p>
-            <a:pPr algn="l" marL="320040" indent="-320040">
+            <a:pPr marL="457200" indent="-457200" algn="l">
               <a:lnSpc>
-                <a:spcPct val="103000"/>
+                <a:spcPct val="104000"/>
               </a:lnSpc>
               <a:spcBef>
                 <a:spcPts val="0"/>
               </a:spcBef>
               <a:spcAft>
-                <a:spcPts val="800"/>
+                <a:spcPts val="700"/>
               </a:spcAft>
-              <a:buClr>
-                <a:srgbClr val="F9770B"/>
-              </a:buClr>
-              <a:buFont typeface="Arial"/>
+              <a:buFont typeface="Arial" pitchFamily="34" charset="0"/>
               <a:buChar char="•"/>
             </a:pPr>
             <a:r>
-              <a:rPr sz="1800">
-                <a:solidFill>
-                  <a:srgbClr val="262626"/>
-                </a:solidFill>
+              <a:rPr sz="2100">
                 <a:latin typeface="TT Hoves"/>
               </a:rPr>
               <a:t>Holding speed and mass fixed, doubling the radius should </a:t>
             </a:r>
             <a:r>
-              <a:rPr sz="1800" i="1">
-                <a:solidFill>
-                  <a:srgbClr val="262626"/>
-                </a:solidFill>
+              <a:rPr sz="2100" i="1">
                 <a:latin typeface="TT Hoves"/>
               </a:rPr>
               <a:t>halve</a:t>
             </a:r>
             <a:r>
-              <a:rPr sz="1800">
-                <a:solidFill>
-                  <a:srgbClr val="262626"/>
-                </a:solidFill>
+              <a:rPr sz="2100">
                 <a:latin typeface="TT Hoves"/>
               </a:rPr>
               <a:t> the force needed (radius is in the denominator).</a:t>
             </a:r>
           </a:p>
           <a:p>
-            <a:pPr algn="l" marL="320040" indent="-320040">
+            <a:pPr marL="457200" indent="-457200" algn="l">
               <a:lnSpc>
-                <a:spcPct val="103000"/>
+                <a:spcPct val="104000"/>
               </a:lnSpc>
               <a:spcBef>
                 <a:spcPts val="0"/>
               </a:spcBef>
               <a:spcAft>
-                <a:spcPts val="800"/>
+                <a:spcPts val="700"/>
               </a:spcAft>
-              <a:buClr>
-                <a:srgbClr val="F9770B"/>
-              </a:buClr>
-              <a:buFont typeface="Arial"/>
+              <a:buFont typeface="Arial" pitchFamily="34" charset="0"/>
               <a:buChar char="•"/>
             </a:pPr>
             <a:r>
-              <a:rPr sz="1800">
-                <a:solidFill>
-                  <a:srgbClr val="262626"/>
-                </a:solidFill>
+              <a:rPr sz="2100">
                 <a:latin typeface="TT Hoves"/>
               </a:rPr>
               <a:t>Writing these predictions down </a:t>
             </a:r>
             <a:r>
-              <a:rPr sz="1800" i="1">
-                <a:solidFill>
-                  <a:srgbClr val="262626"/>
-                </a:solidFill>
+              <a:rPr sz="2100" i="1">
                 <a:latin typeface="TT Hoves"/>
               </a:rPr>
               <a:t>before</a:t>
             </a:r>
             <a:r>
-              <a:rPr sz="1800">
-                <a:solidFill>
-                  <a:srgbClr val="262626"/>
-                </a:solidFill>
+              <a:rPr sz="2100">
                 <a:latin typeface="TT Hoves"/>
               </a:rPr>
               <a:t> testing turns the lab from "collect random numbers" into "test a specific claim."</a:t>
@@ -22908,8 +20399,8 @@
         </p:nvSpPr>
         <p:spPr>
           <a:xfrm>
-            <a:off x="694944" y="420624"/>
-            <a:ext cx="10789920" cy="1024128"/>
+            <a:off x="699400" y="619760"/>
+            <a:ext cx="11441800" cy="830997"/>
           </a:xfrm>
           <a:prstGeom prst="rect">
             <a:avLst/>
@@ -22923,11 +20414,25 @@
           <a:lstStyle/>
           <a:p>
             <a:r>
-              <a:rPr sz="2500" b="1">
-                <a:solidFill>
-                  <a:srgbClr val="1A1A1A"/>
-                </a:solidFill>
-                <a:latin typeface="TT Hoves ExtraBold"/>
+              <a:rPr lang="en-PH" sz="2800" dirty="0">
+                <a:gradFill flip="none" rotWithShape="1">
+                  <a:gsLst>
+                    <a:gs pos="0">
+                      <a:srgbClr val="B45404"/>
+                    </a:gs>
+                    <a:gs pos="50000">
+                      <a:srgbClr val="E86C06"/>
+                    </a:gs>
+                    <a:gs pos="100000">
+                      <a:srgbClr val="F9770B"/>
+                    </a:gs>
+                  </a:gsLst>
+                  <a:path path="circle">
+                    <a:fillToRect l="50000" t="50000" r="50000" b="50000"/>
+                  </a:path>
+                  <a:tileRect/>
+                </a:gradFill>
+                <a:latin typeface="TT Hoves ExtraBold" panose="02000903040000020004" pitchFamily="50" charset="0"/>
               </a:rPr>
               <a:t>From Data to Conclusion — Linking Results to the Formula</a:t>
             </a:r>
@@ -23065,58 +20570,20 @@
       </p:sp>
       <p:sp>
         <p:nvSpPr>
-          <p:cNvPr id="13" name="Rectangle 12"/>
-          <p:cNvSpPr/>
+          <p:cNvPr id="9" name="TextBox 8">
+            <a:extLst>
+              <a:ext uri="{FF2B5EF4-FFF2-40B4-BE49-F238E27FC236}">
+                <a16:creationId xmlns:a16="http://schemas.microsoft.com/office/drawing/2014/main" id="{73C00714-0F36-6BC8-C038-4D7F36CEB239}"/>
+              </a:ext>
+            </a:extLst>
+          </p:cNvPr>
+          <p:cNvSpPr txBox="1"/>
           <p:nvPr/>
         </p:nvSpPr>
         <p:spPr>
           <a:xfrm>
-            <a:off x="713232" y="1481328"/>
-            <a:ext cx="960120" cy="68580"/>
-          </a:xfrm>
-          <a:prstGeom prst="rect">
-            <a:avLst/>
-          </a:prstGeom>
-          <a:solidFill>
-            <a:srgbClr val="F9770B"/>
-          </a:solidFill>
-          <a:ln>
-            <a:noFill/>
-          </a:ln>
-          <a:effectLst/>
-        </p:spPr>
-        <p:style>
-          <a:lnRef idx="1">
-            <a:schemeClr val="accent1"/>
-          </a:lnRef>
-          <a:fillRef idx="3">
-            <a:schemeClr val="accent1"/>
-          </a:fillRef>
-          <a:effectRef idx="2">
-            <a:schemeClr val="accent1"/>
-          </a:effectRef>
-          <a:fontRef idx="minor">
-            <a:schemeClr val="lt1"/>
-          </a:fontRef>
-        </p:style>
-        <p:txBody>
-          <a:bodyPr rtlCol="0" anchor="ctr"/>
-          <a:lstStyle/>
-          <a:p>
-            <a:pPr algn="ctr"/>
-          </a:p>
-        </p:txBody>
-      </p:sp>
-      <p:sp>
-        <p:nvSpPr>
-          <p:cNvPr id="14" name="TextBox 13"/>
-          <p:cNvSpPr txBox="1"/>
-          <p:nvPr/>
-        </p:nvSpPr>
-        <p:spPr>
-          <a:xfrm>
-            <a:off x="694944" y="1691640"/>
-            <a:ext cx="10789920" cy="1737360"/>
+            <a:off x="699058" y="1536192"/>
+            <a:ext cx="10671048" cy="4270248"/>
           </a:xfrm>
           <a:prstGeom prst="rect">
             <a:avLst/>
@@ -23124,208 +20591,90 @@
           <a:noFill/>
         </p:spPr>
         <p:txBody>
-          <a:bodyPr wrap="square" anchor="t">
-            <a:spAutoFit/>
+          <a:bodyPr wrap="square" rtlCol="0">
+            <a:noAutofit/>
           </a:bodyPr>
           <a:lstStyle/>
           <a:p>
-            <a:pPr algn="l" marL="320040" indent="-320040">
+            <a:pPr marL="457200" indent="-457200" algn="l">
               <a:lnSpc>
-                <a:spcPct val="103000"/>
+                <a:spcPct val="104000"/>
               </a:lnSpc>
               <a:spcBef>
                 <a:spcPts val="0"/>
               </a:spcBef>
               <a:spcAft>
-                <a:spcPts val="800"/>
+                <a:spcPts val="700"/>
               </a:spcAft>
-              <a:buClr>
-                <a:srgbClr val="F9770B"/>
-              </a:buClr>
-              <a:buFont typeface="Arial"/>
+              <a:buFont typeface="Arial" pitchFamily="34" charset="0"/>
               <a:buChar char="•"/>
             </a:pPr>
             <a:r>
-              <a:rPr sz="1900">
-                <a:solidFill>
-                  <a:srgbClr val="262626"/>
-                </a:solidFill>
+              <a:rPr sz="2300">
                 <a:latin typeface="TT Hoves"/>
               </a:rPr>
               <a:t>Collected numbers alone aren't a conclusion — a conclusion </a:t>
             </a:r>
             <a:r>
-              <a:rPr sz="1900" i="1">
-                <a:solidFill>
-                  <a:srgbClr val="262626"/>
-                </a:solidFill>
+              <a:rPr sz="2300" i="1">
                 <a:latin typeface="TT Hoves"/>
               </a:rPr>
               <a:t>explains</a:t>
             </a:r>
             <a:r>
-              <a:rPr sz="1900">
-                <a:solidFill>
-                  <a:srgbClr val="262626"/>
-                </a:solidFill>
+              <a:rPr sz="2300">
                 <a:latin typeface="TT Hoves"/>
               </a:rPr>
               <a:t> what the numbers mean.</a:t>
             </a:r>
           </a:p>
           <a:p>
-            <a:pPr algn="l" marL="320040" indent="-320040">
+            <a:pPr marL="457200" indent="-457200" algn="l">
               <a:lnSpc>
-                <a:spcPct val="103000"/>
+                <a:spcPct val="104000"/>
               </a:lnSpc>
               <a:spcBef>
                 <a:spcPts val="0"/>
               </a:spcBef>
               <a:spcAft>
-                <a:spcPts val="800"/>
+                <a:spcPts val="700"/>
               </a:spcAft>
-              <a:buClr>
-                <a:srgbClr val="F9770B"/>
-              </a:buClr>
-              <a:buFont typeface="Arial"/>
+              <a:buFont typeface="Arial" pitchFamily="34" charset="0"/>
               <a:buChar char="•"/>
             </a:pPr>
             <a:r>
-              <a:rPr sz="1900">
-                <a:solidFill>
-                  <a:srgbClr val="262626"/>
-                </a:solidFill>
-                <a:latin typeface="TT Hoves"/>
-              </a:rPr>
-              <a:t>A strong conclusion does three things: states what was changed, states what happened to the force as a result, and explicitly connects that pattern back to Fᴄ = mv²/r.</a:t>
-            </a:r>
-          </a:p>
-        </p:txBody>
-      </p:sp>
-      <p:sp>
-        <p:nvSpPr>
-          <p:cNvPr id="15" name="Rounded Rectangle 14"/>
-          <p:cNvSpPr/>
-          <p:nvPr/>
-        </p:nvSpPr>
-        <p:spPr>
-          <a:xfrm>
-            <a:off x="694944" y="3794760"/>
-            <a:ext cx="10789920" cy="1554480"/>
-          </a:xfrm>
-          <a:prstGeom prst="roundRect">
-            <a:avLst>
-              <a:gd name="adj" fmla="val 6000"/>
-            </a:avLst>
-          </a:prstGeom>
-          <a:solidFill>
-            <a:srgbClr val="FBEAD9"/>
-          </a:solidFill>
-          <a:ln>
-            <a:noFill/>
-          </a:ln>
-          <a:effectLst/>
-        </p:spPr>
-        <p:style>
-          <a:lnRef idx="1">
-            <a:schemeClr val="accent1"/>
-          </a:lnRef>
-          <a:fillRef idx="3">
-            <a:schemeClr val="accent1"/>
-          </a:fillRef>
-          <a:effectRef idx="2">
-            <a:schemeClr val="accent1"/>
-          </a:effectRef>
-          <a:fontRef idx="minor">
-            <a:schemeClr val="lt1"/>
-          </a:fontRef>
-        </p:style>
-        <p:txBody>
-          <a:bodyPr rtlCol="0" anchor="ctr" wrap="square" lIns="203200" rIns="152400" tIns="76200" bIns="76200"/>
-          <a:lstStyle/>
-          <a:p>
-            <a:pPr algn="ctr">
+              <a:rPr sz="2300">
+                <a:latin typeface="TT Hoves"/>
+              </a:rPr>
+              <a:t>A strong conclusion does three things: states what was changed, states what happened to the force as a result, and explicitly connects that pattern back to Fᴄ = m·v²/r.</a:t>
+            </a:r>
+          </a:p>
+          <a:p>
+            <a:pPr marL="457200" indent="-457200" algn="l">
               <a:lnSpc>
-                <a:spcPct val="103000"/>
+                <a:spcPct val="104000"/>
               </a:lnSpc>
+              <a:spcBef>
+                <a:spcPts val="0"/>
+              </a:spcBef>
               <a:spcAft>
-                <a:spcPts val="400"/>
+                <a:spcPts val="700"/>
               </a:spcAft>
-              <a:buNone/>
+              <a:buFont typeface="Arial" pitchFamily="34" charset="0"/>
+              <a:buChar char="•"/>
             </a:pPr>
             <a:r>
-              <a:rPr sz="1800">
-                <a:solidFill>
-                  <a:srgbClr val="262626"/>
-                </a:solidFill>
-                <a:latin typeface="TT Hoves"/>
-              </a:rPr>
-              <a:t>Example structure (not a required script):</a:t>
-            </a:r>
-          </a:p>
-          <a:p>
-            <a:pPr>
-              <a:lnSpc>
-                <a:spcPct val="103000"/>
-              </a:lnSpc>
-              <a:spcAft>
-                <a:spcPts val="400"/>
-              </a:spcAft>
-              <a:buNone/>
-            </a:pPr>
-            <a:r>
-              <a:rPr sz="1800" i="1">
-                <a:solidFill>
-                  <a:srgbClr val="262626"/>
-                </a:solidFill>
+              <a:rPr sz="2300">
+                <a:latin typeface="TT Hoves"/>
+              </a:rPr>
+              <a:t>Example structure (not a required script): </a:t>
+            </a:r>
+            <a:r>
+              <a:rPr sz="2300" i="1">
                 <a:latin typeface="TT Hoves"/>
               </a:rPr>
               <a:t>"As the radius increased while speed was held constant, the measured force decreased — consistent with the inverse relationship predicted by the formula."</a:t>
             </a:r>
-          </a:p>
-        </p:txBody>
-      </p:sp>
-      <p:sp>
-        <p:nvSpPr>
-          <p:cNvPr id="16" name="Rectangle 15"/>
-          <p:cNvSpPr/>
-          <p:nvPr/>
-        </p:nvSpPr>
-        <p:spPr>
-          <a:xfrm>
-            <a:off x="694944" y="3794760"/>
-            <a:ext cx="82296" cy="1554480"/>
-          </a:xfrm>
-          <a:prstGeom prst="rect">
-            <a:avLst/>
-          </a:prstGeom>
-          <a:solidFill>
-            <a:srgbClr val="F9770B"/>
-          </a:solidFill>
-          <a:ln>
-            <a:noFill/>
-          </a:ln>
-          <a:effectLst/>
-        </p:spPr>
-        <p:style>
-          <a:lnRef idx="1">
-            <a:schemeClr val="accent1"/>
-          </a:lnRef>
-          <a:fillRef idx="3">
-            <a:schemeClr val="accent1"/>
-          </a:fillRef>
-          <a:effectRef idx="2">
-            <a:schemeClr val="accent1"/>
-          </a:effectRef>
-          <a:fontRef idx="minor">
-            <a:schemeClr val="lt1"/>
-          </a:fontRef>
-        </p:style>
-        <p:txBody>
-          <a:bodyPr rtlCol="0" anchor="ctr"/>
-          <a:lstStyle/>
-          <a:p>
-            <a:pPr algn="ctr"/>
           </a:p>
         </p:txBody>
       </p:sp>
@@ -23580,8 +20929,8 @@
         </p:nvSpPr>
         <p:spPr>
           <a:xfrm>
-            <a:off x="694944" y="420624"/>
-            <a:ext cx="10789920" cy="1024128"/>
+            <a:off x="699400" y="619760"/>
+            <a:ext cx="11441800" cy="830997"/>
           </a:xfrm>
           <a:prstGeom prst="rect">
             <a:avLst/>
@@ -23595,11 +20944,25 @@
           <a:lstStyle/>
           <a:p>
             <a:r>
-              <a:rPr sz="2500" b="1">
-                <a:solidFill>
-                  <a:srgbClr val="1A1A1A"/>
-                </a:solidFill>
-                <a:latin typeface="TT Hoves ExtraBold"/>
+              <a:rPr lang="en-PH" sz="2500" dirty="0">
+                <a:gradFill flip="none" rotWithShape="1">
+                  <a:gsLst>
+                    <a:gs pos="0">
+                      <a:srgbClr val="B45404"/>
+                    </a:gs>
+                    <a:gs pos="50000">
+                      <a:srgbClr val="E86C06"/>
+                    </a:gs>
+                    <a:gs pos="100000">
+                      <a:srgbClr val="F9770B"/>
+                    </a:gs>
+                  </a:gsLst>
+                  <a:path path="circle">
+                    <a:fillToRect l="50000" t="50000" r="50000" b="50000"/>
+                  </a:path>
+                  <a:tileRect/>
+                </a:gradFill>
+                <a:latin typeface="TT Hoves ExtraBold" panose="02000903040000020004" pitchFamily="50" charset="0"/>
               </a:rPr>
               <a:t>Projectile vs. Circular Motion — Two Types, One Framework</a:t>
             </a:r>
@@ -23737,502 +21100,20 @@
       </p:sp>
       <p:sp>
         <p:nvSpPr>
-          <p:cNvPr id="13" name="Rectangle 12"/>
-          <p:cNvSpPr/>
+          <p:cNvPr id="9" name="TextBox 8">
+            <a:extLst>
+              <a:ext uri="{FF2B5EF4-FFF2-40B4-BE49-F238E27FC236}">
+                <a16:creationId xmlns:a16="http://schemas.microsoft.com/office/drawing/2014/main" id="{73C00714-0F36-6BC8-C038-4D7F36CEB239}"/>
+              </a:ext>
+            </a:extLst>
+          </p:cNvPr>
+          <p:cNvSpPr txBox="1"/>
           <p:nvPr/>
         </p:nvSpPr>
         <p:spPr>
           <a:xfrm>
-            <a:off x="713232" y="1481328"/>
-            <a:ext cx="960120" cy="68580"/>
-          </a:xfrm>
-          <a:prstGeom prst="rect">
-            <a:avLst/>
-          </a:prstGeom>
-          <a:solidFill>
-            <a:srgbClr val="F9770B"/>
-          </a:solidFill>
-          <a:ln>
-            <a:noFill/>
-          </a:ln>
-          <a:effectLst/>
-        </p:spPr>
-        <p:style>
-          <a:lnRef idx="1">
-            <a:schemeClr val="accent1"/>
-          </a:lnRef>
-          <a:fillRef idx="3">
-            <a:schemeClr val="accent1"/>
-          </a:fillRef>
-          <a:effectRef idx="2">
-            <a:schemeClr val="accent1"/>
-          </a:effectRef>
-          <a:fontRef idx="minor">
-            <a:schemeClr val="lt1"/>
-          </a:fontRef>
-        </p:style>
-        <p:txBody>
-          <a:bodyPr rtlCol="0" anchor="ctr"/>
-          <a:lstStyle/>
-          <a:p>
-            <a:pPr algn="ctr"/>
-          </a:p>
-        </p:txBody>
-      </p:sp>
-      <p:graphicFrame>
-        <p:nvGraphicFramePr>
-          <p:cNvPr id="14" name="Table 13"/>
-          <p:cNvGraphicFramePr>
-            <a:graphicFrameLocks noGrp="1"/>
-          </p:cNvGraphicFramePr>
-          <p:nvPr/>
-        </p:nvGraphicFramePr>
-        <p:xfrm>
-          <a:off x="694944" y="1783080"/>
-          <a:ext cx="10789920" cy="3017520"/>
-        </p:xfrm>
-        <a:graphic>
-          <a:graphicData uri="http://schemas.openxmlformats.org/drawingml/2006/table">
-            <a:tbl>
-              <a:tblPr firstRow="1">
-                <a:tableStyleId>{5C22544A-7EE6-4342-B048-85BDC9FD1C3A}</a:tableStyleId>
-              </a:tblPr>
-              <a:tblGrid>
-                <a:gridCol w="2743200"/>
-                <a:gridCol w="4023360"/>
-                <a:gridCol w="4023360"/>
-              </a:tblGrid>
-              <a:tr h="502920">
-                <a:tc>
-                  <a:txBody>
-                    <a:bodyPr wrap="square"/>
-                    <a:lstStyle/>
-                    <a:p>
-                      <a:pPr algn="l"/>
-                    </a:p>
-                  </a:txBody>
-                  <a:tcPr marL="114300" marR="114300" marT="63500" marB="63500" anchor="ctr">
-                    <a:solidFill>
-                      <a:srgbClr val="F9770B"/>
-                    </a:solidFill>
-                  </a:tcPr>
-                </a:tc>
-                <a:tc>
-                  <a:txBody>
-                    <a:bodyPr wrap="square"/>
-                    <a:lstStyle/>
-                    <a:p>
-                      <a:pPr algn="l"/>
-                      <a:r>
-                        <a:rPr sz="1600" b="1">
-                          <a:solidFill>
-                            <a:srgbClr val="FFFFFF"/>
-                          </a:solidFill>
-                          <a:latin typeface="TT Hoves"/>
-                        </a:rPr>
-                        <a:t>Projectile Motion</a:t>
-                      </a:r>
-                    </a:p>
-                  </a:txBody>
-                  <a:tcPr marL="114300" marR="114300" marT="63500" marB="63500" anchor="ctr">
-                    <a:solidFill>
-                      <a:srgbClr val="F9770B"/>
-                    </a:solidFill>
-                  </a:tcPr>
-                </a:tc>
-                <a:tc>
-                  <a:txBody>
-                    <a:bodyPr wrap="square"/>
-                    <a:lstStyle/>
-                    <a:p>
-                      <a:pPr algn="l"/>
-                      <a:r>
-                        <a:rPr sz="1600" b="1">
-                          <a:solidFill>
-                            <a:srgbClr val="FFFFFF"/>
-                          </a:solidFill>
-                          <a:latin typeface="TT Hoves"/>
-                        </a:rPr>
-                        <a:t>Circular Motion</a:t>
-                      </a:r>
-                    </a:p>
-                  </a:txBody>
-                  <a:tcPr marL="114300" marR="114300" marT="63500" marB="63500" anchor="ctr">
-                    <a:solidFill>
-                      <a:srgbClr val="F9770B"/>
-                    </a:solidFill>
-                  </a:tcPr>
-                </a:tc>
-              </a:tr>
-              <a:tr h="502920">
-                <a:tc>
-                  <a:txBody>
-                    <a:bodyPr wrap="square"/>
-                    <a:lstStyle/>
-                    <a:p>
-                      <a:pPr algn="l"/>
-                      <a:r>
-                        <a:rPr sz="1500" b="1">
-                          <a:solidFill>
-                            <a:srgbClr val="C85A00"/>
-                          </a:solidFill>
-                          <a:latin typeface="TT Hoves"/>
-                        </a:rPr>
-                        <a:t>Cause of curving</a:t>
-                      </a:r>
-                    </a:p>
-                  </a:txBody>
-                  <a:tcPr marL="114300" marR="114300" marT="63500" marB="63500" anchor="ctr">
-                    <a:solidFill>
-                      <a:srgbClr val="FFFFFF"/>
-                    </a:solidFill>
-                  </a:tcPr>
-                </a:tc>
-                <a:tc>
-                  <a:txBody>
-                    <a:bodyPr wrap="square"/>
-                    <a:lstStyle/>
-                    <a:p>
-                      <a:pPr algn="l"/>
-                      <a:r>
-                        <a:rPr sz="1500">
-                          <a:solidFill>
-                            <a:srgbClr val="262626"/>
-                          </a:solidFill>
-                          <a:latin typeface="TT Hoves"/>
-                        </a:rPr>
-                        <a:t>gravity (constant, downward)</a:t>
-                      </a:r>
-                    </a:p>
-                  </a:txBody>
-                  <a:tcPr marL="114300" marR="114300" marT="63500" marB="63500" anchor="ctr">
-                    <a:solidFill>
-                      <a:srgbClr val="FFFFFF"/>
-                    </a:solidFill>
-                  </a:tcPr>
-                </a:tc>
-                <a:tc>
-                  <a:txBody>
-                    <a:bodyPr wrap="square"/>
-                    <a:lstStyle/>
-                    <a:p>
-                      <a:pPr algn="l"/>
-                      <a:r>
-                        <a:rPr sz="1500">
-                          <a:solidFill>
-                            <a:srgbClr val="262626"/>
-                          </a:solidFill>
-                          <a:latin typeface="TT Hoves"/>
-                        </a:rPr>
-                        <a:t>centripetal force (toward center)</a:t>
-                      </a:r>
-                    </a:p>
-                  </a:txBody>
-                  <a:tcPr marL="114300" marR="114300" marT="63500" marB="63500" anchor="ctr">
-                    <a:solidFill>
-                      <a:srgbClr val="FFFFFF"/>
-                    </a:solidFill>
-                  </a:tcPr>
-                </a:tc>
-              </a:tr>
-              <a:tr h="502920">
-                <a:tc>
-                  <a:txBody>
-                    <a:bodyPr wrap="square"/>
-                    <a:lstStyle/>
-                    <a:p>
-                      <a:pPr algn="l"/>
-                      <a:r>
-                        <a:rPr sz="1500" b="1">
-                          <a:solidFill>
-                            <a:srgbClr val="C85A00"/>
-                          </a:solidFill>
-                          <a:latin typeface="TT Hoves"/>
-                        </a:rPr>
-                        <a:t>Speed</a:t>
-                      </a:r>
-                    </a:p>
-                  </a:txBody>
-                  <a:tcPr marL="114300" marR="114300" marT="63500" marB="63500" anchor="ctr">
-                    <a:solidFill>
-                      <a:srgbClr val="FBF3EC"/>
-                    </a:solidFill>
-                  </a:tcPr>
-                </a:tc>
-                <a:tc>
-                  <a:txBody>
-                    <a:bodyPr wrap="square"/>
-                    <a:lstStyle/>
-                    <a:p>
-                      <a:pPr algn="l"/>
-                      <a:r>
-                        <a:rPr sz="1500">
-                          <a:solidFill>
-                            <a:srgbClr val="262626"/>
-                          </a:solidFill>
-                          <a:latin typeface="TT Hoves"/>
-                        </a:rPr>
-                        <a:t>changes throughout flight</a:t>
-                      </a:r>
-                    </a:p>
-                  </a:txBody>
-                  <a:tcPr marL="114300" marR="114300" marT="63500" marB="63500" anchor="ctr">
-                    <a:solidFill>
-                      <a:srgbClr val="FBF3EC"/>
-                    </a:solidFill>
-                  </a:tcPr>
-                </a:tc>
-                <a:tc>
-                  <a:txBody>
-                    <a:bodyPr wrap="square"/>
-                    <a:lstStyle/>
-                    <a:p>
-                      <a:pPr algn="l"/>
-                      <a:r>
-                        <a:rPr sz="1500">
-                          <a:solidFill>
-                            <a:srgbClr val="262626"/>
-                          </a:solidFill>
-                          <a:latin typeface="TT Hoves"/>
-                        </a:rPr>
-                        <a:t>stays constant</a:t>
-                      </a:r>
-                    </a:p>
-                  </a:txBody>
-                  <a:tcPr marL="114300" marR="114300" marT="63500" marB="63500" anchor="ctr">
-                    <a:solidFill>
-                      <a:srgbClr val="FBF3EC"/>
-                    </a:solidFill>
-                  </a:tcPr>
-                </a:tc>
-              </a:tr>
-              <a:tr h="502920">
-                <a:tc>
-                  <a:txBody>
-                    <a:bodyPr wrap="square"/>
-                    <a:lstStyle/>
-                    <a:p>
-                      <a:pPr algn="l"/>
-                      <a:r>
-                        <a:rPr sz="1500" b="1">
-                          <a:solidFill>
-                            <a:srgbClr val="C85A00"/>
-                          </a:solidFill>
-                          <a:latin typeface="TT Hoves"/>
-                        </a:rPr>
-                        <a:t>Direction</a:t>
-                      </a:r>
-                    </a:p>
-                  </a:txBody>
-                  <a:tcPr marL="114300" marR="114300" marT="63500" marB="63500" anchor="ctr">
-                    <a:solidFill>
-                      <a:srgbClr val="FFFFFF"/>
-                    </a:solidFill>
-                  </a:tcPr>
-                </a:tc>
-                <a:tc>
-                  <a:txBody>
-                    <a:bodyPr wrap="square"/>
-                    <a:lstStyle/>
-                    <a:p>
-                      <a:pPr algn="l"/>
-                      <a:r>
-                        <a:rPr sz="1500">
-                          <a:solidFill>
-                            <a:srgbClr val="262626"/>
-                          </a:solidFill>
-                          <a:latin typeface="TT Hoves"/>
-                        </a:rPr>
-                        <a:t>changes</a:t>
-                      </a:r>
-                    </a:p>
-                  </a:txBody>
-                  <a:tcPr marL="114300" marR="114300" marT="63500" marB="63500" anchor="ctr">
-                    <a:solidFill>
-                      <a:srgbClr val="FFFFFF"/>
-                    </a:solidFill>
-                  </a:tcPr>
-                </a:tc>
-                <a:tc>
-                  <a:txBody>
-                    <a:bodyPr wrap="square"/>
-                    <a:lstStyle/>
-                    <a:p>
-                      <a:pPr algn="l"/>
-                      <a:r>
-                        <a:rPr sz="1500">
-                          <a:solidFill>
-                            <a:srgbClr val="262626"/>
-                          </a:solidFill>
-                          <a:latin typeface="TT Hoves"/>
-                        </a:rPr>
-                        <a:t>changes</a:t>
-                      </a:r>
-                    </a:p>
-                  </a:txBody>
-                  <a:tcPr marL="114300" marR="114300" marT="63500" marB="63500" anchor="ctr">
-                    <a:solidFill>
-                      <a:srgbClr val="FFFFFF"/>
-                    </a:solidFill>
-                  </a:tcPr>
-                </a:tc>
-              </a:tr>
-              <a:tr h="502920">
-                <a:tc>
-                  <a:txBody>
-                    <a:bodyPr wrap="square"/>
-                    <a:lstStyle/>
-                    <a:p>
-                      <a:pPr algn="l"/>
-                      <a:r>
-                        <a:rPr sz="1500" b="1">
-                          <a:solidFill>
-                            <a:srgbClr val="C85A00"/>
-                          </a:solidFill>
-                          <a:latin typeface="TT Hoves"/>
-                        </a:rPr>
-                        <a:t>Acceleration direction</a:t>
-                      </a:r>
-                    </a:p>
-                  </a:txBody>
-                  <a:tcPr marL="114300" marR="114300" marT="63500" marB="63500" anchor="ctr">
-                    <a:solidFill>
-                      <a:srgbClr val="FBF3EC"/>
-                    </a:solidFill>
-                  </a:tcPr>
-                </a:tc>
-                <a:tc>
-                  <a:txBody>
-                    <a:bodyPr wrap="square"/>
-                    <a:lstStyle/>
-                    <a:p>
-                      <a:pPr algn="l"/>
-                      <a:r>
-                        <a:rPr sz="1500">
-                          <a:solidFill>
-                            <a:srgbClr val="262626"/>
-                          </a:solidFill>
-                          <a:latin typeface="TT Hoves"/>
-                        </a:rPr>
-                        <a:t>always straight down</a:t>
-                      </a:r>
-                    </a:p>
-                  </a:txBody>
-                  <a:tcPr marL="114300" marR="114300" marT="63500" marB="63500" anchor="ctr">
-                    <a:solidFill>
-                      <a:srgbClr val="FBF3EC"/>
-                    </a:solidFill>
-                  </a:tcPr>
-                </a:tc>
-                <a:tc>
-                  <a:txBody>
-                    <a:bodyPr wrap="square"/>
-                    <a:lstStyle/>
-                    <a:p>
-                      <a:pPr algn="l"/>
-                      <a:r>
-                        <a:rPr sz="1500">
-                          <a:solidFill>
-                            <a:srgbClr val="262626"/>
-                          </a:solidFill>
-                          <a:latin typeface="TT Hoves"/>
-                        </a:rPr>
-                        <a:t>always toward the center</a:t>
-                      </a:r>
-                    </a:p>
-                  </a:txBody>
-                  <a:tcPr marL="114300" marR="114300" marT="63500" marB="63500" anchor="ctr">
-                    <a:solidFill>
-                      <a:srgbClr val="FBF3EC"/>
-                    </a:solidFill>
-                  </a:tcPr>
-                </a:tc>
-              </a:tr>
-              <a:tr h="502920">
-                <a:tc>
-                  <a:txBody>
-                    <a:bodyPr wrap="square"/>
-                    <a:lstStyle/>
-                    <a:p>
-                      <a:pPr algn="l"/>
-                      <a:r>
-                        <a:rPr sz="1500" b="1">
-                          <a:solidFill>
-                            <a:srgbClr val="C85A00"/>
-                          </a:solidFill>
-                          <a:latin typeface="TT Hoves"/>
-                        </a:rPr>
-                        <a:t>Everyday example</a:t>
-                      </a:r>
-                    </a:p>
-                  </a:txBody>
-                  <a:tcPr marL="114300" marR="114300" marT="63500" marB="63500" anchor="ctr">
-                    <a:solidFill>
-                      <a:srgbClr val="FFFFFF"/>
-                    </a:solidFill>
-                  </a:tcPr>
-                </a:tc>
-                <a:tc>
-                  <a:txBody>
-                    <a:bodyPr wrap="square"/>
-                    <a:lstStyle/>
-                    <a:p>
-                      <a:pPr algn="l"/>
-                      <a:r>
-                        <a:rPr sz="1500">
-                          <a:solidFill>
-                            <a:srgbClr val="262626"/>
-                          </a:solidFill>
-                          <a:latin typeface="TT Hoves"/>
-                        </a:rPr>
-                        <a:t>a thrown ball</a:t>
-                      </a:r>
-                    </a:p>
-                  </a:txBody>
-                  <a:tcPr marL="114300" marR="114300" marT="63500" marB="63500" anchor="ctr">
-                    <a:solidFill>
-                      <a:srgbClr val="FFFFFF"/>
-                    </a:solidFill>
-                  </a:tcPr>
-                </a:tc>
-                <a:tc>
-                  <a:txBody>
-                    <a:bodyPr wrap="square"/>
-                    <a:lstStyle/>
-                    <a:p>
-                      <a:pPr algn="l"/>
-                      <a:r>
-                        <a:rPr sz="1500">
-                          <a:solidFill>
-                            <a:srgbClr val="262626"/>
-                          </a:solidFill>
-                          <a:latin typeface="TT Hoves"/>
-                        </a:rPr>
-                        <a:t>a car rounding a curve</a:t>
-                      </a:r>
-                    </a:p>
-                  </a:txBody>
-                  <a:tcPr marL="114300" marR="114300" marT="63500" marB="63500" anchor="ctr">
-                    <a:solidFill>
-                      <a:srgbClr val="FFFFFF"/>
-                    </a:solidFill>
-                  </a:tcPr>
-                </a:tc>
-              </a:tr>
-            </a:tbl>
-          </a:graphicData>
-        </a:graphic>
-      </p:graphicFrame>
-      <p:sp>
-        <p:nvSpPr>
-          <p:cNvPr id="15" name="TextBox 14"/>
-          <p:cNvSpPr txBox="1"/>
-          <p:nvPr/>
-        </p:nvSpPr>
-        <p:spPr>
-          <a:xfrm>
-            <a:off x="694944" y="4709160"/>
-            <a:ext cx="10789920" cy="1188720"/>
+            <a:off x="699058" y="1536192"/>
+            <a:ext cx="10671048" cy="4270248"/>
           </a:xfrm>
           <a:prstGeom prst="rect">
             <a:avLst/>
@@ -24240,68 +21121,185 @@
           <a:noFill/>
         </p:spPr>
         <p:txBody>
-          <a:bodyPr wrap="square" anchor="t">
-            <a:spAutoFit/>
+          <a:bodyPr wrap="square" rtlCol="0">
+            <a:noAutofit/>
           </a:bodyPr>
           <a:lstStyle/>
           <a:p>
-            <a:pPr algn="l" marL="320040" indent="-320040">
+            <a:pPr marL="457200" indent="-457200" algn="l">
               <a:lnSpc>
-                <a:spcPct val="103000"/>
+                <a:spcPct val="104000"/>
               </a:lnSpc>
               <a:spcBef>
                 <a:spcPts val="0"/>
               </a:spcBef>
               <a:spcAft>
-                <a:spcPts val="800"/>
+                <a:spcPts val="500"/>
               </a:spcAft>
-              <a:buClr>
-                <a:srgbClr val="F9770B"/>
-              </a:buClr>
-              <a:buFont typeface="Arial"/>
+              <a:buFont typeface="Arial" pitchFamily="34" charset="0"/>
               <a:buChar char="•"/>
             </a:pPr>
             <a:r>
-              <a:rPr sz="1700">
-                <a:solidFill>
-                  <a:srgbClr val="262626"/>
-                </a:solidFill>
+              <a:rPr sz="1900" b="1">
+                <a:latin typeface="TT Hoves"/>
+              </a:rPr>
+              <a:t>Cause of curving</a:t>
+            </a:r>
+            <a:r>
+              <a:rPr sz="1900">
+                <a:latin typeface="TT Hoves"/>
+              </a:rPr>
+              <a:t> — Projectile: gravity (constant, downward);  Circular: centripetal force (toward the center).</a:t>
+            </a:r>
+          </a:p>
+          <a:p>
+            <a:pPr marL="457200" indent="-457200" algn="l">
+              <a:lnSpc>
+                <a:spcPct val="104000"/>
+              </a:lnSpc>
+              <a:spcBef>
+                <a:spcPts val="0"/>
+              </a:spcBef>
+              <a:spcAft>
+                <a:spcPts val="500"/>
+              </a:spcAft>
+              <a:buFont typeface="Arial" pitchFamily="34" charset="0"/>
+              <a:buChar char="•"/>
+            </a:pPr>
+            <a:r>
+              <a:rPr sz="1900" b="1">
+                <a:latin typeface="TT Hoves"/>
+              </a:rPr>
+              <a:t>Speed</a:t>
+            </a:r>
+            <a:r>
+              <a:rPr sz="1900">
+                <a:latin typeface="TT Hoves"/>
+              </a:rPr>
+              <a:t> — Projectile: changes throughout flight;  Circular: stays constant.</a:t>
+            </a:r>
+          </a:p>
+          <a:p>
+            <a:pPr marL="457200" indent="-457200" algn="l">
+              <a:lnSpc>
+                <a:spcPct val="104000"/>
+              </a:lnSpc>
+              <a:spcBef>
+                <a:spcPts val="0"/>
+              </a:spcBef>
+              <a:spcAft>
+                <a:spcPts val="500"/>
+              </a:spcAft>
+              <a:buFont typeface="Arial" pitchFamily="34" charset="0"/>
+              <a:buChar char="•"/>
+            </a:pPr>
+            <a:r>
+              <a:rPr sz="1900" b="1">
+                <a:latin typeface="TT Hoves"/>
+              </a:rPr>
+              <a:t>Direction</a:t>
+            </a:r>
+            <a:r>
+              <a:rPr sz="1900">
+                <a:latin typeface="TT Hoves"/>
+              </a:rPr>
+              <a:t> — Projectile: changes;  Circular: changes.</a:t>
+            </a:r>
+          </a:p>
+          <a:p>
+            <a:pPr marL="457200" indent="-457200" algn="l">
+              <a:lnSpc>
+                <a:spcPct val="104000"/>
+              </a:lnSpc>
+              <a:spcBef>
+                <a:spcPts val="0"/>
+              </a:spcBef>
+              <a:spcAft>
+                <a:spcPts val="500"/>
+              </a:spcAft>
+              <a:buFont typeface="Arial" pitchFamily="34" charset="0"/>
+              <a:buChar char="•"/>
+            </a:pPr>
+            <a:r>
+              <a:rPr sz="1900" b="1">
+                <a:latin typeface="TT Hoves"/>
+              </a:rPr>
+              <a:t>Acceleration direction</a:t>
+            </a:r>
+            <a:r>
+              <a:rPr sz="1900">
+                <a:latin typeface="TT Hoves"/>
+              </a:rPr>
+              <a:t> — Projectile: always straight down;  Circular: always toward the center.</a:t>
+            </a:r>
+          </a:p>
+          <a:p>
+            <a:pPr marL="457200" indent="-457200" algn="l">
+              <a:lnSpc>
+                <a:spcPct val="104000"/>
+              </a:lnSpc>
+              <a:spcBef>
+                <a:spcPts val="0"/>
+              </a:spcBef>
+              <a:spcAft>
+                <a:spcPts val="500"/>
+              </a:spcAft>
+              <a:buFont typeface="Arial" pitchFamily="34" charset="0"/>
+              <a:buChar char="•"/>
+            </a:pPr>
+            <a:r>
+              <a:rPr sz="1900" b="1">
+                <a:latin typeface="TT Hoves"/>
+              </a:rPr>
+              <a:t>Everyday example</a:t>
+            </a:r>
+            <a:r>
+              <a:rPr sz="1900">
+                <a:latin typeface="TT Hoves"/>
+              </a:rPr>
+              <a:t> — Projectile: a thrown ball;  Circular: a car rounding a curve.</a:t>
+            </a:r>
+          </a:p>
+          <a:p>
+            <a:pPr marL="457200" indent="-457200" algn="l">
+              <a:lnSpc>
+                <a:spcPct val="104000"/>
+              </a:lnSpc>
+              <a:spcBef>
+                <a:spcPts val="0"/>
+              </a:spcBef>
+              <a:spcAft>
+                <a:spcPts val="500"/>
+              </a:spcAft>
+              <a:buFont typeface="Arial" pitchFamily="34" charset="0"/>
+              <a:buChar char="•"/>
+            </a:pPr>
+            <a:r>
+              <a:rPr sz="1900">
                 <a:latin typeface="TT Hoves"/>
               </a:rPr>
               <a:t>Both are genuinely </a:t>
             </a:r>
             <a:r>
-              <a:rPr sz="1700" i="1">
-                <a:solidFill>
-                  <a:srgbClr val="262626"/>
-                </a:solidFill>
+              <a:rPr sz="1900" i="1">
                 <a:latin typeface="TT Hoves"/>
               </a:rPr>
               <a:t>two-dimensional</a:t>
             </a:r>
             <a:r>
-              <a:rPr sz="1700">
-                <a:solidFill>
-                  <a:srgbClr val="262626"/>
-                </a:solidFill>
+              <a:rPr sz="1900">
                 <a:latin typeface="TT Hoves"/>
               </a:rPr>
               <a:t> motions — but the </a:t>
             </a:r>
             <a:r>
-              <a:rPr sz="1700" i="1">
-                <a:solidFill>
-                  <a:srgbClr val="262626"/>
-                </a:solidFill>
+              <a:rPr sz="1900" i="1">
                 <a:latin typeface="TT Hoves"/>
               </a:rPr>
               <a:t>reason</a:t>
             </a:r>
             <a:r>
-              <a:rPr sz="1700">
-                <a:solidFill>
-                  <a:srgbClr val="262626"/>
-                </a:solidFill>
+              <a:rPr sz="1900">
                 <a:latin typeface="TT Hoves"/>
               </a:rPr>
               <a:t> each one curves is completely different, and that difference is the entire story of today's lesson.</a:t>
